--- a/topic07-methods/unit-1/talk-5-more-on-methods/e-more-on-methods.pptx
+++ b/topic07-methods/unit-1/talk-5-more-on-methods/e-more-on-methods.pptx
@@ -5,7 +5,7 @@
     <p:sldMasterId id="2147483675" r:id="rId1"/>
   </p:sldMasterIdLst>
   <p:notesMasterIdLst>
-    <p:notesMasterId r:id="rId23"/>
+    <p:notesMasterId r:id="rId35"/>
   </p:notesMasterIdLst>
   <p:sldIdLst>
     <p:sldId id="394" r:id="rId2"/>
@@ -19,16 +19,28 @@
     <p:sldId id="401" r:id="rId10"/>
     <p:sldId id="421" r:id="rId11"/>
     <p:sldId id="403" r:id="rId12"/>
-    <p:sldId id="422" r:id="rId13"/>
-    <p:sldId id="417" r:id="rId14"/>
-    <p:sldId id="418" r:id="rId15"/>
-    <p:sldId id="367" r:id="rId16"/>
-    <p:sldId id="368" r:id="rId17"/>
-    <p:sldId id="369" r:id="rId18"/>
-    <p:sldId id="371" r:id="rId19"/>
-    <p:sldId id="372" r:id="rId20"/>
-    <p:sldId id="399" r:id="rId21"/>
-    <p:sldId id="347" r:id="rId22"/>
+    <p:sldId id="418" r:id="rId13"/>
+    <p:sldId id="256" r:id="rId14"/>
+    <p:sldId id="257" r:id="rId15"/>
+    <p:sldId id="424" r:id="rId16"/>
+    <p:sldId id="425" r:id="rId17"/>
+    <p:sldId id="426" r:id="rId18"/>
+    <p:sldId id="258" r:id="rId19"/>
+    <p:sldId id="259" r:id="rId20"/>
+    <p:sldId id="260" r:id="rId21"/>
+    <p:sldId id="261" r:id="rId22"/>
+    <p:sldId id="262" r:id="rId23"/>
+    <p:sldId id="427" r:id="rId24"/>
+    <p:sldId id="428" r:id="rId25"/>
+    <p:sldId id="429" r:id="rId26"/>
+    <p:sldId id="417" r:id="rId27"/>
+    <p:sldId id="367" r:id="rId28"/>
+    <p:sldId id="368" r:id="rId29"/>
+    <p:sldId id="369" r:id="rId30"/>
+    <p:sldId id="371" r:id="rId31"/>
+    <p:sldId id="372" r:id="rId32"/>
+    <p:sldId id="399" r:id="rId33"/>
+    <p:sldId id="347" r:id="rId34"/>
   </p:sldIdLst>
   <p:sldSz cx="12192000" cy="6858000"/>
   <p:notesSz cx="6858000" cy="9144000"/>
@@ -228,7 +240,7 @@
           <a:p>
             <a:fld id="{58C3D141-1E1C-433C-AD3A-CD56CBBB4F9F}" type="datetimeFigureOut">
               <a:rPr lang="en-IE" smtClean="0"/>
-              <a:t>30/10/2025</a:t>
+              <a:t>31/10/2025</a:t>
             </a:fld>
             <a:endParaRPr lang="en-IE"/>
           </a:p>
@@ -1196,7 +1208,7 @@
           <a:p>
             <a:fld id="{F963DB36-5273-45A5-A77C-FE9BE0779D84}" type="slidenum">
               <a:rPr lang="en-IE" smtClean="0"/>
-              <a:t>18</a:t>
+              <a:t>30</a:t>
             </a:fld>
             <a:endParaRPr lang="en-IE"/>
           </a:p>
@@ -1397,7 +1409,7 @@
             <a:fld id="{1D8BD707-D9CF-40AE-B4C6-C98DA3205C09}" type="datetimeFigureOut">
               <a:rPr lang="en-US" smtClean="0"/>
               <a:pPr/>
-              <a:t>10/30/25</a:t>
+              <a:t>10/31/25</a:t>
             </a:fld>
             <a:endParaRPr lang="en-US"/>
           </a:p>
@@ -1569,7 +1581,7 @@
             <a:fld id="{1D8BD707-D9CF-40AE-B4C6-C98DA3205C09}" type="datetimeFigureOut">
               <a:rPr lang="en-US" smtClean="0"/>
               <a:pPr/>
-              <a:t>10/30/25</a:t>
+              <a:t>10/31/25</a:t>
             </a:fld>
             <a:endParaRPr lang="en-US"/>
           </a:p>
@@ -1751,7 +1763,7 @@
             <a:fld id="{1D8BD707-D9CF-40AE-B4C6-C98DA3205C09}" type="datetimeFigureOut">
               <a:rPr lang="en-US" smtClean="0"/>
               <a:pPr/>
-              <a:t>10/30/25</a:t>
+              <a:t>10/31/25</a:t>
             </a:fld>
             <a:endParaRPr lang="en-US"/>
           </a:p>
@@ -2484,7 +2496,7 @@
             <a:fld id="{1D8BD707-D9CF-40AE-B4C6-C98DA3205C09}" type="datetimeFigureOut">
               <a:rPr lang="en-US" smtClean="0"/>
               <a:pPr/>
-              <a:t>10/30/25</a:t>
+              <a:t>10/31/25</a:t>
             </a:fld>
             <a:endParaRPr lang="en-US"/>
           </a:p>
@@ -3034,7 +3046,7 @@
             <a:fld id="{1D8BD707-D9CF-40AE-B4C6-C98DA3205C09}" type="datetimeFigureOut">
               <a:rPr lang="en-US" smtClean="0"/>
               <a:pPr/>
-              <a:t>10/30/25</a:t>
+              <a:t>10/31/25</a:t>
             </a:fld>
             <a:endParaRPr lang="en-US"/>
           </a:p>
@@ -3335,7 +3347,7 @@
             <a:fld id="{1D8BD707-D9CF-40AE-B4C6-C98DA3205C09}" type="datetimeFigureOut">
               <a:rPr lang="en-US" smtClean="0"/>
               <a:pPr/>
-              <a:t>10/30/25</a:t>
+              <a:t>10/31/25</a:t>
             </a:fld>
             <a:endParaRPr lang="en-US"/>
           </a:p>
@@ -4047,7 +4059,7 @@
             <a:fld id="{1D8BD707-D9CF-40AE-B4C6-C98DA3205C09}" type="datetimeFigureOut">
               <a:rPr lang="en-US" smtClean="0"/>
               <a:pPr/>
-              <a:t>10/30/25</a:t>
+              <a:t>10/31/25</a:t>
             </a:fld>
             <a:endParaRPr lang="en-US"/>
           </a:p>
@@ -4418,7 +4430,7 @@
             <a:fld id="{1D8BD707-D9CF-40AE-B4C6-C98DA3205C09}" type="datetimeFigureOut">
               <a:rPr lang="en-US" smtClean="0"/>
               <a:pPr/>
-              <a:t>10/30/25</a:t>
+              <a:t>10/31/25</a:t>
             </a:fld>
             <a:endParaRPr lang="en-US"/>
           </a:p>
@@ -4796,7 +4808,7 @@
             <a:fld id="{1D8BD707-D9CF-40AE-B4C6-C98DA3205C09}" type="datetimeFigureOut">
               <a:rPr lang="en-US" smtClean="0"/>
               <a:pPr/>
-              <a:t>10/30/25</a:t>
+              <a:t>10/31/25</a:t>
             </a:fld>
             <a:endParaRPr lang="en-US"/>
           </a:p>
@@ -5075,7 +5087,7 @@
             <a:fld id="{1D8BD707-D9CF-40AE-B4C6-C98DA3205C09}" type="datetimeFigureOut">
               <a:rPr lang="en-US" smtClean="0"/>
               <a:pPr/>
-              <a:t>10/30/25</a:t>
+              <a:t>10/31/25</a:t>
             </a:fld>
             <a:endParaRPr lang="en-US"/>
           </a:p>
@@ -5334,7 +5346,7 @@
             <a:fld id="{1D8BD707-D9CF-40AE-B4C6-C98DA3205C09}" type="datetimeFigureOut">
               <a:rPr lang="en-US" smtClean="0"/>
               <a:pPr/>
-              <a:t>10/30/25</a:t>
+              <a:t>10/31/25</a:t>
             </a:fld>
             <a:endParaRPr lang="en-US"/>
           </a:p>
@@ -5554,7 +5566,7 @@
             <a:fld id="{1D8BD707-D9CF-40AE-B4C6-C98DA3205C09}" type="datetimeFigureOut">
               <a:rPr lang="en-US" smtClean="0"/>
               <a:pPr/>
-              <a:t>10/30/25</a:t>
+              <a:t>10/31/25</a:t>
             </a:fld>
             <a:endParaRPr lang="en-US"/>
           </a:p>
@@ -7365,7 +7377,7 @@
         <p:cNvPr id="1" name="">
           <a:extLst>
             <a:ext uri="{FF2B5EF4-FFF2-40B4-BE49-F238E27FC236}">
-              <a16:creationId xmlns:a16="http://schemas.microsoft.com/office/drawing/2014/main" id="{1F07FCF6-7A3D-DC03-32FE-4A7207A59AAD}"/>
+              <a16:creationId xmlns:a16="http://schemas.microsoft.com/office/drawing/2014/main" id="{92AE77AA-8379-7B50-64A8-7D131788DDB2}"/>
             </a:ext>
           </a:extLst>
         </p:cNvPr>
@@ -7385,7 +7397,7 @@
           <p:cNvPr id="2" name="Title 1">
             <a:extLst>
               <a:ext uri="{FF2B5EF4-FFF2-40B4-BE49-F238E27FC236}">
-                <a16:creationId xmlns:a16="http://schemas.microsoft.com/office/drawing/2014/main" id="{A69A55EC-481C-41EF-0951-17EDDB571FD9}"/>
+                <a16:creationId xmlns:a16="http://schemas.microsoft.com/office/drawing/2014/main" id="{38F6A7BE-B445-3EC0-0B6C-38AAA0C6D34F}"/>
               </a:ext>
             </a:extLst>
           </p:cNvPr>
@@ -7414,7 +7426,7 @@
           <p:cNvPr id="7" name="Rectangle 6">
             <a:extLst>
               <a:ext uri="{FF2B5EF4-FFF2-40B4-BE49-F238E27FC236}">
-                <a16:creationId xmlns:a16="http://schemas.microsoft.com/office/drawing/2014/main" id="{120E8F95-16BA-4034-C301-285B59A485D1}"/>
+                <a16:creationId xmlns:a16="http://schemas.microsoft.com/office/drawing/2014/main" id="{000A1296-C508-5CA6-C678-96070AAFA493}"/>
               </a:ext>
             </a:extLst>
           </p:cNvPr>
@@ -7423,7 +7435,7 @@
         </p:nvSpPr>
         <p:spPr>
           <a:xfrm>
-            <a:off x="2209800" y="4267200"/>
+            <a:off x="1752600" y="4800600"/>
             <a:ext cx="4038600" cy="457200"/>
           </a:xfrm>
           <a:prstGeom prst="rect">
@@ -7466,7 +7478,7 @@
           <p:cNvPr id="6" name="Content Placeholder 4">
             <a:extLst>
               <a:ext uri="{FF2B5EF4-FFF2-40B4-BE49-F238E27FC236}">
-                <a16:creationId xmlns:a16="http://schemas.microsoft.com/office/drawing/2014/main" id="{1DCD61F7-CF1D-E693-2B6F-77EF96D2E092}"/>
+                <a16:creationId xmlns:a16="http://schemas.microsoft.com/office/drawing/2014/main" id="{1CABE85C-74E8-C440-60DB-5AB051779FA6}"/>
               </a:ext>
             </a:extLst>
           </p:cNvPr>
@@ -7477,7 +7489,7 @@
         </p:nvSpPr>
         <p:spPr>
           <a:xfrm>
-            <a:off x="2205037" y="1752600"/>
+            <a:off x="1714500" y="2327274"/>
             <a:ext cx="8763000" cy="4525963"/>
           </a:xfrm>
           <a:prstGeom prst="rect">
@@ -7712,7 +7724,7 @@
     </p:spTree>
     <p:extLst>
       <p:ext uri="{BB962C8B-B14F-4D97-AF65-F5344CB8AC3E}">
-        <p14:creationId xmlns:p14="http://schemas.microsoft.com/office/powerpoint/2010/main" val="387052068"/>
+        <p14:creationId xmlns:p14="http://schemas.microsoft.com/office/powerpoint/2010/main" val="824540014"/>
       </p:ext>
     </p:extLst>
   </p:cSld>
@@ -7809,6 +7821,5392 @@
 </file>
 
 <file path=ppt/slides/slide13.xml><?xml version="1.0" encoding="utf-8"?>
+<p:sld xmlns:a="http://schemas.openxmlformats.org/drawingml/2006/main" xmlns:r="http://schemas.openxmlformats.org/officeDocument/2006/relationships" xmlns:p="http://schemas.openxmlformats.org/presentationml/2006/main">
+  <p:cSld>
+    <p:bg>
+      <p:bgPr>
+        <a:solidFill>
+          <a:schemeClr val="bg1">
+            <a:lumMod val="85000"/>
+          </a:schemeClr>
+        </a:solidFill>
+        <a:effectLst/>
+      </p:bgPr>
+    </p:bg>
+    <p:spTree>
+      <p:nvGrpSpPr>
+        <p:cNvPr id="1" name=""/>
+        <p:cNvGrpSpPr/>
+        <p:nvPr/>
+      </p:nvGrpSpPr>
+      <p:grpSpPr>
+        <a:xfrm>
+          <a:off x="0" y="0"/>
+          <a:ext cx="0" cy="0"/>
+          <a:chOff x="0" y="0"/>
+          <a:chExt cx="0" cy="0"/>
+        </a:xfrm>
+      </p:grpSpPr>
+      <p:sp>
+        <p:nvSpPr>
+          <p:cNvPr id="2" name="Title 1"/>
+          <p:cNvSpPr>
+            <a:spLocks noGrp="1"/>
+          </p:cNvSpPr>
+          <p:nvPr>
+            <p:ph type="title"/>
+          </p:nvPr>
+        </p:nvSpPr>
+        <p:spPr/>
+        <p:txBody>
+          <a:bodyPr/>
+          <a:lstStyle/>
+          <a:p>
+            <a:r>
+              <a:t>What is a Boolean Method?</a:t>
+            </a:r>
+          </a:p>
+        </p:txBody>
+      </p:sp>
+      <p:sp>
+        <p:nvSpPr>
+          <p:cNvPr id="3" name="Content Placeholder 2"/>
+          <p:cNvSpPr>
+            <a:spLocks noGrp="1"/>
+          </p:cNvSpPr>
+          <p:nvPr>
+            <p:ph idx="1"/>
+          </p:nvPr>
+        </p:nvSpPr>
+        <p:spPr/>
+        <p:txBody>
+          <a:bodyPr wrap="square">
+            <a:normAutofit lnSpcReduction="10000"/>
+          </a:bodyPr>
+          <a:lstStyle/>
+          <a:p>
+            <a:endParaRPr dirty="0"/>
+          </a:p>
+          <a:p>
+            <a:pPr>
+              <a:defRPr sz="2000"/>
+            </a:pPr>
+            <a:r>
+              <a:rPr sz="4000" dirty="0"/>
+              <a:t>A Boolean method returns a </a:t>
+            </a:r>
+            <a:r>
+              <a:rPr sz="4000" dirty="0" err="1"/>
+              <a:t>boolean</a:t>
+            </a:r>
+            <a:r>
+              <a:rPr sz="4000" dirty="0"/>
+              <a:t> value — either true or false.</a:t>
+            </a:r>
+          </a:p>
+          <a:p>
+            <a:pPr>
+              <a:defRPr sz="2000"/>
+            </a:pPr>
+            <a:r>
+              <a:rPr sz="4000" dirty="0"/>
+              <a:t>They are used to check conditions and make decisions in a program.</a:t>
+            </a:r>
+          </a:p>
+          <a:p>
+            <a:pPr>
+              <a:defRPr sz="2000"/>
+            </a:pPr>
+            <a:r>
+              <a:rPr sz="4000" dirty="0"/>
+              <a:t>Examples: checking if a number is even, verifying a temperature range, or determining permissions.</a:t>
+            </a:r>
+          </a:p>
+        </p:txBody>
+      </p:sp>
+    </p:spTree>
+  </p:cSld>
+  <p:clrMapOvr>
+    <a:overrideClrMapping bg1="lt1" tx1="dk1" bg2="lt2" tx2="dk2" accent1="accent1" accent2="accent2" accent3="accent3" accent4="accent4" accent5="accent5" accent6="accent6" hlink="hlink" folHlink="folHlink"/>
+  </p:clrMapOvr>
+  <p:timing>
+    <p:tnLst>
+      <p:par>
+        <p:cTn id="1" dur="indefinite" restart="never" nodeType="tmRoot">
+          <p:childTnLst>
+            <p:seq concurrent="1" nextAc="seek">
+              <p:cTn id="2" dur="indefinite" nodeType="mainSeq">
+                <p:childTnLst>
+                  <p:par>
+                    <p:cTn id="3" fill="hold">
+                      <p:stCondLst>
+                        <p:cond delay="indefinite"/>
+                      </p:stCondLst>
+                      <p:childTnLst>
+                        <p:par>
+                          <p:cTn id="4" fill="hold">
+                            <p:stCondLst>
+                              <p:cond delay="0"/>
+                            </p:stCondLst>
+                            <p:childTnLst>
+                              <p:par>
+                                <p:cTn id="5" presetID="2" presetClass="entr" presetSubtype="4" fill="hold" nodeType="clickEffect">
+                                  <p:stCondLst>
+                                    <p:cond delay="0"/>
+                                  </p:stCondLst>
+                                  <p:childTnLst>
+                                    <p:set>
+                                      <p:cBhvr>
+                                        <p:cTn id="6" dur="1" fill="hold">
+                                          <p:stCondLst>
+                                            <p:cond delay="0"/>
+                                          </p:stCondLst>
+                                        </p:cTn>
+                                        <p:tgtEl>
+                                          <p:spTgt spid="3">
+                                            <p:txEl>
+                                              <p:pRg st="2" end="2"/>
+                                            </p:txEl>
+                                          </p:spTgt>
+                                        </p:tgtEl>
+                                        <p:attrNameLst>
+                                          <p:attrName>style.visibility</p:attrName>
+                                        </p:attrNameLst>
+                                      </p:cBhvr>
+                                      <p:to>
+                                        <p:strVal val="visible"/>
+                                      </p:to>
+                                    </p:set>
+                                    <p:anim calcmode="lin" valueType="num">
+                                      <p:cBhvr additive="base">
+                                        <p:cTn id="7" dur="500" fill="hold"/>
+                                        <p:tgtEl>
+                                          <p:spTgt spid="3">
+                                            <p:txEl>
+                                              <p:pRg st="2" end="2"/>
+                                            </p:txEl>
+                                          </p:spTgt>
+                                        </p:tgtEl>
+                                        <p:attrNameLst>
+                                          <p:attrName>ppt_x</p:attrName>
+                                        </p:attrNameLst>
+                                      </p:cBhvr>
+                                      <p:tavLst>
+                                        <p:tav tm="0">
+                                          <p:val>
+                                            <p:strVal val="#ppt_x"/>
+                                          </p:val>
+                                        </p:tav>
+                                        <p:tav tm="100000">
+                                          <p:val>
+                                            <p:strVal val="#ppt_x"/>
+                                          </p:val>
+                                        </p:tav>
+                                      </p:tavLst>
+                                    </p:anim>
+                                    <p:anim calcmode="lin" valueType="num">
+                                      <p:cBhvr additive="base">
+                                        <p:cTn id="8" dur="500" fill="hold"/>
+                                        <p:tgtEl>
+                                          <p:spTgt spid="3">
+                                            <p:txEl>
+                                              <p:pRg st="2" end="2"/>
+                                            </p:txEl>
+                                          </p:spTgt>
+                                        </p:tgtEl>
+                                        <p:attrNameLst>
+                                          <p:attrName>ppt_y</p:attrName>
+                                        </p:attrNameLst>
+                                      </p:cBhvr>
+                                      <p:tavLst>
+                                        <p:tav tm="0">
+                                          <p:val>
+                                            <p:strVal val="1+#ppt_h/2"/>
+                                          </p:val>
+                                        </p:tav>
+                                        <p:tav tm="100000">
+                                          <p:val>
+                                            <p:strVal val="#ppt_y"/>
+                                          </p:val>
+                                        </p:tav>
+                                      </p:tavLst>
+                                    </p:anim>
+                                  </p:childTnLst>
+                                </p:cTn>
+                              </p:par>
+                            </p:childTnLst>
+                          </p:cTn>
+                        </p:par>
+                      </p:childTnLst>
+                    </p:cTn>
+                  </p:par>
+                  <p:par>
+                    <p:cTn id="9" fill="hold">
+                      <p:stCondLst>
+                        <p:cond delay="indefinite"/>
+                      </p:stCondLst>
+                      <p:childTnLst>
+                        <p:par>
+                          <p:cTn id="10" fill="hold">
+                            <p:stCondLst>
+                              <p:cond delay="0"/>
+                            </p:stCondLst>
+                            <p:childTnLst>
+                              <p:par>
+                                <p:cTn id="11" presetID="2" presetClass="entr" presetSubtype="4" fill="hold" nodeType="clickEffect">
+                                  <p:stCondLst>
+                                    <p:cond delay="0"/>
+                                  </p:stCondLst>
+                                  <p:childTnLst>
+                                    <p:set>
+                                      <p:cBhvr>
+                                        <p:cTn id="12" dur="1" fill="hold">
+                                          <p:stCondLst>
+                                            <p:cond delay="0"/>
+                                          </p:stCondLst>
+                                        </p:cTn>
+                                        <p:tgtEl>
+                                          <p:spTgt spid="3">
+                                            <p:txEl>
+                                              <p:pRg st="3" end="3"/>
+                                            </p:txEl>
+                                          </p:spTgt>
+                                        </p:tgtEl>
+                                        <p:attrNameLst>
+                                          <p:attrName>style.visibility</p:attrName>
+                                        </p:attrNameLst>
+                                      </p:cBhvr>
+                                      <p:to>
+                                        <p:strVal val="visible"/>
+                                      </p:to>
+                                    </p:set>
+                                    <p:anim calcmode="lin" valueType="num">
+                                      <p:cBhvr additive="base">
+                                        <p:cTn id="13" dur="500" fill="hold"/>
+                                        <p:tgtEl>
+                                          <p:spTgt spid="3">
+                                            <p:txEl>
+                                              <p:pRg st="3" end="3"/>
+                                            </p:txEl>
+                                          </p:spTgt>
+                                        </p:tgtEl>
+                                        <p:attrNameLst>
+                                          <p:attrName>ppt_x</p:attrName>
+                                        </p:attrNameLst>
+                                      </p:cBhvr>
+                                      <p:tavLst>
+                                        <p:tav tm="0">
+                                          <p:val>
+                                            <p:strVal val="#ppt_x"/>
+                                          </p:val>
+                                        </p:tav>
+                                        <p:tav tm="100000">
+                                          <p:val>
+                                            <p:strVal val="#ppt_x"/>
+                                          </p:val>
+                                        </p:tav>
+                                      </p:tavLst>
+                                    </p:anim>
+                                    <p:anim calcmode="lin" valueType="num">
+                                      <p:cBhvr additive="base">
+                                        <p:cTn id="14" dur="500" fill="hold"/>
+                                        <p:tgtEl>
+                                          <p:spTgt spid="3">
+                                            <p:txEl>
+                                              <p:pRg st="3" end="3"/>
+                                            </p:txEl>
+                                          </p:spTgt>
+                                        </p:tgtEl>
+                                        <p:attrNameLst>
+                                          <p:attrName>ppt_y</p:attrName>
+                                        </p:attrNameLst>
+                                      </p:cBhvr>
+                                      <p:tavLst>
+                                        <p:tav tm="0">
+                                          <p:val>
+                                            <p:strVal val="1+#ppt_h/2"/>
+                                          </p:val>
+                                        </p:tav>
+                                        <p:tav tm="100000">
+                                          <p:val>
+                                            <p:strVal val="#ppt_y"/>
+                                          </p:val>
+                                        </p:tav>
+                                      </p:tavLst>
+                                    </p:anim>
+                                  </p:childTnLst>
+                                </p:cTn>
+                              </p:par>
+                            </p:childTnLst>
+                          </p:cTn>
+                        </p:par>
+                      </p:childTnLst>
+                    </p:cTn>
+                  </p:par>
+                </p:childTnLst>
+              </p:cTn>
+              <p:prevCondLst>
+                <p:cond evt="onPrev" delay="0">
+                  <p:tgtEl>
+                    <p:sldTgt/>
+                  </p:tgtEl>
+                </p:cond>
+              </p:prevCondLst>
+              <p:nextCondLst>
+                <p:cond evt="onNext" delay="0">
+                  <p:tgtEl>
+                    <p:sldTgt/>
+                  </p:tgtEl>
+                </p:cond>
+              </p:nextCondLst>
+            </p:seq>
+          </p:childTnLst>
+        </p:cTn>
+      </p:par>
+    </p:tnLst>
+  </p:timing>
+</p:sld>
+</file>
+
+<file path=ppt/slides/slide14.xml><?xml version="1.0" encoding="utf-8"?>
+<p:sld xmlns:a="http://schemas.openxmlformats.org/drawingml/2006/main" xmlns:r="http://schemas.openxmlformats.org/officeDocument/2006/relationships" xmlns:p="http://schemas.openxmlformats.org/presentationml/2006/main">
+  <p:cSld>
+    <p:spTree>
+      <p:nvGrpSpPr>
+        <p:cNvPr id="1" name=""/>
+        <p:cNvGrpSpPr/>
+        <p:nvPr/>
+      </p:nvGrpSpPr>
+      <p:grpSpPr>
+        <a:xfrm>
+          <a:off x="0" y="0"/>
+          <a:ext cx="0" cy="0"/>
+          <a:chOff x="0" y="0"/>
+          <a:chExt cx="0" cy="0"/>
+        </a:xfrm>
+      </p:grpSpPr>
+      <p:sp>
+        <p:nvSpPr>
+          <p:cNvPr id="2" name="Title 1"/>
+          <p:cNvSpPr>
+            <a:spLocks noGrp="1"/>
+          </p:cNvSpPr>
+          <p:nvPr>
+            <p:ph type="title"/>
+          </p:nvPr>
+        </p:nvSpPr>
+        <p:spPr/>
+        <p:txBody>
+          <a:bodyPr/>
+          <a:lstStyle/>
+          <a:p>
+            <a:r>
+              <a:t>Syntax – Defining a Boolean Method</a:t>
+            </a:r>
+          </a:p>
+        </p:txBody>
+      </p:sp>
+      <p:sp>
+        <p:nvSpPr>
+          <p:cNvPr id="3" name="Content Placeholder 2"/>
+          <p:cNvSpPr>
+            <a:spLocks noGrp="1"/>
+          </p:cNvSpPr>
+          <p:nvPr>
+            <p:ph idx="1"/>
+          </p:nvPr>
+        </p:nvSpPr>
+        <p:spPr>
+          <a:xfrm>
+            <a:off x="1905000" y="4572000"/>
+            <a:ext cx="7924800" cy="2163762"/>
+          </a:xfrm>
+        </p:spPr>
+        <p:txBody>
+          <a:bodyPr wrap="square">
+            <a:normAutofit/>
+          </a:bodyPr>
+          <a:lstStyle/>
+          <a:p>
+            <a:endParaRPr dirty="0"/>
+          </a:p>
+          <a:p>
+            <a:pPr>
+              <a:defRPr sz="2000"/>
+            </a:pPr>
+            <a:r>
+              <a:rPr sz="2800" dirty="0"/>
+              <a:t>public </a:t>
+            </a:r>
+            <a:r>
+              <a:rPr sz="2800" dirty="0" err="1"/>
+              <a:t>boolean</a:t>
+            </a:r>
+            <a:r>
+              <a:rPr sz="2800" dirty="0"/>
+              <a:t> → method returns a </a:t>
+            </a:r>
+            <a:r>
+              <a:rPr lang="en-IE" sz="2800" dirty="0"/>
+              <a:t>B</a:t>
+            </a:r>
+            <a:r>
+              <a:rPr sz="2800" dirty="0" err="1"/>
+              <a:t>oolean</a:t>
+            </a:r>
+            <a:endParaRPr lang="en-IE" sz="2800" dirty="0"/>
+          </a:p>
+          <a:p>
+            <a:pPr>
+              <a:defRPr sz="2000"/>
+            </a:pPr>
+            <a:r>
+              <a:rPr sz="2800" dirty="0" err="1"/>
+              <a:t>isEven</a:t>
+            </a:r>
+            <a:r>
+              <a:rPr sz="2800" dirty="0"/>
+              <a:t> → typically starts with is, has, or can</a:t>
+            </a:r>
+          </a:p>
+          <a:p>
+            <a:pPr marL="0" indent="0">
+              <a:buNone/>
+              <a:defRPr sz="2000"/>
+            </a:pPr>
+            <a:r>
+              <a:rPr lang="en-IE" sz="2800" dirty="0"/>
+              <a:t>    </a:t>
+            </a:r>
+            <a:r>
+              <a:rPr sz="2800" dirty="0"/>
+              <a:t>return true / false → gives back the Boolean result</a:t>
+            </a:r>
+          </a:p>
+        </p:txBody>
+      </p:sp>
+      <p:sp>
+        <p:nvSpPr>
+          <p:cNvPr id="5" name="TextBox 4">
+            <a:extLst>
+              <a:ext uri="{FF2B5EF4-FFF2-40B4-BE49-F238E27FC236}">
+                <a16:creationId xmlns:a16="http://schemas.microsoft.com/office/drawing/2014/main" id="{16145704-CAF7-523B-45BB-06BF2034C745}"/>
+              </a:ext>
+            </a:extLst>
+          </p:cNvPr>
+          <p:cNvSpPr txBox="1"/>
+          <p:nvPr/>
+        </p:nvSpPr>
+        <p:spPr>
+          <a:xfrm>
+            <a:off x="2362200" y="1752634"/>
+            <a:ext cx="5715000" cy="2554545"/>
+          </a:xfrm>
+          <a:prstGeom prst="rect">
+            <a:avLst/>
+          </a:prstGeom>
+          <a:solidFill>
+            <a:schemeClr val="accent6">
+              <a:lumMod val="40000"/>
+              <a:lumOff val="60000"/>
+            </a:schemeClr>
+          </a:solidFill>
+          <a:ln>
+            <a:solidFill>
+              <a:schemeClr val="tx1"/>
+            </a:solidFill>
+          </a:ln>
+        </p:spPr>
+        <p:txBody>
+          <a:bodyPr wrap="square" rtlCol="0">
+            <a:spAutoFit/>
+          </a:bodyPr>
+          <a:lstStyle/>
+          <a:p>
+            <a:pPr>
+              <a:defRPr sz="2000"/>
+            </a:pPr>
+            <a:r>
+              <a:rPr lang="en-IE" dirty="0">
+                <a:latin typeface="Lucida Sans Typewriter" panose="020B0509030504030204" pitchFamily="49" charset="77"/>
+              </a:rPr>
+              <a:t>public </a:t>
+            </a:r>
+            <a:r>
+              <a:rPr lang="en-IE" dirty="0" err="1">
+                <a:latin typeface="Lucida Sans Typewriter" panose="020B0509030504030204" pitchFamily="49" charset="77"/>
+              </a:rPr>
+              <a:t>boolean</a:t>
+            </a:r>
+            <a:r>
+              <a:rPr lang="en-IE" dirty="0">
+                <a:latin typeface="Lucida Sans Typewriter" panose="020B0509030504030204" pitchFamily="49" charset="77"/>
+              </a:rPr>
+              <a:t> </a:t>
+            </a:r>
+            <a:r>
+              <a:rPr lang="en-IE" dirty="0" err="1">
+                <a:latin typeface="Lucida Sans Typewriter" panose="020B0509030504030204" pitchFamily="49" charset="77"/>
+              </a:rPr>
+              <a:t>isEven</a:t>
+            </a:r>
+            <a:r>
+              <a:rPr lang="en-IE" dirty="0">
+                <a:latin typeface="Lucida Sans Typewriter" panose="020B0509030504030204" pitchFamily="49" charset="77"/>
+              </a:rPr>
+              <a:t>(int number) {</a:t>
+            </a:r>
+          </a:p>
+          <a:p>
+            <a:pPr>
+              <a:defRPr sz="2000"/>
+            </a:pPr>
+            <a:r>
+              <a:rPr lang="en-IE" dirty="0">
+                <a:latin typeface="Lucida Sans Typewriter" panose="020B0509030504030204" pitchFamily="49" charset="77"/>
+              </a:rPr>
+              <a:t>    if (number % 2 == 0) { </a:t>
+            </a:r>
+          </a:p>
+          <a:p>
+            <a:pPr>
+              <a:defRPr sz="2000"/>
+            </a:pPr>
+            <a:r>
+              <a:rPr lang="en-IE" dirty="0">
+                <a:latin typeface="Lucida Sans Typewriter" panose="020B0509030504030204" pitchFamily="49" charset="77"/>
+              </a:rPr>
+              <a:t>        return true; </a:t>
+            </a:r>
+          </a:p>
+          <a:p>
+            <a:pPr>
+              <a:defRPr sz="2000"/>
+            </a:pPr>
+            <a:r>
+              <a:rPr lang="en-IE" dirty="0">
+                <a:latin typeface="Lucida Sans Typewriter" panose="020B0509030504030204" pitchFamily="49" charset="77"/>
+              </a:rPr>
+              <a:t>       }</a:t>
+            </a:r>
+          </a:p>
+          <a:p>
+            <a:pPr>
+              <a:defRPr sz="2000"/>
+            </a:pPr>
+            <a:r>
+              <a:rPr lang="en-IE" dirty="0">
+                <a:latin typeface="Lucida Sans Typewriter" panose="020B0509030504030204" pitchFamily="49" charset="77"/>
+              </a:rPr>
+              <a:t>    else {</a:t>
+            </a:r>
+          </a:p>
+          <a:p>
+            <a:pPr>
+              <a:defRPr sz="2000"/>
+            </a:pPr>
+            <a:r>
+              <a:rPr lang="en-IE" dirty="0">
+                <a:latin typeface="Lucida Sans Typewriter" panose="020B0509030504030204" pitchFamily="49" charset="77"/>
+              </a:rPr>
+              <a:t>       return false;</a:t>
+            </a:r>
+          </a:p>
+          <a:p>
+            <a:pPr>
+              <a:defRPr sz="2000"/>
+            </a:pPr>
+            <a:r>
+              <a:rPr lang="en-IE" dirty="0">
+                <a:latin typeface="Lucida Sans Typewriter" panose="020B0509030504030204" pitchFamily="49" charset="77"/>
+              </a:rPr>
+              <a:t>    }</a:t>
+            </a:r>
+          </a:p>
+          <a:p>
+            <a:pPr>
+              <a:defRPr sz="2000"/>
+            </a:pPr>
+            <a:r>
+              <a:rPr lang="en-IE" dirty="0">
+                <a:latin typeface="Lucida Sans Typewriter" panose="020B0509030504030204" pitchFamily="49" charset="77"/>
+              </a:rPr>
+              <a:t>}</a:t>
+            </a:r>
+          </a:p>
+        </p:txBody>
+      </p:sp>
+    </p:spTree>
+  </p:cSld>
+  <p:clrMapOvr>
+    <a:masterClrMapping/>
+  </p:clrMapOvr>
+  <p:timing>
+    <p:tnLst>
+      <p:par>
+        <p:cTn id="1" dur="indefinite" restart="never" nodeType="tmRoot">
+          <p:childTnLst>
+            <p:seq concurrent="1" nextAc="seek">
+              <p:cTn id="2" dur="indefinite" nodeType="mainSeq">
+                <p:childTnLst>
+                  <p:par>
+                    <p:cTn id="3" fill="hold">
+                      <p:stCondLst>
+                        <p:cond delay="indefinite"/>
+                      </p:stCondLst>
+                      <p:childTnLst>
+                        <p:par>
+                          <p:cTn id="4" fill="hold">
+                            <p:stCondLst>
+                              <p:cond delay="0"/>
+                            </p:stCondLst>
+                            <p:childTnLst>
+                              <p:par>
+                                <p:cTn id="5" presetID="2" presetClass="entr" presetSubtype="4" fill="hold" nodeType="clickEffect">
+                                  <p:stCondLst>
+                                    <p:cond delay="0"/>
+                                  </p:stCondLst>
+                                  <p:childTnLst>
+                                    <p:set>
+                                      <p:cBhvr>
+                                        <p:cTn id="6" dur="1" fill="hold">
+                                          <p:stCondLst>
+                                            <p:cond delay="0"/>
+                                          </p:stCondLst>
+                                        </p:cTn>
+                                        <p:tgtEl>
+                                          <p:spTgt spid="3">
+                                            <p:txEl>
+                                              <p:pRg st="1" end="1"/>
+                                            </p:txEl>
+                                          </p:spTgt>
+                                        </p:tgtEl>
+                                        <p:attrNameLst>
+                                          <p:attrName>style.visibility</p:attrName>
+                                        </p:attrNameLst>
+                                      </p:cBhvr>
+                                      <p:to>
+                                        <p:strVal val="visible"/>
+                                      </p:to>
+                                    </p:set>
+                                    <p:anim calcmode="lin" valueType="num">
+                                      <p:cBhvr additive="base">
+                                        <p:cTn id="7" dur="500" fill="hold"/>
+                                        <p:tgtEl>
+                                          <p:spTgt spid="3">
+                                            <p:txEl>
+                                              <p:pRg st="1" end="1"/>
+                                            </p:txEl>
+                                          </p:spTgt>
+                                        </p:tgtEl>
+                                        <p:attrNameLst>
+                                          <p:attrName>ppt_x</p:attrName>
+                                        </p:attrNameLst>
+                                      </p:cBhvr>
+                                      <p:tavLst>
+                                        <p:tav tm="0">
+                                          <p:val>
+                                            <p:strVal val="#ppt_x"/>
+                                          </p:val>
+                                        </p:tav>
+                                        <p:tav tm="100000">
+                                          <p:val>
+                                            <p:strVal val="#ppt_x"/>
+                                          </p:val>
+                                        </p:tav>
+                                      </p:tavLst>
+                                    </p:anim>
+                                    <p:anim calcmode="lin" valueType="num">
+                                      <p:cBhvr additive="base">
+                                        <p:cTn id="8" dur="500" fill="hold"/>
+                                        <p:tgtEl>
+                                          <p:spTgt spid="3">
+                                            <p:txEl>
+                                              <p:pRg st="1" end="1"/>
+                                            </p:txEl>
+                                          </p:spTgt>
+                                        </p:tgtEl>
+                                        <p:attrNameLst>
+                                          <p:attrName>ppt_y</p:attrName>
+                                        </p:attrNameLst>
+                                      </p:cBhvr>
+                                      <p:tavLst>
+                                        <p:tav tm="0">
+                                          <p:val>
+                                            <p:strVal val="1+#ppt_h/2"/>
+                                          </p:val>
+                                        </p:tav>
+                                        <p:tav tm="100000">
+                                          <p:val>
+                                            <p:strVal val="#ppt_y"/>
+                                          </p:val>
+                                        </p:tav>
+                                      </p:tavLst>
+                                    </p:anim>
+                                  </p:childTnLst>
+                                </p:cTn>
+                              </p:par>
+                            </p:childTnLst>
+                          </p:cTn>
+                        </p:par>
+                      </p:childTnLst>
+                    </p:cTn>
+                  </p:par>
+                  <p:par>
+                    <p:cTn id="9" fill="hold">
+                      <p:stCondLst>
+                        <p:cond delay="indefinite"/>
+                      </p:stCondLst>
+                      <p:childTnLst>
+                        <p:par>
+                          <p:cTn id="10" fill="hold">
+                            <p:stCondLst>
+                              <p:cond delay="0"/>
+                            </p:stCondLst>
+                            <p:childTnLst>
+                              <p:par>
+                                <p:cTn id="11" presetID="2" presetClass="entr" presetSubtype="4" fill="hold" nodeType="clickEffect">
+                                  <p:stCondLst>
+                                    <p:cond delay="0"/>
+                                  </p:stCondLst>
+                                  <p:childTnLst>
+                                    <p:set>
+                                      <p:cBhvr>
+                                        <p:cTn id="12" dur="1" fill="hold">
+                                          <p:stCondLst>
+                                            <p:cond delay="0"/>
+                                          </p:stCondLst>
+                                        </p:cTn>
+                                        <p:tgtEl>
+                                          <p:spTgt spid="3">
+                                            <p:txEl>
+                                              <p:pRg st="2" end="2"/>
+                                            </p:txEl>
+                                          </p:spTgt>
+                                        </p:tgtEl>
+                                        <p:attrNameLst>
+                                          <p:attrName>style.visibility</p:attrName>
+                                        </p:attrNameLst>
+                                      </p:cBhvr>
+                                      <p:to>
+                                        <p:strVal val="visible"/>
+                                      </p:to>
+                                    </p:set>
+                                    <p:anim calcmode="lin" valueType="num">
+                                      <p:cBhvr additive="base">
+                                        <p:cTn id="13" dur="500" fill="hold"/>
+                                        <p:tgtEl>
+                                          <p:spTgt spid="3">
+                                            <p:txEl>
+                                              <p:pRg st="2" end="2"/>
+                                            </p:txEl>
+                                          </p:spTgt>
+                                        </p:tgtEl>
+                                        <p:attrNameLst>
+                                          <p:attrName>ppt_x</p:attrName>
+                                        </p:attrNameLst>
+                                      </p:cBhvr>
+                                      <p:tavLst>
+                                        <p:tav tm="0">
+                                          <p:val>
+                                            <p:strVal val="#ppt_x"/>
+                                          </p:val>
+                                        </p:tav>
+                                        <p:tav tm="100000">
+                                          <p:val>
+                                            <p:strVal val="#ppt_x"/>
+                                          </p:val>
+                                        </p:tav>
+                                      </p:tavLst>
+                                    </p:anim>
+                                    <p:anim calcmode="lin" valueType="num">
+                                      <p:cBhvr additive="base">
+                                        <p:cTn id="14" dur="500" fill="hold"/>
+                                        <p:tgtEl>
+                                          <p:spTgt spid="3">
+                                            <p:txEl>
+                                              <p:pRg st="2" end="2"/>
+                                            </p:txEl>
+                                          </p:spTgt>
+                                        </p:tgtEl>
+                                        <p:attrNameLst>
+                                          <p:attrName>ppt_y</p:attrName>
+                                        </p:attrNameLst>
+                                      </p:cBhvr>
+                                      <p:tavLst>
+                                        <p:tav tm="0">
+                                          <p:val>
+                                            <p:strVal val="1+#ppt_h/2"/>
+                                          </p:val>
+                                        </p:tav>
+                                        <p:tav tm="100000">
+                                          <p:val>
+                                            <p:strVal val="#ppt_y"/>
+                                          </p:val>
+                                        </p:tav>
+                                      </p:tavLst>
+                                    </p:anim>
+                                  </p:childTnLst>
+                                </p:cTn>
+                              </p:par>
+                              <p:par>
+                                <p:cTn id="15" presetID="2" presetClass="entr" presetSubtype="4" fill="hold" nodeType="withEffect">
+                                  <p:stCondLst>
+                                    <p:cond delay="0"/>
+                                  </p:stCondLst>
+                                  <p:childTnLst>
+                                    <p:set>
+                                      <p:cBhvr>
+                                        <p:cTn id="16" dur="1" fill="hold">
+                                          <p:stCondLst>
+                                            <p:cond delay="0"/>
+                                          </p:stCondLst>
+                                        </p:cTn>
+                                        <p:tgtEl>
+                                          <p:spTgt spid="3">
+                                            <p:txEl>
+                                              <p:pRg st="3" end="3"/>
+                                            </p:txEl>
+                                          </p:spTgt>
+                                        </p:tgtEl>
+                                        <p:attrNameLst>
+                                          <p:attrName>style.visibility</p:attrName>
+                                        </p:attrNameLst>
+                                      </p:cBhvr>
+                                      <p:to>
+                                        <p:strVal val="visible"/>
+                                      </p:to>
+                                    </p:set>
+                                    <p:anim calcmode="lin" valueType="num">
+                                      <p:cBhvr additive="base">
+                                        <p:cTn id="17" dur="500" fill="hold"/>
+                                        <p:tgtEl>
+                                          <p:spTgt spid="3">
+                                            <p:txEl>
+                                              <p:pRg st="3" end="3"/>
+                                            </p:txEl>
+                                          </p:spTgt>
+                                        </p:tgtEl>
+                                        <p:attrNameLst>
+                                          <p:attrName>ppt_x</p:attrName>
+                                        </p:attrNameLst>
+                                      </p:cBhvr>
+                                      <p:tavLst>
+                                        <p:tav tm="0">
+                                          <p:val>
+                                            <p:strVal val="#ppt_x"/>
+                                          </p:val>
+                                        </p:tav>
+                                        <p:tav tm="100000">
+                                          <p:val>
+                                            <p:strVal val="#ppt_x"/>
+                                          </p:val>
+                                        </p:tav>
+                                      </p:tavLst>
+                                    </p:anim>
+                                    <p:anim calcmode="lin" valueType="num">
+                                      <p:cBhvr additive="base">
+                                        <p:cTn id="18" dur="500" fill="hold"/>
+                                        <p:tgtEl>
+                                          <p:spTgt spid="3">
+                                            <p:txEl>
+                                              <p:pRg st="3" end="3"/>
+                                            </p:txEl>
+                                          </p:spTgt>
+                                        </p:tgtEl>
+                                        <p:attrNameLst>
+                                          <p:attrName>ppt_y</p:attrName>
+                                        </p:attrNameLst>
+                                      </p:cBhvr>
+                                      <p:tavLst>
+                                        <p:tav tm="0">
+                                          <p:val>
+                                            <p:strVal val="1+#ppt_h/2"/>
+                                          </p:val>
+                                        </p:tav>
+                                        <p:tav tm="100000">
+                                          <p:val>
+                                            <p:strVal val="#ppt_y"/>
+                                          </p:val>
+                                        </p:tav>
+                                      </p:tavLst>
+                                    </p:anim>
+                                  </p:childTnLst>
+                                </p:cTn>
+                              </p:par>
+                            </p:childTnLst>
+                          </p:cTn>
+                        </p:par>
+                      </p:childTnLst>
+                    </p:cTn>
+                  </p:par>
+                </p:childTnLst>
+              </p:cTn>
+              <p:prevCondLst>
+                <p:cond evt="onPrev" delay="0">
+                  <p:tgtEl>
+                    <p:sldTgt/>
+                  </p:tgtEl>
+                </p:cond>
+              </p:prevCondLst>
+              <p:nextCondLst>
+                <p:cond evt="onNext" delay="0">
+                  <p:tgtEl>
+                    <p:sldTgt/>
+                  </p:tgtEl>
+                </p:cond>
+              </p:nextCondLst>
+            </p:seq>
+          </p:childTnLst>
+        </p:cTn>
+      </p:par>
+    </p:tnLst>
+  </p:timing>
+</p:sld>
+</file>
+
+<file path=ppt/slides/slide15.xml><?xml version="1.0" encoding="utf-8"?>
+<p:sld xmlns:a="http://schemas.openxmlformats.org/drawingml/2006/main" xmlns:r="http://schemas.openxmlformats.org/officeDocument/2006/relationships" xmlns:p="http://schemas.openxmlformats.org/presentationml/2006/main">
+  <p:cSld>
+    <p:spTree>
+      <p:nvGrpSpPr>
+        <p:cNvPr id="1" name=""/>
+        <p:cNvGrpSpPr/>
+        <p:nvPr/>
+      </p:nvGrpSpPr>
+      <p:grpSpPr>
+        <a:xfrm>
+          <a:off x="0" y="0"/>
+          <a:ext cx="0" cy="0"/>
+          <a:chOff x="0" y="0"/>
+          <a:chExt cx="0" cy="0"/>
+        </a:xfrm>
+      </p:grpSpPr>
+      <p:sp>
+        <p:nvSpPr>
+          <p:cNvPr id="2" name="TextBox 1"/>
+          <p:cNvSpPr txBox="1"/>
+          <p:nvPr/>
+        </p:nvSpPr>
+        <p:spPr>
+          <a:xfrm>
+            <a:off x="2895601" y="1371601"/>
+            <a:ext cx="6131807" cy="2954655"/>
+          </a:xfrm>
+          <a:prstGeom prst="rect">
+            <a:avLst/>
+          </a:prstGeom>
+          <a:solidFill>
+            <a:schemeClr val="accent6">
+              <a:lumMod val="40000"/>
+              <a:lumOff val="60000"/>
+            </a:schemeClr>
+          </a:solidFill>
+          <a:ln>
+            <a:solidFill>
+              <a:srgbClr val="B4B4B4"/>
+            </a:solidFill>
+          </a:ln>
+        </p:spPr>
+        <p:txBody>
+          <a:bodyPr wrap="none">
+            <a:spAutoFit/>
+          </a:bodyPr>
+          <a:lstStyle/>
+          <a:p>
+            <a:endParaRPr dirty="0"/>
+          </a:p>
+          <a:p>
+            <a:pPr>
+              <a:defRPr sz="2400">
+                <a:solidFill>
+                  <a:srgbClr val="000000"/>
+                </a:solidFill>
+                <a:latin typeface="Consolas"/>
+              </a:defRPr>
+            </a:pPr>
+            <a:r>
+              <a:rPr sz="2400" dirty="0"/>
+              <a:t>public </a:t>
+            </a:r>
+            <a:r>
+              <a:rPr sz="2400" dirty="0" err="1"/>
+              <a:t>boolean</a:t>
+            </a:r>
+            <a:r>
+              <a:rPr sz="2400" dirty="0"/>
+              <a:t> </a:t>
+            </a:r>
+            <a:r>
+              <a:rPr sz="2400" dirty="0" err="1"/>
+              <a:t>isEven</a:t>
+            </a:r>
+            <a:r>
+              <a:rPr sz="2400" dirty="0"/>
+              <a:t>(int number) {</a:t>
+            </a:r>
+            <a:br>
+              <a:rPr sz="2400" dirty="0"/>
+            </a:br>
+            <a:r>
+              <a:rPr sz="2400" dirty="0"/>
+              <a:t>    if (number % 2 == 0) {</a:t>
+            </a:r>
+            <a:br>
+              <a:rPr sz="2400" dirty="0"/>
+            </a:br>
+            <a:r>
+              <a:rPr sz="2400" dirty="0"/>
+              <a:t>        return true;</a:t>
+            </a:r>
+            <a:br>
+              <a:rPr sz="2400" dirty="0"/>
+            </a:br>
+            <a:r>
+              <a:rPr sz="2400" dirty="0"/>
+              <a:t>    } else {</a:t>
+            </a:r>
+            <a:br>
+              <a:rPr sz="2400" dirty="0"/>
+            </a:br>
+            <a:r>
+              <a:rPr sz="2400" dirty="0"/>
+              <a:t>        return false;</a:t>
+            </a:r>
+            <a:br>
+              <a:rPr sz="2400" dirty="0"/>
+            </a:br>
+            <a:r>
+              <a:rPr sz="2400" dirty="0"/>
+              <a:t>    }</a:t>
+            </a:r>
+            <a:br>
+              <a:rPr sz="2400" dirty="0"/>
+            </a:br>
+            <a:r>
+              <a:rPr sz="2400" dirty="0"/>
+              <a:t>}</a:t>
+            </a:r>
+          </a:p>
+        </p:txBody>
+      </p:sp>
+    </p:spTree>
+  </p:cSld>
+  <p:clrMapOvr>
+    <a:masterClrMapping/>
+  </p:clrMapOvr>
+</p:sld>
+</file>
+
+<file path=ppt/slides/slide16.xml><?xml version="1.0" encoding="utf-8"?>
+<p:sld xmlns:a="http://schemas.openxmlformats.org/drawingml/2006/main" xmlns:r="http://schemas.openxmlformats.org/officeDocument/2006/relationships" xmlns:p="http://schemas.openxmlformats.org/presentationml/2006/main">
+  <p:cSld>
+    <p:spTree>
+      <p:nvGrpSpPr>
+        <p:cNvPr id="1" name=""/>
+        <p:cNvGrpSpPr/>
+        <p:nvPr/>
+      </p:nvGrpSpPr>
+      <p:grpSpPr>
+        <a:xfrm>
+          <a:off x="0" y="0"/>
+          <a:ext cx="0" cy="0"/>
+          <a:chOff x="0" y="0"/>
+          <a:chExt cx="0" cy="0"/>
+        </a:xfrm>
+      </p:grpSpPr>
+      <p:sp>
+        <p:nvSpPr>
+          <p:cNvPr id="2" name="TextBox 1"/>
+          <p:cNvSpPr txBox="1"/>
+          <p:nvPr/>
+        </p:nvSpPr>
+        <p:spPr>
+          <a:xfrm>
+            <a:off x="1981200" y="1371600"/>
+            <a:ext cx="4616970" cy="2308324"/>
+          </a:xfrm>
+          <a:prstGeom prst="rect">
+            <a:avLst/>
+          </a:prstGeom>
+          <a:solidFill>
+            <a:schemeClr val="accent6">
+              <a:lumMod val="40000"/>
+              <a:lumOff val="60000"/>
+            </a:schemeClr>
+          </a:solidFill>
+          <a:ln>
+            <a:solidFill>
+              <a:srgbClr val="B4B4B4"/>
+            </a:solidFill>
+          </a:ln>
+        </p:spPr>
+        <p:txBody>
+          <a:bodyPr wrap="none">
+            <a:spAutoFit/>
+          </a:bodyPr>
+          <a:lstStyle/>
+          <a:p>
+            <a:endParaRPr dirty="0"/>
+          </a:p>
+          <a:p>
+            <a:pPr>
+              <a:defRPr sz="1800">
+                <a:solidFill>
+                  <a:srgbClr val="000000"/>
+                </a:solidFill>
+                <a:latin typeface="Consolas"/>
+              </a:defRPr>
+            </a:pPr>
+            <a:r>
+              <a:rPr dirty="0"/>
+              <a:t>public </a:t>
+            </a:r>
+            <a:r>
+              <a:rPr dirty="0" err="1"/>
+              <a:t>boolean</a:t>
+            </a:r>
+            <a:r>
+              <a:rPr dirty="0"/>
+              <a:t> </a:t>
+            </a:r>
+            <a:r>
+              <a:rPr dirty="0" err="1"/>
+              <a:t>isEven</a:t>
+            </a:r>
+            <a:r>
+              <a:rPr dirty="0"/>
+              <a:t>(int number) {</a:t>
+            </a:r>
+            <a:br>
+              <a:rPr dirty="0"/>
+            </a:br>
+            <a:r>
+              <a:rPr dirty="0"/>
+              <a:t>    if (number % 2 == 0) {</a:t>
+            </a:r>
+            <a:br>
+              <a:rPr dirty="0"/>
+            </a:br>
+            <a:r>
+              <a:rPr dirty="0"/>
+              <a:t>        return true;</a:t>
+            </a:r>
+            <a:br>
+              <a:rPr dirty="0"/>
+            </a:br>
+            <a:r>
+              <a:rPr dirty="0"/>
+              <a:t>    } else {</a:t>
+            </a:r>
+            <a:br>
+              <a:rPr dirty="0"/>
+            </a:br>
+            <a:r>
+              <a:rPr dirty="0"/>
+              <a:t>        return false;</a:t>
+            </a:r>
+            <a:br>
+              <a:rPr dirty="0"/>
+            </a:br>
+            <a:r>
+              <a:rPr dirty="0"/>
+              <a:t>    }</a:t>
+            </a:r>
+            <a:br>
+              <a:rPr dirty="0"/>
+            </a:br>
+            <a:r>
+              <a:rPr dirty="0"/>
+              <a:t>}</a:t>
+            </a:r>
+          </a:p>
+        </p:txBody>
+      </p:sp>
+      <p:sp>
+        <p:nvSpPr>
+          <p:cNvPr id="3" name="TextBox 2"/>
+          <p:cNvSpPr txBox="1"/>
+          <p:nvPr/>
+        </p:nvSpPr>
+        <p:spPr>
+          <a:xfrm>
+            <a:off x="6096000" y="1371601"/>
+            <a:ext cx="4616970" cy="1200329"/>
+          </a:xfrm>
+          <a:prstGeom prst="rect">
+            <a:avLst/>
+          </a:prstGeom>
+          <a:solidFill>
+            <a:schemeClr val="accent6">
+              <a:lumMod val="40000"/>
+              <a:lumOff val="60000"/>
+            </a:schemeClr>
+          </a:solidFill>
+          <a:ln>
+            <a:solidFill>
+              <a:srgbClr val="B4B4B4"/>
+            </a:solidFill>
+          </a:ln>
+        </p:spPr>
+        <p:txBody>
+          <a:bodyPr wrap="none">
+            <a:spAutoFit/>
+          </a:bodyPr>
+          <a:lstStyle/>
+          <a:p>
+            <a:endParaRPr dirty="0"/>
+          </a:p>
+          <a:p>
+            <a:pPr>
+              <a:defRPr sz="1800">
+                <a:solidFill>
+                  <a:srgbClr val="000000"/>
+                </a:solidFill>
+                <a:latin typeface="Consolas"/>
+              </a:defRPr>
+            </a:pPr>
+            <a:r>
+              <a:rPr dirty="0"/>
+              <a:t>public </a:t>
+            </a:r>
+            <a:r>
+              <a:rPr dirty="0" err="1"/>
+              <a:t>boolean</a:t>
+            </a:r>
+            <a:r>
+              <a:rPr dirty="0"/>
+              <a:t> </a:t>
+            </a:r>
+            <a:r>
+              <a:rPr dirty="0" err="1"/>
+              <a:t>isEven</a:t>
+            </a:r>
+            <a:r>
+              <a:rPr dirty="0"/>
+              <a:t>(int number) {</a:t>
+            </a:r>
+            <a:br>
+              <a:rPr dirty="0"/>
+            </a:br>
+            <a:r>
+              <a:rPr dirty="0"/>
+              <a:t>    return number % 2 == 0;</a:t>
+            </a:r>
+            <a:br>
+              <a:rPr dirty="0"/>
+            </a:br>
+            <a:r>
+              <a:rPr dirty="0"/>
+              <a:t>}</a:t>
+            </a:r>
+          </a:p>
+        </p:txBody>
+      </p:sp>
+      <p:sp>
+        <p:nvSpPr>
+          <p:cNvPr id="4" name="TextBox 3"/>
+          <p:cNvSpPr txBox="1"/>
+          <p:nvPr/>
+        </p:nvSpPr>
+        <p:spPr>
+          <a:xfrm>
+            <a:off x="3169921" y="914400"/>
+            <a:ext cx="1176989" cy="369332"/>
+          </a:xfrm>
+          <a:prstGeom prst="rect">
+            <a:avLst/>
+          </a:prstGeom>
+          <a:noFill/>
+        </p:spPr>
+        <p:txBody>
+          <a:bodyPr wrap="none">
+            <a:spAutoFit/>
+          </a:bodyPr>
+          <a:lstStyle/>
+          <a:p>
+            <a:r>
+              <a:rPr dirty="0"/>
+              <a:t>Long Form</a:t>
+            </a:r>
+          </a:p>
+        </p:txBody>
+      </p:sp>
+      <p:sp>
+        <p:nvSpPr>
+          <p:cNvPr id="5" name="TextBox 4"/>
+          <p:cNvSpPr txBox="1"/>
+          <p:nvPr/>
+        </p:nvSpPr>
+        <p:spPr>
+          <a:xfrm>
+            <a:off x="7010400" y="914400"/>
+            <a:ext cx="1233094" cy="369332"/>
+          </a:xfrm>
+          <a:prstGeom prst="rect">
+            <a:avLst/>
+          </a:prstGeom>
+          <a:noFill/>
+        </p:spPr>
+        <p:txBody>
+          <a:bodyPr wrap="none">
+            <a:spAutoFit/>
+          </a:bodyPr>
+          <a:lstStyle/>
+          <a:p>
+            <a:r>
+              <a:t>Short Form</a:t>
+            </a:r>
+          </a:p>
+        </p:txBody>
+      </p:sp>
+    </p:spTree>
+  </p:cSld>
+  <p:clrMapOvr>
+    <a:masterClrMapping/>
+  </p:clrMapOvr>
+  <mc:AlternateContent xmlns:mc="http://schemas.openxmlformats.org/markup-compatibility/2006" xmlns:p159="http://schemas.microsoft.com/office/powerpoint/2015/09/main">
+    <mc:Choice Requires="p159">
+      <p:transition xmlns:p14="http://schemas.microsoft.com/office/powerpoint/2010/main" spd="slow" p14:dur="2000">
+        <p159:morph option="byObject"/>
+      </p:transition>
+    </mc:Choice>
+    <mc:Fallback xmlns="">
+      <p:transition spd="slow">
+        <p:fade/>
+      </p:transition>
+    </mc:Fallback>
+  </mc:AlternateContent>
+</p:sld>
+</file>
+
+<file path=ppt/slides/slide17.xml><?xml version="1.0" encoding="utf-8"?>
+<p:sld xmlns:a="http://schemas.openxmlformats.org/drawingml/2006/main" xmlns:r="http://schemas.openxmlformats.org/officeDocument/2006/relationships" xmlns:p="http://schemas.openxmlformats.org/presentationml/2006/main">
+  <p:cSld>
+    <p:spTree>
+      <p:nvGrpSpPr>
+        <p:cNvPr id="1" name=""/>
+        <p:cNvGrpSpPr/>
+        <p:nvPr/>
+      </p:nvGrpSpPr>
+      <p:grpSpPr>
+        <a:xfrm>
+          <a:off x="0" y="0"/>
+          <a:ext cx="0" cy="0"/>
+          <a:chOff x="0" y="0"/>
+          <a:chExt cx="0" cy="0"/>
+        </a:xfrm>
+      </p:grpSpPr>
+      <p:sp>
+        <p:nvSpPr>
+          <p:cNvPr id="2" name="TextBox 1"/>
+          <p:cNvSpPr txBox="1"/>
+          <p:nvPr/>
+        </p:nvSpPr>
+        <p:spPr>
+          <a:xfrm>
+            <a:off x="2895601" y="1371600"/>
+            <a:ext cx="6131807" cy="1477328"/>
+          </a:xfrm>
+          <a:prstGeom prst="rect">
+            <a:avLst/>
+          </a:prstGeom>
+          <a:solidFill>
+            <a:schemeClr val="accent6">
+              <a:lumMod val="40000"/>
+              <a:lumOff val="60000"/>
+            </a:schemeClr>
+          </a:solidFill>
+          <a:ln>
+            <a:solidFill>
+              <a:srgbClr val="B4B4B4"/>
+            </a:solidFill>
+          </a:ln>
+        </p:spPr>
+        <p:txBody>
+          <a:bodyPr wrap="none">
+            <a:spAutoFit/>
+          </a:bodyPr>
+          <a:lstStyle/>
+          <a:p>
+            <a:endParaRPr dirty="0"/>
+          </a:p>
+          <a:p>
+            <a:pPr>
+              <a:defRPr sz="2400">
+                <a:solidFill>
+                  <a:srgbClr val="000000"/>
+                </a:solidFill>
+                <a:latin typeface="Consolas"/>
+              </a:defRPr>
+            </a:pPr>
+            <a:r>
+              <a:rPr sz="2400" dirty="0"/>
+              <a:t>public </a:t>
+            </a:r>
+            <a:r>
+              <a:rPr sz="2400" dirty="0" err="1"/>
+              <a:t>boolean</a:t>
+            </a:r>
+            <a:r>
+              <a:rPr sz="2400" dirty="0"/>
+              <a:t> </a:t>
+            </a:r>
+            <a:r>
+              <a:rPr sz="2400" dirty="0" err="1"/>
+              <a:t>isEven</a:t>
+            </a:r>
+            <a:r>
+              <a:rPr sz="2400" dirty="0"/>
+              <a:t>(int number) {</a:t>
+            </a:r>
+            <a:br>
+              <a:rPr sz="2400" dirty="0"/>
+            </a:br>
+            <a:r>
+              <a:rPr sz="2400" dirty="0"/>
+              <a:t>    return number % 2 == 0;</a:t>
+            </a:r>
+            <a:br>
+              <a:rPr sz="2400" dirty="0"/>
+            </a:br>
+            <a:r>
+              <a:rPr sz="2400" dirty="0"/>
+              <a:t>}</a:t>
+            </a:r>
+          </a:p>
+        </p:txBody>
+      </p:sp>
+    </p:spTree>
+  </p:cSld>
+  <p:clrMapOvr>
+    <a:masterClrMapping/>
+  </p:clrMapOvr>
+  <mc:AlternateContent xmlns:mc="http://schemas.openxmlformats.org/markup-compatibility/2006" xmlns:p159="http://schemas.microsoft.com/office/powerpoint/2015/09/main">
+    <mc:Choice Requires="p159">
+      <p:transition xmlns:p14="http://schemas.microsoft.com/office/powerpoint/2010/main" spd="slow" p14:dur="2000">
+        <p159:morph option="byObject"/>
+      </p:transition>
+    </mc:Choice>
+    <mc:Fallback xmlns="">
+      <p:transition spd="slow">
+        <p:fade/>
+      </p:transition>
+    </mc:Fallback>
+  </mc:AlternateContent>
+</p:sld>
+</file>
+
+<file path=ppt/slides/slide18.xml><?xml version="1.0" encoding="utf-8"?>
+<p:sld xmlns:a="http://schemas.openxmlformats.org/drawingml/2006/main" xmlns:r="http://schemas.openxmlformats.org/officeDocument/2006/relationships" xmlns:p="http://schemas.openxmlformats.org/presentationml/2006/main">
+  <p:cSld>
+    <p:spTree>
+      <p:nvGrpSpPr>
+        <p:cNvPr id="1" name=""/>
+        <p:cNvGrpSpPr/>
+        <p:nvPr/>
+      </p:nvGrpSpPr>
+      <p:grpSpPr>
+        <a:xfrm>
+          <a:off x="0" y="0"/>
+          <a:ext cx="0" cy="0"/>
+          <a:chOff x="0" y="0"/>
+          <a:chExt cx="0" cy="0"/>
+        </a:xfrm>
+      </p:grpSpPr>
+      <p:sp>
+        <p:nvSpPr>
+          <p:cNvPr id="2" name="Title 1"/>
+          <p:cNvSpPr>
+            <a:spLocks noGrp="1"/>
+          </p:cNvSpPr>
+          <p:nvPr>
+            <p:ph type="title"/>
+          </p:nvPr>
+        </p:nvSpPr>
+        <p:spPr/>
+        <p:txBody>
+          <a:bodyPr/>
+          <a:lstStyle/>
+          <a:p>
+            <a:r>
+              <a:t>Using a Boolean Method</a:t>
+            </a:r>
+          </a:p>
+        </p:txBody>
+      </p:sp>
+      <p:sp>
+        <p:nvSpPr>
+          <p:cNvPr id="3" name="Content Placeholder 2"/>
+          <p:cNvSpPr>
+            <a:spLocks noGrp="1"/>
+          </p:cNvSpPr>
+          <p:nvPr>
+            <p:ph idx="1"/>
+          </p:nvPr>
+        </p:nvSpPr>
+        <p:spPr/>
+        <p:txBody>
+          <a:bodyPr wrap="square"/>
+          <a:lstStyle/>
+          <a:p>
+            <a:endParaRPr lang="en-IE" dirty="0"/>
+          </a:p>
+          <a:p>
+            <a:endParaRPr lang="en-IE" dirty="0"/>
+          </a:p>
+          <a:p>
+            <a:endParaRPr lang="en-IE" dirty="0"/>
+          </a:p>
+          <a:p>
+            <a:endParaRPr lang="en-IE" dirty="0"/>
+          </a:p>
+          <a:p>
+            <a:endParaRPr dirty="0"/>
+          </a:p>
+          <a:p>
+            <a:pPr>
+              <a:defRPr sz="2000"/>
+            </a:pPr>
+            <a:r>
+              <a:rPr sz="2800" dirty="0"/>
+              <a:t>Output: Number is even</a:t>
+            </a:r>
+          </a:p>
+          <a:p>
+            <a:pPr>
+              <a:defRPr sz="2000"/>
+            </a:pPr>
+            <a:r>
+              <a:rPr sz="2800" dirty="0"/>
+              <a:t>Explanation: The if statement calls the Boolean method and uses its result directly.</a:t>
+            </a:r>
+          </a:p>
+        </p:txBody>
+      </p:sp>
+      <p:sp>
+        <p:nvSpPr>
+          <p:cNvPr id="4" name="TextBox 3">
+            <a:extLst>
+              <a:ext uri="{FF2B5EF4-FFF2-40B4-BE49-F238E27FC236}">
+                <a16:creationId xmlns:a16="http://schemas.microsoft.com/office/drawing/2014/main" id="{51BAFCBF-DBCA-01D9-DB7E-DBE1A4211E07}"/>
+              </a:ext>
+            </a:extLst>
+          </p:cNvPr>
+          <p:cNvSpPr txBox="1"/>
+          <p:nvPr/>
+        </p:nvSpPr>
+        <p:spPr>
+          <a:xfrm>
+            <a:off x="8677835" y="632808"/>
+            <a:ext cx="3505200" cy="1569660"/>
+          </a:xfrm>
+          <a:prstGeom prst="rect">
+            <a:avLst/>
+          </a:prstGeom>
+          <a:solidFill>
+            <a:schemeClr val="accent6">
+              <a:lumMod val="40000"/>
+              <a:lumOff val="60000"/>
+            </a:schemeClr>
+          </a:solidFill>
+          <a:ln>
+            <a:solidFill>
+              <a:schemeClr val="tx1"/>
+            </a:solidFill>
+          </a:ln>
+        </p:spPr>
+        <p:txBody>
+          <a:bodyPr wrap="square" rtlCol="0">
+            <a:spAutoFit/>
+          </a:bodyPr>
+          <a:lstStyle/>
+          <a:p>
+            <a:pPr>
+              <a:defRPr sz="2000"/>
+            </a:pPr>
+            <a:r>
+              <a:rPr lang="en-IE" sz="1200" dirty="0">
+                <a:latin typeface="Lucida Sans Typewriter" panose="020B0509030504030204" pitchFamily="49" charset="77"/>
+              </a:rPr>
+              <a:t>public </a:t>
+            </a:r>
+            <a:r>
+              <a:rPr lang="en-IE" sz="1200" dirty="0" err="1">
+                <a:latin typeface="Lucida Sans Typewriter" panose="020B0509030504030204" pitchFamily="49" charset="77"/>
+              </a:rPr>
+              <a:t>boolean</a:t>
+            </a:r>
+            <a:r>
+              <a:rPr lang="en-IE" sz="1200" dirty="0">
+                <a:latin typeface="Lucida Sans Typewriter" panose="020B0509030504030204" pitchFamily="49" charset="77"/>
+              </a:rPr>
+              <a:t> </a:t>
+            </a:r>
+            <a:r>
+              <a:rPr lang="en-IE" sz="1200" dirty="0" err="1">
+                <a:latin typeface="Lucida Sans Typewriter" panose="020B0509030504030204" pitchFamily="49" charset="77"/>
+              </a:rPr>
+              <a:t>isEven</a:t>
+            </a:r>
+            <a:r>
+              <a:rPr lang="en-IE" sz="1200" dirty="0">
+                <a:latin typeface="Lucida Sans Typewriter" panose="020B0509030504030204" pitchFamily="49" charset="77"/>
+              </a:rPr>
+              <a:t>(int number) {</a:t>
+            </a:r>
+          </a:p>
+          <a:p>
+            <a:pPr>
+              <a:defRPr sz="2000"/>
+            </a:pPr>
+            <a:r>
+              <a:rPr lang="en-IE" sz="1200" dirty="0">
+                <a:latin typeface="Lucida Sans Typewriter" panose="020B0509030504030204" pitchFamily="49" charset="77"/>
+              </a:rPr>
+              <a:t>    if (number % 2 == 0) { </a:t>
+            </a:r>
+          </a:p>
+          <a:p>
+            <a:pPr>
+              <a:defRPr sz="2000"/>
+            </a:pPr>
+            <a:r>
+              <a:rPr lang="en-IE" sz="1200" dirty="0">
+                <a:latin typeface="Lucida Sans Typewriter" panose="020B0509030504030204" pitchFamily="49" charset="77"/>
+              </a:rPr>
+              <a:t>        return true; </a:t>
+            </a:r>
+          </a:p>
+          <a:p>
+            <a:pPr>
+              <a:defRPr sz="2000"/>
+            </a:pPr>
+            <a:r>
+              <a:rPr lang="en-IE" sz="1200" dirty="0">
+                <a:latin typeface="Lucida Sans Typewriter" panose="020B0509030504030204" pitchFamily="49" charset="77"/>
+              </a:rPr>
+              <a:t>       }</a:t>
+            </a:r>
+          </a:p>
+          <a:p>
+            <a:pPr>
+              <a:defRPr sz="2000"/>
+            </a:pPr>
+            <a:r>
+              <a:rPr lang="en-IE" sz="1200" dirty="0">
+                <a:latin typeface="Lucida Sans Typewriter" panose="020B0509030504030204" pitchFamily="49" charset="77"/>
+              </a:rPr>
+              <a:t>    else {</a:t>
+            </a:r>
+          </a:p>
+          <a:p>
+            <a:pPr>
+              <a:defRPr sz="2000"/>
+            </a:pPr>
+            <a:r>
+              <a:rPr lang="en-IE" sz="1200" dirty="0">
+                <a:latin typeface="Lucida Sans Typewriter" panose="020B0509030504030204" pitchFamily="49" charset="77"/>
+              </a:rPr>
+              <a:t>       return false;</a:t>
+            </a:r>
+          </a:p>
+          <a:p>
+            <a:pPr>
+              <a:defRPr sz="2000"/>
+            </a:pPr>
+            <a:r>
+              <a:rPr lang="en-IE" sz="1200" dirty="0">
+                <a:latin typeface="Lucida Sans Typewriter" panose="020B0509030504030204" pitchFamily="49" charset="77"/>
+              </a:rPr>
+              <a:t>    }</a:t>
+            </a:r>
+          </a:p>
+          <a:p>
+            <a:pPr>
+              <a:defRPr sz="2000"/>
+            </a:pPr>
+            <a:r>
+              <a:rPr lang="en-IE" sz="1200" dirty="0">
+                <a:latin typeface="Lucida Sans Typewriter" panose="020B0509030504030204" pitchFamily="49" charset="77"/>
+              </a:rPr>
+              <a:t>}</a:t>
+            </a:r>
+          </a:p>
+        </p:txBody>
+      </p:sp>
+      <p:sp>
+        <p:nvSpPr>
+          <p:cNvPr id="5" name="TextBox 4">
+            <a:extLst>
+              <a:ext uri="{FF2B5EF4-FFF2-40B4-BE49-F238E27FC236}">
+                <a16:creationId xmlns:a16="http://schemas.microsoft.com/office/drawing/2014/main" id="{53219766-622A-2BA8-C79C-98703E47F9F9}"/>
+              </a:ext>
+            </a:extLst>
+          </p:cNvPr>
+          <p:cNvSpPr txBox="1"/>
+          <p:nvPr/>
+        </p:nvSpPr>
+        <p:spPr>
+          <a:xfrm>
+            <a:off x="1143000" y="1797784"/>
+            <a:ext cx="6477000" cy="2677656"/>
+          </a:xfrm>
+          <a:prstGeom prst="rect">
+            <a:avLst/>
+          </a:prstGeom>
+          <a:solidFill>
+            <a:schemeClr val="accent6">
+              <a:lumMod val="40000"/>
+              <a:lumOff val="60000"/>
+            </a:schemeClr>
+          </a:solidFill>
+          <a:ln>
+            <a:solidFill>
+              <a:schemeClr val="tx1"/>
+            </a:solidFill>
+          </a:ln>
+        </p:spPr>
+        <p:txBody>
+          <a:bodyPr wrap="square" rtlCol="0">
+            <a:spAutoFit/>
+          </a:bodyPr>
+          <a:lstStyle/>
+          <a:p>
+            <a:pPr>
+              <a:defRPr sz="2000"/>
+            </a:pPr>
+            <a:r>
+              <a:rPr lang="en-IE" sz="2800" dirty="0"/>
+              <a:t>if (</a:t>
+            </a:r>
+            <a:r>
+              <a:rPr lang="en-IE" sz="2800" dirty="0" err="1"/>
+              <a:t>isEven</a:t>
+            </a:r>
+            <a:r>
+              <a:rPr lang="en-IE" sz="2800" dirty="0"/>
+              <a:t>(8)) {</a:t>
+            </a:r>
+          </a:p>
+          <a:p>
+            <a:pPr>
+              <a:defRPr sz="2000"/>
+            </a:pPr>
+            <a:r>
+              <a:rPr lang="en-IE" sz="2800" dirty="0"/>
+              <a:t>    </a:t>
+            </a:r>
+            <a:r>
+              <a:rPr lang="en-IE" sz="2800" dirty="0" err="1"/>
+              <a:t>System.out.println</a:t>
+            </a:r>
+            <a:r>
+              <a:rPr lang="en-IE" sz="2800" dirty="0"/>
+              <a:t>('Number is even’);</a:t>
+            </a:r>
+          </a:p>
+          <a:p>
+            <a:pPr>
+              <a:defRPr sz="2000"/>
+            </a:pPr>
+            <a:r>
+              <a:rPr lang="en-IE" sz="2800" dirty="0"/>
+              <a:t>   } </a:t>
+            </a:r>
+          </a:p>
+          <a:p>
+            <a:pPr>
+              <a:defRPr sz="2000"/>
+            </a:pPr>
+            <a:r>
+              <a:rPr lang="en-IE" sz="2800" dirty="0"/>
+              <a:t>else {</a:t>
+            </a:r>
+          </a:p>
+          <a:p>
+            <a:pPr>
+              <a:defRPr sz="2000"/>
+            </a:pPr>
+            <a:r>
+              <a:rPr lang="en-IE" sz="2800" dirty="0"/>
+              <a:t>    </a:t>
+            </a:r>
+            <a:r>
+              <a:rPr lang="en-IE" sz="2800" dirty="0" err="1"/>
+              <a:t>System.out.println</a:t>
+            </a:r>
+            <a:r>
+              <a:rPr lang="en-IE" sz="2800" dirty="0"/>
+              <a:t>('Number is odd');</a:t>
+            </a:r>
+          </a:p>
+          <a:p>
+            <a:pPr>
+              <a:defRPr sz="2000"/>
+            </a:pPr>
+            <a:r>
+              <a:rPr lang="en-IE" sz="2800" dirty="0"/>
+              <a:t>}</a:t>
+            </a:r>
+          </a:p>
+        </p:txBody>
+      </p:sp>
+    </p:spTree>
+  </p:cSld>
+  <p:clrMapOvr>
+    <a:masterClrMapping/>
+  </p:clrMapOvr>
+  <p:timing>
+    <p:tnLst>
+      <p:par>
+        <p:cTn id="1" dur="indefinite" restart="never" nodeType="tmRoot">
+          <p:childTnLst>
+            <p:seq concurrent="1" nextAc="seek">
+              <p:cTn id="2" dur="indefinite" nodeType="mainSeq">
+                <p:childTnLst>
+                  <p:par>
+                    <p:cTn id="3" fill="hold">
+                      <p:stCondLst>
+                        <p:cond delay="indefinite"/>
+                      </p:stCondLst>
+                      <p:childTnLst>
+                        <p:par>
+                          <p:cTn id="4" fill="hold">
+                            <p:stCondLst>
+                              <p:cond delay="0"/>
+                            </p:stCondLst>
+                            <p:childTnLst>
+                              <p:par>
+                                <p:cTn id="5" presetID="2" presetClass="entr" presetSubtype="4" fill="hold" nodeType="clickEffect">
+                                  <p:stCondLst>
+                                    <p:cond delay="0"/>
+                                  </p:stCondLst>
+                                  <p:childTnLst>
+                                    <p:set>
+                                      <p:cBhvr>
+                                        <p:cTn id="6" dur="1" fill="hold">
+                                          <p:stCondLst>
+                                            <p:cond delay="0"/>
+                                          </p:stCondLst>
+                                        </p:cTn>
+                                        <p:tgtEl>
+                                          <p:spTgt spid="3">
+                                            <p:txEl>
+                                              <p:pRg st="5" end="5"/>
+                                            </p:txEl>
+                                          </p:spTgt>
+                                        </p:tgtEl>
+                                        <p:attrNameLst>
+                                          <p:attrName>style.visibility</p:attrName>
+                                        </p:attrNameLst>
+                                      </p:cBhvr>
+                                      <p:to>
+                                        <p:strVal val="visible"/>
+                                      </p:to>
+                                    </p:set>
+                                    <p:anim calcmode="lin" valueType="num">
+                                      <p:cBhvr additive="base">
+                                        <p:cTn id="7" dur="500" fill="hold"/>
+                                        <p:tgtEl>
+                                          <p:spTgt spid="3">
+                                            <p:txEl>
+                                              <p:pRg st="5" end="5"/>
+                                            </p:txEl>
+                                          </p:spTgt>
+                                        </p:tgtEl>
+                                        <p:attrNameLst>
+                                          <p:attrName>ppt_x</p:attrName>
+                                        </p:attrNameLst>
+                                      </p:cBhvr>
+                                      <p:tavLst>
+                                        <p:tav tm="0">
+                                          <p:val>
+                                            <p:strVal val="#ppt_x"/>
+                                          </p:val>
+                                        </p:tav>
+                                        <p:tav tm="100000">
+                                          <p:val>
+                                            <p:strVal val="#ppt_x"/>
+                                          </p:val>
+                                        </p:tav>
+                                      </p:tavLst>
+                                    </p:anim>
+                                    <p:anim calcmode="lin" valueType="num">
+                                      <p:cBhvr additive="base">
+                                        <p:cTn id="8" dur="500" fill="hold"/>
+                                        <p:tgtEl>
+                                          <p:spTgt spid="3">
+                                            <p:txEl>
+                                              <p:pRg st="5" end="5"/>
+                                            </p:txEl>
+                                          </p:spTgt>
+                                        </p:tgtEl>
+                                        <p:attrNameLst>
+                                          <p:attrName>ppt_y</p:attrName>
+                                        </p:attrNameLst>
+                                      </p:cBhvr>
+                                      <p:tavLst>
+                                        <p:tav tm="0">
+                                          <p:val>
+                                            <p:strVal val="1+#ppt_h/2"/>
+                                          </p:val>
+                                        </p:tav>
+                                        <p:tav tm="100000">
+                                          <p:val>
+                                            <p:strVal val="#ppt_y"/>
+                                          </p:val>
+                                        </p:tav>
+                                      </p:tavLst>
+                                    </p:anim>
+                                  </p:childTnLst>
+                                </p:cTn>
+                              </p:par>
+                            </p:childTnLst>
+                          </p:cTn>
+                        </p:par>
+                      </p:childTnLst>
+                    </p:cTn>
+                  </p:par>
+                  <p:par>
+                    <p:cTn id="9" fill="hold">
+                      <p:stCondLst>
+                        <p:cond delay="indefinite"/>
+                      </p:stCondLst>
+                      <p:childTnLst>
+                        <p:par>
+                          <p:cTn id="10" fill="hold">
+                            <p:stCondLst>
+                              <p:cond delay="0"/>
+                            </p:stCondLst>
+                            <p:childTnLst>
+                              <p:par>
+                                <p:cTn id="11" presetID="2" presetClass="entr" presetSubtype="4" fill="hold" nodeType="clickEffect">
+                                  <p:stCondLst>
+                                    <p:cond delay="0"/>
+                                  </p:stCondLst>
+                                  <p:childTnLst>
+                                    <p:set>
+                                      <p:cBhvr>
+                                        <p:cTn id="12" dur="1" fill="hold">
+                                          <p:stCondLst>
+                                            <p:cond delay="0"/>
+                                          </p:stCondLst>
+                                        </p:cTn>
+                                        <p:tgtEl>
+                                          <p:spTgt spid="3">
+                                            <p:txEl>
+                                              <p:pRg st="6" end="6"/>
+                                            </p:txEl>
+                                          </p:spTgt>
+                                        </p:tgtEl>
+                                        <p:attrNameLst>
+                                          <p:attrName>style.visibility</p:attrName>
+                                        </p:attrNameLst>
+                                      </p:cBhvr>
+                                      <p:to>
+                                        <p:strVal val="visible"/>
+                                      </p:to>
+                                    </p:set>
+                                    <p:anim calcmode="lin" valueType="num">
+                                      <p:cBhvr additive="base">
+                                        <p:cTn id="13" dur="500" fill="hold"/>
+                                        <p:tgtEl>
+                                          <p:spTgt spid="3">
+                                            <p:txEl>
+                                              <p:pRg st="6" end="6"/>
+                                            </p:txEl>
+                                          </p:spTgt>
+                                        </p:tgtEl>
+                                        <p:attrNameLst>
+                                          <p:attrName>ppt_x</p:attrName>
+                                        </p:attrNameLst>
+                                      </p:cBhvr>
+                                      <p:tavLst>
+                                        <p:tav tm="0">
+                                          <p:val>
+                                            <p:strVal val="#ppt_x"/>
+                                          </p:val>
+                                        </p:tav>
+                                        <p:tav tm="100000">
+                                          <p:val>
+                                            <p:strVal val="#ppt_x"/>
+                                          </p:val>
+                                        </p:tav>
+                                      </p:tavLst>
+                                    </p:anim>
+                                    <p:anim calcmode="lin" valueType="num">
+                                      <p:cBhvr additive="base">
+                                        <p:cTn id="14" dur="500" fill="hold"/>
+                                        <p:tgtEl>
+                                          <p:spTgt spid="3">
+                                            <p:txEl>
+                                              <p:pRg st="6" end="6"/>
+                                            </p:txEl>
+                                          </p:spTgt>
+                                        </p:tgtEl>
+                                        <p:attrNameLst>
+                                          <p:attrName>ppt_y</p:attrName>
+                                        </p:attrNameLst>
+                                      </p:cBhvr>
+                                      <p:tavLst>
+                                        <p:tav tm="0">
+                                          <p:val>
+                                            <p:strVal val="1+#ppt_h/2"/>
+                                          </p:val>
+                                        </p:tav>
+                                        <p:tav tm="100000">
+                                          <p:val>
+                                            <p:strVal val="#ppt_y"/>
+                                          </p:val>
+                                        </p:tav>
+                                      </p:tavLst>
+                                    </p:anim>
+                                  </p:childTnLst>
+                                </p:cTn>
+                              </p:par>
+                            </p:childTnLst>
+                          </p:cTn>
+                        </p:par>
+                      </p:childTnLst>
+                    </p:cTn>
+                  </p:par>
+                </p:childTnLst>
+              </p:cTn>
+              <p:prevCondLst>
+                <p:cond evt="onPrev" delay="0">
+                  <p:tgtEl>
+                    <p:sldTgt/>
+                  </p:tgtEl>
+                </p:cond>
+              </p:prevCondLst>
+              <p:nextCondLst>
+                <p:cond evt="onNext" delay="0">
+                  <p:tgtEl>
+                    <p:sldTgt/>
+                  </p:tgtEl>
+                </p:cond>
+              </p:nextCondLst>
+            </p:seq>
+          </p:childTnLst>
+        </p:cTn>
+      </p:par>
+    </p:tnLst>
+  </p:timing>
+</p:sld>
+</file>
+
+<file path=ppt/slides/slide19.xml><?xml version="1.0" encoding="utf-8"?>
+<p:sld xmlns:a="http://schemas.openxmlformats.org/drawingml/2006/main" xmlns:r="http://schemas.openxmlformats.org/officeDocument/2006/relationships" xmlns:p="http://schemas.openxmlformats.org/presentationml/2006/main">
+  <p:cSld>
+    <p:spTree>
+      <p:nvGrpSpPr>
+        <p:cNvPr id="1" name=""/>
+        <p:cNvGrpSpPr/>
+        <p:nvPr/>
+      </p:nvGrpSpPr>
+      <p:grpSpPr>
+        <a:xfrm>
+          <a:off x="0" y="0"/>
+          <a:ext cx="0" cy="0"/>
+          <a:chOff x="0" y="0"/>
+          <a:chExt cx="0" cy="0"/>
+        </a:xfrm>
+      </p:grpSpPr>
+      <p:sp>
+        <p:nvSpPr>
+          <p:cNvPr id="2" name="Title 1"/>
+          <p:cNvSpPr>
+            <a:spLocks noGrp="1"/>
+          </p:cNvSpPr>
+          <p:nvPr>
+            <p:ph type="title"/>
+          </p:nvPr>
+        </p:nvSpPr>
+        <p:spPr/>
+        <p:txBody>
+          <a:bodyPr/>
+          <a:lstStyle/>
+          <a:p>
+            <a:r>
+              <a:t>Boolean Method with Objects</a:t>
+            </a:r>
+          </a:p>
+        </p:txBody>
+      </p:sp>
+      <p:sp>
+        <p:nvSpPr>
+          <p:cNvPr id="3" name="Content Placeholder 2"/>
+          <p:cNvSpPr>
+            <a:spLocks noGrp="1"/>
+          </p:cNvSpPr>
+          <p:nvPr>
+            <p:ph idx="1"/>
+          </p:nvPr>
+        </p:nvSpPr>
+        <p:spPr/>
+        <p:txBody>
+          <a:bodyPr wrap="square"/>
+          <a:lstStyle/>
+          <a:p>
+            <a:endParaRPr dirty="0"/>
+          </a:p>
+          <a:p>
+            <a:pPr>
+              <a:defRPr sz="2000"/>
+            </a:pPr>
+            <a:endParaRPr lang="en-IE" dirty="0"/>
+          </a:p>
+          <a:p>
+            <a:pPr>
+              <a:defRPr sz="2000"/>
+            </a:pPr>
+            <a:endParaRPr lang="en-IE" dirty="0"/>
+          </a:p>
+          <a:p>
+            <a:pPr>
+              <a:defRPr sz="2000"/>
+            </a:pPr>
+            <a:endParaRPr lang="en-IE" dirty="0"/>
+          </a:p>
+          <a:p>
+            <a:pPr marL="0" indent="0">
+              <a:buNone/>
+              <a:defRPr sz="2000"/>
+            </a:pPr>
+            <a:r>
+              <a:rPr sz="2800" dirty="0"/>
+              <a:t>Explanation:</a:t>
+            </a:r>
+          </a:p>
+          <a:p>
+            <a:pPr marL="0" indent="0">
+              <a:buNone/>
+              <a:defRPr sz="2000"/>
+            </a:pPr>
+            <a:r>
+              <a:rPr lang="en-IE" sz="2800" dirty="0"/>
+              <a:t>T</a:t>
+            </a:r>
+            <a:r>
+              <a:rPr sz="2800" dirty="0"/>
+              <a:t>he expression itself produces a true or false value.</a:t>
+            </a:r>
+            <a:endParaRPr lang="en-IE" sz="2800" dirty="0"/>
+          </a:p>
+          <a:p>
+            <a:pPr marL="0" indent="0">
+              <a:buNone/>
+              <a:defRPr sz="2000"/>
+            </a:pPr>
+            <a:r>
+              <a:rPr sz="2800" dirty="0"/>
+              <a:t>You can return the expression directly without an if statement.</a:t>
+            </a:r>
+          </a:p>
+        </p:txBody>
+      </p:sp>
+      <p:sp>
+        <p:nvSpPr>
+          <p:cNvPr id="5" name="TextBox 4">
+            <a:extLst>
+              <a:ext uri="{FF2B5EF4-FFF2-40B4-BE49-F238E27FC236}">
+                <a16:creationId xmlns:a16="http://schemas.microsoft.com/office/drawing/2014/main" id="{E43CCA59-C44D-D552-930D-31C006592781}"/>
+              </a:ext>
+            </a:extLst>
+          </p:cNvPr>
+          <p:cNvSpPr txBox="1"/>
+          <p:nvPr/>
+        </p:nvSpPr>
+        <p:spPr>
+          <a:xfrm>
+            <a:off x="4267200" y="1752600"/>
+            <a:ext cx="3657600" cy="1015663"/>
+          </a:xfrm>
+          <a:prstGeom prst="rect">
+            <a:avLst/>
+          </a:prstGeom>
+          <a:solidFill>
+            <a:schemeClr val="accent6">
+              <a:lumMod val="40000"/>
+              <a:lumOff val="60000"/>
+            </a:schemeClr>
+          </a:solidFill>
+          <a:ln>
+            <a:solidFill>
+              <a:schemeClr val="tx1"/>
+            </a:solidFill>
+          </a:ln>
+        </p:spPr>
+        <p:txBody>
+          <a:bodyPr wrap="square">
+            <a:spAutoFit/>
+          </a:bodyPr>
+          <a:lstStyle/>
+          <a:p>
+            <a:pPr>
+              <a:defRPr sz="2000"/>
+            </a:pPr>
+            <a:r>
+              <a:rPr lang="en-IE" dirty="0"/>
+              <a:t>public </a:t>
+            </a:r>
+            <a:r>
+              <a:rPr lang="en-IE" dirty="0" err="1"/>
+              <a:t>boolean</a:t>
+            </a:r>
+            <a:r>
+              <a:rPr lang="en-IE" dirty="0"/>
+              <a:t> </a:t>
+            </a:r>
+            <a:r>
+              <a:rPr lang="en-IE" dirty="0" err="1"/>
+              <a:t>isAdult</a:t>
+            </a:r>
+            <a:r>
+              <a:rPr lang="en-IE" dirty="0"/>
+              <a:t>() {</a:t>
+            </a:r>
+          </a:p>
+          <a:p>
+            <a:pPr>
+              <a:defRPr sz="2000"/>
+            </a:pPr>
+            <a:r>
+              <a:rPr lang="en-IE" dirty="0"/>
+              <a:t>    return age &gt;= 18;</a:t>
+            </a:r>
+          </a:p>
+          <a:p>
+            <a:pPr>
+              <a:defRPr sz="2000"/>
+            </a:pPr>
+            <a:r>
+              <a:rPr lang="en-IE" dirty="0"/>
+              <a:t>}</a:t>
+            </a:r>
+          </a:p>
+        </p:txBody>
+      </p:sp>
+    </p:spTree>
+  </p:cSld>
+  <p:clrMapOvr>
+    <a:masterClrMapping/>
+  </p:clrMapOvr>
+  <p:timing>
+    <p:tnLst>
+      <p:par>
+        <p:cTn id="1" dur="indefinite" restart="never" nodeType="tmRoot">
+          <p:childTnLst>
+            <p:seq concurrent="1" nextAc="seek">
+              <p:cTn id="2" dur="indefinite" nodeType="mainSeq">
+                <p:childTnLst>
+                  <p:par>
+                    <p:cTn id="3" fill="hold">
+                      <p:stCondLst>
+                        <p:cond delay="indefinite"/>
+                      </p:stCondLst>
+                      <p:childTnLst>
+                        <p:par>
+                          <p:cTn id="4" fill="hold">
+                            <p:stCondLst>
+                              <p:cond delay="0"/>
+                            </p:stCondLst>
+                            <p:childTnLst>
+                              <p:par>
+                                <p:cTn id="5" presetID="2" presetClass="entr" presetSubtype="4" fill="hold" nodeType="clickEffect">
+                                  <p:stCondLst>
+                                    <p:cond delay="0"/>
+                                  </p:stCondLst>
+                                  <p:childTnLst>
+                                    <p:set>
+                                      <p:cBhvr>
+                                        <p:cTn id="6" dur="1" fill="hold">
+                                          <p:stCondLst>
+                                            <p:cond delay="0"/>
+                                          </p:stCondLst>
+                                        </p:cTn>
+                                        <p:tgtEl>
+                                          <p:spTgt spid="3">
+                                            <p:txEl>
+                                              <p:pRg st="4" end="4"/>
+                                            </p:txEl>
+                                          </p:spTgt>
+                                        </p:tgtEl>
+                                        <p:attrNameLst>
+                                          <p:attrName>style.visibility</p:attrName>
+                                        </p:attrNameLst>
+                                      </p:cBhvr>
+                                      <p:to>
+                                        <p:strVal val="visible"/>
+                                      </p:to>
+                                    </p:set>
+                                    <p:anim calcmode="lin" valueType="num">
+                                      <p:cBhvr additive="base">
+                                        <p:cTn id="7" dur="500" fill="hold"/>
+                                        <p:tgtEl>
+                                          <p:spTgt spid="3">
+                                            <p:txEl>
+                                              <p:pRg st="4" end="4"/>
+                                            </p:txEl>
+                                          </p:spTgt>
+                                        </p:tgtEl>
+                                        <p:attrNameLst>
+                                          <p:attrName>ppt_x</p:attrName>
+                                        </p:attrNameLst>
+                                      </p:cBhvr>
+                                      <p:tavLst>
+                                        <p:tav tm="0">
+                                          <p:val>
+                                            <p:strVal val="#ppt_x"/>
+                                          </p:val>
+                                        </p:tav>
+                                        <p:tav tm="100000">
+                                          <p:val>
+                                            <p:strVal val="#ppt_x"/>
+                                          </p:val>
+                                        </p:tav>
+                                      </p:tavLst>
+                                    </p:anim>
+                                    <p:anim calcmode="lin" valueType="num">
+                                      <p:cBhvr additive="base">
+                                        <p:cTn id="8" dur="500" fill="hold"/>
+                                        <p:tgtEl>
+                                          <p:spTgt spid="3">
+                                            <p:txEl>
+                                              <p:pRg st="4" end="4"/>
+                                            </p:txEl>
+                                          </p:spTgt>
+                                        </p:tgtEl>
+                                        <p:attrNameLst>
+                                          <p:attrName>ppt_y</p:attrName>
+                                        </p:attrNameLst>
+                                      </p:cBhvr>
+                                      <p:tavLst>
+                                        <p:tav tm="0">
+                                          <p:val>
+                                            <p:strVal val="1+#ppt_h/2"/>
+                                          </p:val>
+                                        </p:tav>
+                                        <p:tav tm="100000">
+                                          <p:val>
+                                            <p:strVal val="#ppt_y"/>
+                                          </p:val>
+                                        </p:tav>
+                                      </p:tavLst>
+                                    </p:anim>
+                                  </p:childTnLst>
+                                </p:cTn>
+                              </p:par>
+                            </p:childTnLst>
+                          </p:cTn>
+                        </p:par>
+                      </p:childTnLst>
+                    </p:cTn>
+                  </p:par>
+                  <p:par>
+                    <p:cTn id="9" fill="hold">
+                      <p:stCondLst>
+                        <p:cond delay="indefinite"/>
+                      </p:stCondLst>
+                      <p:childTnLst>
+                        <p:par>
+                          <p:cTn id="10" fill="hold">
+                            <p:stCondLst>
+                              <p:cond delay="0"/>
+                            </p:stCondLst>
+                            <p:childTnLst>
+                              <p:par>
+                                <p:cTn id="11" presetID="2" presetClass="entr" presetSubtype="4" fill="hold" nodeType="clickEffect">
+                                  <p:stCondLst>
+                                    <p:cond delay="0"/>
+                                  </p:stCondLst>
+                                  <p:childTnLst>
+                                    <p:set>
+                                      <p:cBhvr>
+                                        <p:cTn id="12" dur="1" fill="hold">
+                                          <p:stCondLst>
+                                            <p:cond delay="0"/>
+                                          </p:stCondLst>
+                                        </p:cTn>
+                                        <p:tgtEl>
+                                          <p:spTgt spid="3">
+                                            <p:txEl>
+                                              <p:pRg st="5" end="5"/>
+                                            </p:txEl>
+                                          </p:spTgt>
+                                        </p:tgtEl>
+                                        <p:attrNameLst>
+                                          <p:attrName>style.visibility</p:attrName>
+                                        </p:attrNameLst>
+                                      </p:cBhvr>
+                                      <p:to>
+                                        <p:strVal val="visible"/>
+                                      </p:to>
+                                    </p:set>
+                                    <p:anim calcmode="lin" valueType="num">
+                                      <p:cBhvr additive="base">
+                                        <p:cTn id="13" dur="500" fill="hold"/>
+                                        <p:tgtEl>
+                                          <p:spTgt spid="3">
+                                            <p:txEl>
+                                              <p:pRg st="5" end="5"/>
+                                            </p:txEl>
+                                          </p:spTgt>
+                                        </p:tgtEl>
+                                        <p:attrNameLst>
+                                          <p:attrName>ppt_x</p:attrName>
+                                        </p:attrNameLst>
+                                      </p:cBhvr>
+                                      <p:tavLst>
+                                        <p:tav tm="0">
+                                          <p:val>
+                                            <p:strVal val="#ppt_x"/>
+                                          </p:val>
+                                        </p:tav>
+                                        <p:tav tm="100000">
+                                          <p:val>
+                                            <p:strVal val="#ppt_x"/>
+                                          </p:val>
+                                        </p:tav>
+                                      </p:tavLst>
+                                    </p:anim>
+                                    <p:anim calcmode="lin" valueType="num">
+                                      <p:cBhvr additive="base">
+                                        <p:cTn id="14" dur="500" fill="hold"/>
+                                        <p:tgtEl>
+                                          <p:spTgt spid="3">
+                                            <p:txEl>
+                                              <p:pRg st="5" end="5"/>
+                                            </p:txEl>
+                                          </p:spTgt>
+                                        </p:tgtEl>
+                                        <p:attrNameLst>
+                                          <p:attrName>ppt_y</p:attrName>
+                                        </p:attrNameLst>
+                                      </p:cBhvr>
+                                      <p:tavLst>
+                                        <p:tav tm="0">
+                                          <p:val>
+                                            <p:strVal val="1+#ppt_h/2"/>
+                                          </p:val>
+                                        </p:tav>
+                                        <p:tav tm="100000">
+                                          <p:val>
+                                            <p:strVal val="#ppt_y"/>
+                                          </p:val>
+                                        </p:tav>
+                                      </p:tavLst>
+                                    </p:anim>
+                                  </p:childTnLst>
+                                </p:cTn>
+                              </p:par>
+                            </p:childTnLst>
+                          </p:cTn>
+                        </p:par>
+                      </p:childTnLst>
+                    </p:cTn>
+                  </p:par>
+                  <p:par>
+                    <p:cTn id="15" fill="hold">
+                      <p:stCondLst>
+                        <p:cond delay="indefinite"/>
+                      </p:stCondLst>
+                      <p:childTnLst>
+                        <p:par>
+                          <p:cTn id="16" fill="hold">
+                            <p:stCondLst>
+                              <p:cond delay="0"/>
+                            </p:stCondLst>
+                            <p:childTnLst>
+                              <p:par>
+                                <p:cTn id="17" presetID="2" presetClass="entr" presetSubtype="4" fill="hold" nodeType="clickEffect">
+                                  <p:stCondLst>
+                                    <p:cond delay="0"/>
+                                  </p:stCondLst>
+                                  <p:childTnLst>
+                                    <p:set>
+                                      <p:cBhvr>
+                                        <p:cTn id="18" dur="1" fill="hold">
+                                          <p:stCondLst>
+                                            <p:cond delay="0"/>
+                                          </p:stCondLst>
+                                        </p:cTn>
+                                        <p:tgtEl>
+                                          <p:spTgt spid="3">
+                                            <p:txEl>
+                                              <p:pRg st="6" end="6"/>
+                                            </p:txEl>
+                                          </p:spTgt>
+                                        </p:tgtEl>
+                                        <p:attrNameLst>
+                                          <p:attrName>style.visibility</p:attrName>
+                                        </p:attrNameLst>
+                                      </p:cBhvr>
+                                      <p:to>
+                                        <p:strVal val="visible"/>
+                                      </p:to>
+                                    </p:set>
+                                    <p:anim calcmode="lin" valueType="num">
+                                      <p:cBhvr additive="base">
+                                        <p:cTn id="19" dur="500" fill="hold"/>
+                                        <p:tgtEl>
+                                          <p:spTgt spid="3">
+                                            <p:txEl>
+                                              <p:pRg st="6" end="6"/>
+                                            </p:txEl>
+                                          </p:spTgt>
+                                        </p:tgtEl>
+                                        <p:attrNameLst>
+                                          <p:attrName>ppt_x</p:attrName>
+                                        </p:attrNameLst>
+                                      </p:cBhvr>
+                                      <p:tavLst>
+                                        <p:tav tm="0">
+                                          <p:val>
+                                            <p:strVal val="#ppt_x"/>
+                                          </p:val>
+                                        </p:tav>
+                                        <p:tav tm="100000">
+                                          <p:val>
+                                            <p:strVal val="#ppt_x"/>
+                                          </p:val>
+                                        </p:tav>
+                                      </p:tavLst>
+                                    </p:anim>
+                                    <p:anim calcmode="lin" valueType="num">
+                                      <p:cBhvr additive="base">
+                                        <p:cTn id="20" dur="500" fill="hold"/>
+                                        <p:tgtEl>
+                                          <p:spTgt spid="3">
+                                            <p:txEl>
+                                              <p:pRg st="6" end="6"/>
+                                            </p:txEl>
+                                          </p:spTgt>
+                                        </p:tgtEl>
+                                        <p:attrNameLst>
+                                          <p:attrName>ppt_y</p:attrName>
+                                        </p:attrNameLst>
+                                      </p:cBhvr>
+                                      <p:tavLst>
+                                        <p:tav tm="0">
+                                          <p:val>
+                                            <p:strVal val="1+#ppt_h/2"/>
+                                          </p:val>
+                                        </p:tav>
+                                        <p:tav tm="100000">
+                                          <p:val>
+                                            <p:strVal val="#ppt_y"/>
+                                          </p:val>
+                                        </p:tav>
+                                      </p:tavLst>
+                                    </p:anim>
+                                  </p:childTnLst>
+                                </p:cTn>
+                              </p:par>
+                            </p:childTnLst>
+                          </p:cTn>
+                        </p:par>
+                      </p:childTnLst>
+                    </p:cTn>
+                  </p:par>
+                </p:childTnLst>
+              </p:cTn>
+              <p:prevCondLst>
+                <p:cond evt="onPrev" delay="0">
+                  <p:tgtEl>
+                    <p:sldTgt/>
+                  </p:tgtEl>
+                </p:cond>
+              </p:prevCondLst>
+              <p:nextCondLst>
+                <p:cond evt="onNext" delay="0">
+                  <p:tgtEl>
+                    <p:sldTgt/>
+                  </p:tgtEl>
+                </p:cond>
+              </p:nextCondLst>
+            </p:seq>
+          </p:childTnLst>
+        </p:cTn>
+      </p:par>
+    </p:tnLst>
+  </p:timing>
+</p:sld>
+</file>
+
+<file path=ppt/slides/slide2.xml><?xml version="1.0" encoding="utf-8"?>
+<p:sld xmlns:a="http://schemas.openxmlformats.org/drawingml/2006/main" xmlns:r="http://schemas.openxmlformats.org/officeDocument/2006/relationships" xmlns:p="http://schemas.openxmlformats.org/presentationml/2006/main">
+  <p:cSld>
+    <p:spTree>
+      <p:nvGrpSpPr>
+        <p:cNvPr id="1" name="">
+          <a:extLst>
+            <a:ext uri="{FF2B5EF4-FFF2-40B4-BE49-F238E27FC236}">
+              <a16:creationId xmlns:a16="http://schemas.microsoft.com/office/drawing/2014/main" id="{AB95B6AF-072C-A9C1-1863-398830BB948F}"/>
+            </a:ext>
+          </a:extLst>
+        </p:cNvPr>
+        <p:cNvGrpSpPr/>
+        <p:nvPr/>
+      </p:nvGrpSpPr>
+      <p:grpSpPr>
+        <a:xfrm>
+          <a:off x="0" y="0"/>
+          <a:ext cx="0" cy="0"/>
+          <a:chOff x="0" y="0"/>
+          <a:chExt cx="0" cy="0"/>
+        </a:xfrm>
+      </p:grpSpPr>
+      <p:sp>
+        <p:nvSpPr>
+          <p:cNvPr id="2" name="Title 1">
+            <a:extLst>
+              <a:ext uri="{FF2B5EF4-FFF2-40B4-BE49-F238E27FC236}">
+                <a16:creationId xmlns:a16="http://schemas.microsoft.com/office/drawing/2014/main" id="{37B9D5B6-59DB-8A5F-DC09-D99C93C40A62}"/>
+              </a:ext>
+            </a:extLst>
+          </p:cNvPr>
+          <p:cNvSpPr>
+            <a:spLocks noGrp="1"/>
+          </p:cNvSpPr>
+          <p:nvPr>
+            <p:ph type="title"/>
+          </p:nvPr>
+        </p:nvSpPr>
+        <p:spPr/>
+        <p:txBody>
+          <a:bodyPr/>
+          <a:lstStyle/>
+          <a:p>
+            <a:r>
+              <a:rPr lang="en-IE"/>
+              <a:t>Topics list</a:t>
+            </a:r>
+            <a:endParaRPr lang="en-IE" dirty="0"/>
+          </a:p>
+        </p:txBody>
+      </p:sp>
+      <p:sp>
+        <p:nvSpPr>
+          <p:cNvPr id="7" name="Rectangle 6">
+            <a:extLst>
+              <a:ext uri="{FF2B5EF4-FFF2-40B4-BE49-F238E27FC236}">
+                <a16:creationId xmlns:a16="http://schemas.microsoft.com/office/drawing/2014/main" id="{DA0D0626-156E-BA6F-8614-93BC3D5DF7FF}"/>
+              </a:ext>
+            </a:extLst>
+          </p:cNvPr>
+          <p:cNvSpPr/>
+          <p:nvPr/>
+        </p:nvSpPr>
+        <p:spPr>
+          <a:xfrm>
+            <a:off x="1728789" y="3200400"/>
+            <a:ext cx="4648200" cy="457200"/>
+          </a:xfrm>
+          <a:prstGeom prst="rect">
+            <a:avLst/>
+          </a:prstGeom>
+          <a:noFill/>
+          <a:ln w="44450">
+            <a:solidFill>
+              <a:srgbClr val="FF0000"/>
+            </a:solidFill>
+          </a:ln>
+        </p:spPr>
+        <p:style>
+          <a:lnRef idx="2">
+            <a:schemeClr val="accent1">
+              <a:shade val="50000"/>
+            </a:schemeClr>
+          </a:lnRef>
+          <a:fillRef idx="1">
+            <a:schemeClr val="accent1"/>
+          </a:fillRef>
+          <a:effectRef idx="0">
+            <a:schemeClr val="accent1"/>
+          </a:effectRef>
+          <a:fontRef idx="minor">
+            <a:schemeClr val="lt1"/>
+          </a:fontRef>
+        </p:style>
+        <p:txBody>
+          <a:bodyPr rtlCol="0" anchor="ctr"/>
+          <a:lstStyle/>
+          <a:p>
+            <a:pPr algn="ctr"/>
+            <a:endParaRPr lang="en-IE"/>
+          </a:p>
+        </p:txBody>
+      </p:sp>
+      <p:sp>
+        <p:nvSpPr>
+          <p:cNvPr id="6" name="Content Placeholder 4">
+            <a:extLst>
+              <a:ext uri="{FF2B5EF4-FFF2-40B4-BE49-F238E27FC236}">
+                <a16:creationId xmlns:a16="http://schemas.microsoft.com/office/drawing/2014/main" id="{E80E9EB5-7D9C-7F33-2593-002DAF7EF03E}"/>
+              </a:ext>
+            </a:extLst>
+          </p:cNvPr>
+          <p:cNvSpPr txBox="1">
+            <a:spLocks/>
+          </p:cNvSpPr>
+          <p:nvPr/>
+        </p:nvSpPr>
+        <p:spPr>
+          <a:xfrm>
+            <a:off x="914400" y="2332037"/>
+            <a:ext cx="8763000" cy="4525963"/>
+          </a:xfrm>
+          <a:prstGeom prst="rect">
+            <a:avLst/>
+          </a:prstGeom>
+        </p:spPr>
+        <p:txBody>
+          <a:bodyPr vert="horz" lIns="91440" tIns="45720" rIns="91440" bIns="45720" rtlCol="0">
+            <a:normAutofit/>
+          </a:bodyPr>
+          <a:lstStyle>
+            <a:lvl1pPr marL="342900" indent="-342900" algn="l" defTabSz="914400" rtl="0" eaLnBrk="1" latinLnBrk="0" hangingPunct="1">
+              <a:spcBef>
+                <a:spcPct val="20000"/>
+              </a:spcBef>
+              <a:buFont typeface="Arial" pitchFamily="34" charset="0"/>
+              <a:buChar char="•"/>
+              <a:defRPr sz="3200" kern="1200">
+                <a:solidFill>
+                  <a:schemeClr val="tx1"/>
+                </a:solidFill>
+                <a:latin typeface="+mn-lt"/>
+                <a:ea typeface="+mn-ea"/>
+                <a:cs typeface="+mn-cs"/>
+              </a:defRPr>
+            </a:lvl1pPr>
+            <a:lvl2pPr marL="742950" indent="-285750" algn="l" defTabSz="914400" rtl="0" eaLnBrk="1" latinLnBrk="0" hangingPunct="1">
+              <a:spcBef>
+                <a:spcPct val="20000"/>
+              </a:spcBef>
+              <a:buFont typeface="Arial" pitchFamily="34" charset="0"/>
+              <a:buChar char="–"/>
+              <a:defRPr sz="2800" kern="1200">
+                <a:solidFill>
+                  <a:schemeClr val="tx1"/>
+                </a:solidFill>
+                <a:latin typeface="+mn-lt"/>
+                <a:ea typeface="+mn-ea"/>
+                <a:cs typeface="+mn-cs"/>
+              </a:defRPr>
+            </a:lvl2pPr>
+            <a:lvl3pPr marL="1143000" indent="-228600" algn="l" defTabSz="914400" rtl="0" eaLnBrk="1" latinLnBrk="0" hangingPunct="1">
+              <a:spcBef>
+                <a:spcPct val="20000"/>
+              </a:spcBef>
+              <a:buFont typeface="Arial" pitchFamily="34" charset="0"/>
+              <a:buChar char="•"/>
+              <a:defRPr sz="2400" kern="1200">
+                <a:solidFill>
+                  <a:schemeClr val="tx1"/>
+                </a:solidFill>
+                <a:latin typeface="+mn-lt"/>
+                <a:ea typeface="+mn-ea"/>
+                <a:cs typeface="+mn-cs"/>
+              </a:defRPr>
+            </a:lvl3pPr>
+            <a:lvl4pPr marL="1600200" indent="-228600" algn="l" defTabSz="914400" rtl="0" eaLnBrk="1" latinLnBrk="0" hangingPunct="1">
+              <a:spcBef>
+                <a:spcPct val="20000"/>
+              </a:spcBef>
+              <a:buFont typeface="Arial" pitchFamily="34" charset="0"/>
+              <a:buChar char="–"/>
+              <a:defRPr sz="2000" kern="1200">
+                <a:solidFill>
+                  <a:schemeClr val="tx1"/>
+                </a:solidFill>
+                <a:latin typeface="+mn-lt"/>
+                <a:ea typeface="+mn-ea"/>
+                <a:cs typeface="+mn-cs"/>
+              </a:defRPr>
+            </a:lvl4pPr>
+            <a:lvl5pPr marL="2057400" indent="-228600" algn="l" defTabSz="914400" rtl="0" eaLnBrk="1" latinLnBrk="0" hangingPunct="1">
+              <a:spcBef>
+                <a:spcPct val="20000"/>
+              </a:spcBef>
+              <a:buFont typeface="Arial" pitchFamily="34" charset="0"/>
+              <a:buChar char="»"/>
+              <a:defRPr sz="2000" kern="1200">
+                <a:solidFill>
+                  <a:schemeClr val="tx1"/>
+                </a:solidFill>
+                <a:latin typeface="+mn-lt"/>
+                <a:ea typeface="+mn-ea"/>
+                <a:cs typeface="+mn-cs"/>
+              </a:defRPr>
+            </a:lvl5pPr>
+            <a:lvl6pPr marL="2514600" indent="-228600" algn="l" defTabSz="914400" rtl="0" eaLnBrk="1" latinLnBrk="0" hangingPunct="1">
+              <a:spcBef>
+                <a:spcPct val="20000"/>
+              </a:spcBef>
+              <a:buFont typeface="Arial" pitchFamily="34" charset="0"/>
+              <a:buChar char="•"/>
+              <a:defRPr sz="2000" kern="1200">
+                <a:solidFill>
+                  <a:schemeClr val="tx1"/>
+                </a:solidFill>
+                <a:latin typeface="+mn-lt"/>
+                <a:ea typeface="+mn-ea"/>
+                <a:cs typeface="+mn-cs"/>
+              </a:defRPr>
+            </a:lvl6pPr>
+            <a:lvl7pPr marL="2971800" indent="-228600" algn="l" defTabSz="914400" rtl="0" eaLnBrk="1" latinLnBrk="0" hangingPunct="1">
+              <a:spcBef>
+                <a:spcPct val="20000"/>
+              </a:spcBef>
+              <a:buFont typeface="Arial" pitchFamily="34" charset="0"/>
+              <a:buChar char="•"/>
+              <a:defRPr sz="2000" kern="1200">
+                <a:solidFill>
+                  <a:schemeClr val="tx1"/>
+                </a:solidFill>
+                <a:latin typeface="+mn-lt"/>
+                <a:ea typeface="+mn-ea"/>
+                <a:cs typeface="+mn-cs"/>
+              </a:defRPr>
+            </a:lvl7pPr>
+            <a:lvl8pPr marL="3429000" indent="-228600" algn="l" defTabSz="914400" rtl="0" eaLnBrk="1" latinLnBrk="0" hangingPunct="1">
+              <a:spcBef>
+                <a:spcPct val="20000"/>
+              </a:spcBef>
+              <a:buFont typeface="Arial" pitchFamily="34" charset="0"/>
+              <a:buChar char="•"/>
+              <a:defRPr sz="2000" kern="1200">
+                <a:solidFill>
+                  <a:schemeClr val="tx1"/>
+                </a:solidFill>
+                <a:latin typeface="+mn-lt"/>
+                <a:ea typeface="+mn-ea"/>
+                <a:cs typeface="+mn-cs"/>
+              </a:defRPr>
+            </a:lvl8pPr>
+            <a:lvl9pPr marL="3886200" indent="-228600" algn="l" defTabSz="914400" rtl="0" eaLnBrk="1" latinLnBrk="0" hangingPunct="1">
+              <a:spcBef>
+                <a:spcPct val="20000"/>
+              </a:spcBef>
+              <a:buFont typeface="Arial" pitchFamily="34" charset="0"/>
+              <a:buChar char="•"/>
+              <a:defRPr sz="2000" kern="1200">
+                <a:solidFill>
+                  <a:schemeClr val="tx1"/>
+                </a:solidFill>
+                <a:latin typeface="+mn-lt"/>
+                <a:ea typeface="+mn-ea"/>
+                <a:cs typeface="+mn-cs"/>
+              </a:defRPr>
+            </a:lvl9pPr>
+          </a:lstStyle>
+          <a:p>
+            <a:endParaRPr lang="en-IE" sz="1600" dirty="0"/>
+          </a:p>
+          <a:p>
+            <a:pPr marL="514350" indent="-514350">
+              <a:buFont typeface="+mj-lt"/>
+              <a:buAutoNum type="arabicPeriod"/>
+            </a:pPr>
+            <a:r>
+              <a:rPr lang="en-IE" dirty="0"/>
+              <a:t> Method examples – return values</a:t>
+            </a:r>
+          </a:p>
+          <a:p>
+            <a:pPr marL="914400" lvl="1" indent="-514350"/>
+            <a:r>
+              <a:rPr lang="en-IE" dirty="0" err="1"/>
+              <a:t>Celcius</a:t>
+            </a:r>
+            <a:r>
+              <a:rPr lang="en-IE" dirty="0"/>
+              <a:t> / </a:t>
+            </a:r>
+            <a:r>
+              <a:rPr lang="en-IE" dirty="0" err="1"/>
+              <a:t>Farenheit</a:t>
+            </a:r>
+            <a:r>
+              <a:rPr lang="en-IE" dirty="0"/>
+              <a:t> </a:t>
+            </a:r>
+            <a:r>
+              <a:rPr lang="en-IE" b="1" dirty="0"/>
+              <a:t>Converter</a:t>
+            </a:r>
+            <a:r>
+              <a:rPr lang="en-IE" dirty="0"/>
+              <a:t>.</a:t>
+            </a:r>
+          </a:p>
+          <a:p>
+            <a:pPr marL="914400" lvl="1" indent="-514350"/>
+            <a:r>
+              <a:rPr lang="en-IE" b="1" dirty="0"/>
+              <a:t>Cubed</a:t>
+            </a:r>
+          </a:p>
+          <a:p>
+            <a:pPr marL="914400" lvl="1" indent="-514350"/>
+            <a:r>
+              <a:rPr lang="en-IE" b="1" dirty="0"/>
+              <a:t>Product</a:t>
+            </a:r>
+          </a:p>
+          <a:p>
+            <a:pPr marL="514350" indent="-514350">
+              <a:buFont typeface="+mj-lt"/>
+              <a:buAutoNum type="arabicPeriod"/>
+            </a:pPr>
+            <a:r>
+              <a:rPr lang="en-IE" b="1" dirty="0"/>
+              <a:t> </a:t>
+            </a:r>
+            <a:r>
+              <a:rPr lang="en-IE" dirty="0"/>
+              <a:t>Boolean methods</a:t>
+            </a:r>
+          </a:p>
+          <a:p>
+            <a:pPr marL="514350" indent="-514350">
+              <a:buFont typeface="+mj-lt"/>
+              <a:buAutoNum type="arabicPeriod"/>
+            </a:pPr>
+            <a:r>
+              <a:rPr lang="en-IE" b="1" dirty="0"/>
+              <a:t> Overloading</a:t>
+            </a:r>
+            <a:r>
+              <a:rPr lang="en-IE" dirty="0"/>
+              <a:t> methods.</a:t>
+            </a:r>
+          </a:p>
+        </p:txBody>
+      </p:sp>
+    </p:spTree>
+    <p:extLst>
+      <p:ext uri="{BB962C8B-B14F-4D97-AF65-F5344CB8AC3E}">
+        <p14:creationId xmlns:p14="http://schemas.microsoft.com/office/powerpoint/2010/main" val="1154549921"/>
+      </p:ext>
+    </p:extLst>
+  </p:cSld>
+  <p:clrMapOvr>
+    <a:masterClrMapping/>
+  </p:clrMapOvr>
+  <p:timing>
+    <p:tnLst>
+      <p:par>
+        <p:cTn id="1" dur="indefinite" restart="never" nodeType="tmRoot">
+          <p:childTnLst>
+            <p:seq concurrent="1" nextAc="seek">
+              <p:cTn id="2" dur="indefinite" nodeType="mainSeq">
+                <p:childTnLst>
+                  <p:par>
+                    <p:cTn id="3" fill="hold">
+                      <p:stCondLst>
+                        <p:cond delay="indefinite"/>
+                      </p:stCondLst>
+                      <p:childTnLst>
+                        <p:par>
+                          <p:cTn id="4" fill="hold">
+                            <p:stCondLst>
+                              <p:cond delay="0"/>
+                            </p:stCondLst>
+                            <p:childTnLst>
+                              <p:par>
+                                <p:cTn id="5" presetID="21" presetClass="entr" presetSubtype="1" fill="hold" grpId="0" nodeType="clickEffect">
+                                  <p:stCondLst>
+                                    <p:cond delay="0"/>
+                                  </p:stCondLst>
+                                  <p:childTnLst>
+                                    <p:set>
+                                      <p:cBhvr>
+                                        <p:cTn id="6" dur="1" fill="hold">
+                                          <p:stCondLst>
+                                            <p:cond delay="0"/>
+                                          </p:stCondLst>
+                                        </p:cTn>
+                                        <p:tgtEl>
+                                          <p:spTgt spid="7"/>
+                                        </p:tgtEl>
+                                        <p:attrNameLst>
+                                          <p:attrName>style.visibility</p:attrName>
+                                        </p:attrNameLst>
+                                      </p:cBhvr>
+                                      <p:to>
+                                        <p:strVal val="visible"/>
+                                      </p:to>
+                                    </p:set>
+                                    <p:animEffect transition="in" filter="wheel(1)">
+                                      <p:cBhvr>
+                                        <p:cTn id="7" dur="2000"/>
+                                        <p:tgtEl>
+                                          <p:spTgt spid="7"/>
+                                        </p:tgtEl>
+                                      </p:cBhvr>
+                                    </p:animEffect>
+                                  </p:childTnLst>
+                                </p:cTn>
+                              </p:par>
+                            </p:childTnLst>
+                          </p:cTn>
+                        </p:par>
+                      </p:childTnLst>
+                    </p:cTn>
+                  </p:par>
+                </p:childTnLst>
+              </p:cTn>
+              <p:prevCondLst>
+                <p:cond evt="onPrev" delay="0">
+                  <p:tgtEl>
+                    <p:sldTgt/>
+                  </p:tgtEl>
+                </p:cond>
+              </p:prevCondLst>
+              <p:nextCondLst>
+                <p:cond evt="onNext" delay="0">
+                  <p:tgtEl>
+                    <p:sldTgt/>
+                  </p:tgtEl>
+                </p:cond>
+              </p:nextCondLst>
+            </p:seq>
+          </p:childTnLst>
+        </p:cTn>
+      </p:par>
+    </p:tnLst>
+    <p:bldLst>
+      <p:bldP spid="7" grpId="0" animBg="1"/>
+    </p:bldLst>
+  </p:timing>
+</p:sld>
+</file>
+
+<file path=ppt/slides/slide20.xml><?xml version="1.0" encoding="utf-8"?>
+<p:sld xmlns:a="http://schemas.openxmlformats.org/drawingml/2006/main" xmlns:r="http://schemas.openxmlformats.org/officeDocument/2006/relationships" xmlns:p="http://schemas.openxmlformats.org/presentationml/2006/main">
+  <p:cSld>
+    <p:spTree>
+      <p:nvGrpSpPr>
+        <p:cNvPr id="1" name=""/>
+        <p:cNvGrpSpPr/>
+        <p:nvPr/>
+      </p:nvGrpSpPr>
+      <p:grpSpPr>
+        <a:xfrm>
+          <a:off x="0" y="0"/>
+          <a:ext cx="0" cy="0"/>
+          <a:chOff x="0" y="0"/>
+          <a:chExt cx="0" cy="0"/>
+        </a:xfrm>
+      </p:grpSpPr>
+      <p:sp>
+        <p:nvSpPr>
+          <p:cNvPr id="2" name="Title 1"/>
+          <p:cNvSpPr>
+            <a:spLocks noGrp="1"/>
+          </p:cNvSpPr>
+          <p:nvPr>
+            <p:ph type="title"/>
+          </p:nvPr>
+        </p:nvSpPr>
+        <p:spPr/>
+        <p:txBody>
+          <a:bodyPr/>
+          <a:lstStyle/>
+          <a:p>
+            <a:r>
+              <a:t>Typical Boolean Method Names</a:t>
+            </a:r>
+          </a:p>
+        </p:txBody>
+      </p:sp>
+      <p:sp>
+        <p:nvSpPr>
+          <p:cNvPr id="3" name="Content Placeholder 2"/>
+          <p:cNvSpPr>
+            <a:spLocks noGrp="1"/>
+          </p:cNvSpPr>
+          <p:nvPr>
+            <p:ph idx="1"/>
+          </p:nvPr>
+        </p:nvSpPr>
+        <p:spPr/>
+        <p:txBody>
+          <a:bodyPr wrap="square"/>
+          <a:lstStyle/>
+          <a:p>
+            <a:endParaRPr dirty="0"/>
+          </a:p>
+          <a:p>
+            <a:pPr>
+              <a:defRPr sz="2000"/>
+            </a:pPr>
+            <a:r>
+              <a:rPr sz="2800" dirty="0"/>
+              <a:t>Check if number is positive → </a:t>
+            </a:r>
+            <a:r>
+              <a:rPr sz="2800" dirty="0" err="1"/>
+              <a:t>isPositive</a:t>
+            </a:r>
+            <a:r>
+              <a:rPr sz="2800" dirty="0"/>
+              <a:t>()</a:t>
+            </a:r>
+          </a:p>
+          <a:p>
+            <a:pPr>
+              <a:defRPr sz="2000"/>
+            </a:pPr>
+            <a:r>
+              <a:rPr sz="2800" dirty="0"/>
+              <a:t>Check if user has access → </a:t>
+            </a:r>
+            <a:r>
+              <a:rPr sz="2800" dirty="0" err="1"/>
+              <a:t>hasAccess</a:t>
+            </a:r>
+            <a:r>
+              <a:rPr sz="2800" dirty="0"/>
+              <a:t>()</a:t>
+            </a:r>
+          </a:p>
+          <a:p>
+            <a:pPr>
+              <a:defRPr sz="2000"/>
+            </a:pPr>
+            <a:r>
+              <a:rPr sz="2800" dirty="0"/>
+              <a:t>Check if list is empty → </a:t>
+            </a:r>
+            <a:r>
+              <a:rPr sz="2800" dirty="0" err="1"/>
+              <a:t>isEmpty</a:t>
+            </a:r>
+            <a:r>
+              <a:rPr sz="2800" dirty="0"/>
+              <a:t>()</a:t>
+            </a:r>
+          </a:p>
+          <a:p>
+            <a:pPr>
+              <a:defRPr sz="2000"/>
+            </a:pPr>
+            <a:r>
+              <a:rPr sz="2800" dirty="0"/>
+              <a:t>Check if two values match → equals()</a:t>
+            </a:r>
+          </a:p>
+          <a:p>
+            <a:pPr>
+              <a:defRPr sz="2000"/>
+            </a:pPr>
+            <a:r>
+              <a:rPr sz="2800" dirty="0"/>
+              <a:t>Tip: Boolean methods usually start with verbs like is, has, or can.</a:t>
+            </a:r>
+          </a:p>
+        </p:txBody>
+      </p:sp>
+    </p:spTree>
+  </p:cSld>
+  <p:clrMapOvr>
+    <a:masterClrMapping/>
+  </p:clrMapOvr>
+  <p:timing>
+    <p:tnLst>
+      <p:par>
+        <p:cTn id="1" dur="indefinite" restart="never" nodeType="tmRoot">
+          <p:childTnLst>
+            <p:seq concurrent="1" nextAc="seek">
+              <p:cTn id="2" dur="indefinite" nodeType="mainSeq">
+                <p:childTnLst>
+                  <p:par>
+                    <p:cTn id="3" fill="hold">
+                      <p:stCondLst>
+                        <p:cond delay="indefinite"/>
+                      </p:stCondLst>
+                      <p:childTnLst>
+                        <p:par>
+                          <p:cTn id="4" fill="hold">
+                            <p:stCondLst>
+                              <p:cond delay="0"/>
+                            </p:stCondLst>
+                            <p:childTnLst>
+                              <p:par>
+                                <p:cTn id="5" presetID="2" presetClass="entr" presetSubtype="4" fill="hold" nodeType="clickEffect">
+                                  <p:stCondLst>
+                                    <p:cond delay="0"/>
+                                  </p:stCondLst>
+                                  <p:childTnLst>
+                                    <p:set>
+                                      <p:cBhvr>
+                                        <p:cTn id="6" dur="1" fill="hold">
+                                          <p:stCondLst>
+                                            <p:cond delay="0"/>
+                                          </p:stCondLst>
+                                        </p:cTn>
+                                        <p:tgtEl>
+                                          <p:spTgt spid="3">
+                                            <p:txEl>
+                                              <p:pRg st="1" end="1"/>
+                                            </p:txEl>
+                                          </p:spTgt>
+                                        </p:tgtEl>
+                                        <p:attrNameLst>
+                                          <p:attrName>style.visibility</p:attrName>
+                                        </p:attrNameLst>
+                                      </p:cBhvr>
+                                      <p:to>
+                                        <p:strVal val="visible"/>
+                                      </p:to>
+                                    </p:set>
+                                    <p:anim calcmode="lin" valueType="num">
+                                      <p:cBhvr additive="base">
+                                        <p:cTn id="7" dur="500" fill="hold"/>
+                                        <p:tgtEl>
+                                          <p:spTgt spid="3">
+                                            <p:txEl>
+                                              <p:pRg st="1" end="1"/>
+                                            </p:txEl>
+                                          </p:spTgt>
+                                        </p:tgtEl>
+                                        <p:attrNameLst>
+                                          <p:attrName>ppt_x</p:attrName>
+                                        </p:attrNameLst>
+                                      </p:cBhvr>
+                                      <p:tavLst>
+                                        <p:tav tm="0">
+                                          <p:val>
+                                            <p:strVal val="#ppt_x"/>
+                                          </p:val>
+                                        </p:tav>
+                                        <p:tav tm="100000">
+                                          <p:val>
+                                            <p:strVal val="#ppt_x"/>
+                                          </p:val>
+                                        </p:tav>
+                                      </p:tavLst>
+                                    </p:anim>
+                                    <p:anim calcmode="lin" valueType="num">
+                                      <p:cBhvr additive="base">
+                                        <p:cTn id="8" dur="500" fill="hold"/>
+                                        <p:tgtEl>
+                                          <p:spTgt spid="3">
+                                            <p:txEl>
+                                              <p:pRg st="1" end="1"/>
+                                            </p:txEl>
+                                          </p:spTgt>
+                                        </p:tgtEl>
+                                        <p:attrNameLst>
+                                          <p:attrName>ppt_y</p:attrName>
+                                        </p:attrNameLst>
+                                      </p:cBhvr>
+                                      <p:tavLst>
+                                        <p:tav tm="0">
+                                          <p:val>
+                                            <p:strVal val="1+#ppt_h/2"/>
+                                          </p:val>
+                                        </p:tav>
+                                        <p:tav tm="100000">
+                                          <p:val>
+                                            <p:strVal val="#ppt_y"/>
+                                          </p:val>
+                                        </p:tav>
+                                      </p:tavLst>
+                                    </p:anim>
+                                  </p:childTnLst>
+                                </p:cTn>
+                              </p:par>
+                            </p:childTnLst>
+                          </p:cTn>
+                        </p:par>
+                      </p:childTnLst>
+                    </p:cTn>
+                  </p:par>
+                  <p:par>
+                    <p:cTn id="9" fill="hold">
+                      <p:stCondLst>
+                        <p:cond delay="indefinite"/>
+                      </p:stCondLst>
+                      <p:childTnLst>
+                        <p:par>
+                          <p:cTn id="10" fill="hold">
+                            <p:stCondLst>
+                              <p:cond delay="0"/>
+                            </p:stCondLst>
+                            <p:childTnLst>
+                              <p:par>
+                                <p:cTn id="11" presetID="2" presetClass="entr" presetSubtype="4" fill="hold" nodeType="clickEffect">
+                                  <p:stCondLst>
+                                    <p:cond delay="0"/>
+                                  </p:stCondLst>
+                                  <p:childTnLst>
+                                    <p:set>
+                                      <p:cBhvr>
+                                        <p:cTn id="12" dur="1" fill="hold">
+                                          <p:stCondLst>
+                                            <p:cond delay="0"/>
+                                          </p:stCondLst>
+                                        </p:cTn>
+                                        <p:tgtEl>
+                                          <p:spTgt spid="3">
+                                            <p:txEl>
+                                              <p:pRg st="2" end="2"/>
+                                            </p:txEl>
+                                          </p:spTgt>
+                                        </p:tgtEl>
+                                        <p:attrNameLst>
+                                          <p:attrName>style.visibility</p:attrName>
+                                        </p:attrNameLst>
+                                      </p:cBhvr>
+                                      <p:to>
+                                        <p:strVal val="visible"/>
+                                      </p:to>
+                                    </p:set>
+                                    <p:anim calcmode="lin" valueType="num">
+                                      <p:cBhvr additive="base">
+                                        <p:cTn id="13" dur="500" fill="hold"/>
+                                        <p:tgtEl>
+                                          <p:spTgt spid="3">
+                                            <p:txEl>
+                                              <p:pRg st="2" end="2"/>
+                                            </p:txEl>
+                                          </p:spTgt>
+                                        </p:tgtEl>
+                                        <p:attrNameLst>
+                                          <p:attrName>ppt_x</p:attrName>
+                                        </p:attrNameLst>
+                                      </p:cBhvr>
+                                      <p:tavLst>
+                                        <p:tav tm="0">
+                                          <p:val>
+                                            <p:strVal val="#ppt_x"/>
+                                          </p:val>
+                                        </p:tav>
+                                        <p:tav tm="100000">
+                                          <p:val>
+                                            <p:strVal val="#ppt_x"/>
+                                          </p:val>
+                                        </p:tav>
+                                      </p:tavLst>
+                                    </p:anim>
+                                    <p:anim calcmode="lin" valueType="num">
+                                      <p:cBhvr additive="base">
+                                        <p:cTn id="14" dur="500" fill="hold"/>
+                                        <p:tgtEl>
+                                          <p:spTgt spid="3">
+                                            <p:txEl>
+                                              <p:pRg st="2" end="2"/>
+                                            </p:txEl>
+                                          </p:spTgt>
+                                        </p:tgtEl>
+                                        <p:attrNameLst>
+                                          <p:attrName>ppt_y</p:attrName>
+                                        </p:attrNameLst>
+                                      </p:cBhvr>
+                                      <p:tavLst>
+                                        <p:tav tm="0">
+                                          <p:val>
+                                            <p:strVal val="1+#ppt_h/2"/>
+                                          </p:val>
+                                        </p:tav>
+                                        <p:tav tm="100000">
+                                          <p:val>
+                                            <p:strVal val="#ppt_y"/>
+                                          </p:val>
+                                        </p:tav>
+                                      </p:tavLst>
+                                    </p:anim>
+                                  </p:childTnLst>
+                                </p:cTn>
+                              </p:par>
+                            </p:childTnLst>
+                          </p:cTn>
+                        </p:par>
+                      </p:childTnLst>
+                    </p:cTn>
+                  </p:par>
+                  <p:par>
+                    <p:cTn id="15" fill="hold">
+                      <p:stCondLst>
+                        <p:cond delay="indefinite"/>
+                      </p:stCondLst>
+                      <p:childTnLst>
+                        <p:par>
+                          <p:cTn id="16" fill="hold">
+                            <p:stCondLst>
+                              <p:cond delay="0"/>
+                            </p:stCondLst>
+                            <p:childTnLst>
+                              <p:par>
+                                <p:cTn id="17" presetID="2" presetClass="entr" presetSubtype="4" fill="hold" nodeType="clickEffect">
+                                  <p:stCondLst>
+                                    <p:cond delay="0"/>
+                                  </p:stCondLst>
+                                  <p:childTnLst>
+                                    <p:set>
+                                      <p:cBhvr>
+                                        <p:cTn id="18" dur="1" fill="hold">
+                                          <p:stCondLst>
+                                            <p:cond delay="0"/>
+                                          </p:stCondLst>
+                                        </p:cTn>
+                                        <p:tgtEl>
+                                          <p:spTgt spid="3">
+                                            <p:txEl>
+                                              <p:pRg st="3" end="3"/>
+                                            </p:txEl>
+                                          </p:spTgt>
+                                        </p:tgtEl>
+                                        <p:attrNameLst>
+                                          <p:attrName>style.visibility</p:attrName>
+                                        </p:attrNameLst>
+                                      </p:cBhvr>
+                                      <p:to>
+                                        <p:strVal val="visible"/>
+                                      </p:to>
+                                    </p:set>
+                                    <p:anim calcmode="lin" valueType="num">
+                                      <p:cBhvr additive="base">
+                                        <p:cTn id="19" dur="500" fill="hold"/>
+                                        <p:tgtEl>
+                                          <p:spTgt spid="3">
+                                            <p:txEl>
+                                              <p:pRg st="3" end="3"/>
+                                            </p:txEl>
+                                          </p:spTgt>
+                                        </p:tgtEl>
+                                        <p:attrNameLst>
+                                          <p:attrName>ppt_x</p:attrName>
+                                        </p:attrNameLst>
+                                      </p:cBhvr>
+                                      <p:tavLst>
+                                        <p:tav tm="0">
+                                          <p:val>
+                                            <p:strVal val="#ppt_x"/>
+                                          </p:val>
+                                        </p:tav>
+                                        <p:tav tm="100000">
+                                          <p:val>
+                                            <p:strVal val="#ppt_x"/>
+                                          </p:val>
+                                        </p:tav>
+                                      </p:tavLst>
+                                    </p:anim>
+                                    <p:anim calcmode="lin" valueType="num">
+                                      <p:cBhvr additive="base">
+                                        <p:cTn id="20" dur="500" fill="hold"/>
+                                        <p:tgtEl>
+                                          <p:spTgt spid="3">
+                                            <p:txEl>
+                                              <p:pRg st="3" end="3"/>
+                                            </p:txEl>
+                                          </p:spTgt>
+                                        </p:tgtEl>
+                                        <p:attrNameLst>
+                                          <p:attrName>ppt_y</p:attrName>
+                                        </p:attrNameLst>
+                                      </p:cBhvr>
+                                      <p:tavLst>
+                                        <p:tav tm="0">
+                                          <p:val>
+                                            <p:strVal val="1+#ppt_h/2"/>
+                                          </p:val>
+                                        </p:tav>
+                                        <p:tav tm="100000">
+                                          <p:val>
+                                            <p:strVal val="#ppt_y"/>
+                                          </p:val>
+                                        </p:tav>
+                                      </p:tavLst>
+                                    </p:anim>
+                                  </p:childTnLst>
+                                </p:cTn>
+                              </p:par>
+                            </p:childTnLst>
+                          </p:cTn>
+                        </p:par>
+                      </p:childTnLst>
+                    </p:cTn>
+                  </p:par>
+                  <p:par>
+                    <p:cTn id="21" fill="hold">
+                      <p:stCondLst>
+                        <p:cond delay="indefinite"/>
+                      </p:stCondLst>
+                      <p:childTnLst>
+                        <p:par>
+                          <p:cTn id="22" fill="hold">
+                            <p:stCondLst>
+                              <p:cond delay="0"/>
+                            </p:stCondLst>
+                            <p:childTnLst>
+                              <p:par>
+                                <p:cTn id="23" presetID="2" presetClass="entr" presetSubtype="4" fill="hold" nodeType="clickEffect">
+                                  <p:stCondLst>
+                                    <p:cond delay="0"/>
+                                  </p:stCondLst>
+                                  <p:childTnLst>
+                                    <p:set>
+                                      <p:cBhvr>
+                                        <p:cTn id="24" dur="1" fill="hold">
+                                          <p:stCondLst>
+                                            <p:cond delay="0"/>
+                                          </p:stCondLst>
+                                        </p:cTn>
+                                        <p:tgtEl>
+                                          <p:spTgt spid="3">
+                                            <p:txEl>
+                                              <p:pRg st="4" end="4"/>
+                                            </p:txEl>
+                                          </p:spTgt>
+                                        </p:tgtEl>
+                                        <p:attrNameLst>
+                                          <p:attrName>style.visibility</p:attrName>
+                                        </p:attrNameLst>
+                                      </p:cBhvr>
+                                      <p:to>
+                                        <p:strVal val="visible"/>
+                                      </p:to>
+                                    </p:set>
+                                    <p:anim calcmode="lin" valueType="num">
+                                      <p:cBhvr additive="base">
+                                        <p:cTn id="25" dur="500" fill="hold"/>
+                                        <p:tgtEl>
+                                          <p:spTgt spid="3">
+                                            <p:txEl>
+                                              <p:pRg st="4" end="4"/>
+                                            </p:txEl>
+                                          </p:spTgt>
+                                        </p:tgtEl>
+                                        <p:attrNameLst>
+                                          <p:attrName>ppt_x</p:attrName>
+                                        </p:attrNameLst>
+                                      </p:cBhvr>
+                                      <p:tavLst>
+                                        <p:tav tm="0">
+                                          <p:val>
+                                            <p:strVal val="#ppt_x"/>
+                                          </p:val>
+                                        </p:tav>
+                                        <p:tav tm="100000">
+                                          <p:val>
+                                            <p:strVal val="#ppt_x"/>
+                                          </p:val>
+                                        </p:tav>
+                                      </p:tavLst>
+                                    </p:anim>
+                                    <p:anim calcmode="lin" valueType="num">
+                                      <p:cBhvr additive="base">
+                                        <p:cTn id="26" dur="500" fill="hold"/>
+                                        <p:tgtEl>
+                                          <p:spTgt spid="3">
+                                            <p:txEl>
+                                              <p:pRg st="4" end="4"/>
+                                            </p:txEl>
+                                          </p:spTgt>
+                                        </p:tgtEl>
+                                        <p:attrNameLst>
+                                          <p:attrName>ppt_y</p:attrName>
+                                        </p:attrNameLst>
+                                      </p:cBhvr>
+                                      <p:tavLst>
+                                        <p:tav tm="0">
+                                          <p:val>
+                                            <p:strVal val="1+#ppt_h/2"/>
+                                          </p:val>
+                                        </p:tav>
+                                        <p:tav tm="100000">
+                                          <p:val>
+                                            <p:strVal val="#ppt_y"/>
+                                          </p:val>
+                                        </p:tav>
+                                      </p:tavLst>
+                                    </p:anim>
+                                  </p:childTnLst>
+                                </p:cTn>
+                              </p:par>
+                            </p:childTnLst>
+                          </p:cTn>
+                        </p:par>
+                      </p:childTnLst>
+                    </p:cTn>
+                  </p:par>
+                  <p:par>
+                    <p:cTn id="27" fill="hold">
+                      <p:stCondLst>
+                        <p:cond delay="indefinite"/>
+                      </p:stCondLst>
+                      <p:childTnLst>
+                        <p:par>
+                          <p:cTn id="28" fill="hold">
+                            <p:stCondLst>
+                              <p:cond delay="0"/>
+                            </p:stCondLst>
+                            <p:childTnLst>
+                              <p:par>
+                                <p:cTn id="29" presetID="2" presetClass="entr" presetSubtype="4" fill="hold" nodeType="clickEffect">
+                                  <p:stCondLst>
+                                    <p:cond delay="0"/>
+                                  </p:stCondLst>
+                                  <p:childTnLst>
+                                    <p:set>
+                                      <p:cBhvr>
+                                        <p:cTn id="30" dur="1" fill="hold">
+                                          <p:stCondLst>
+                                            <p:cond delay="0"/>
+                                          </p:stCondLst>
+                                        </p:cTn>
+                                        <p:tgtEl>
+                                          <p:spTgt spid="3">
+                                            <p:txEl>
+                                              <p:pRg st="5" end="5"/>
+                                            </p:txEl>
+                                          </p:spTgt>
+                                        </p:tgtEl>
+                                        <p:attrNameLst>
+                                          <p:attrName>style.visibility</p:attrName>
+                                        </p:attrNameLst>
+                                      </p:cBhvr>
+                                      <p:to>
+                                        <p:strVal val="visible"/>
+                                      </p:to>
+                                    </p:set>
+                                    <p:anim calcmode="lin" valueType="num">
+                                      <p:cBhvr additive="base">
+                                        <p:cTn id="31" dur="500" fill="hold"/>
+                                        <p:tgtEl>
+                                          <p:spTgt spid="3">
+                                            <p:txEl>
+                                              <p:pRg st="5" end="5"/>
+                                            </p:txEl>
+                                          </p:spTgt>
+                                        </p:tgtEl>
+                                        <p:attrNameLst>
+                                          <p:attrName>ppt_x</p:attrName>
+                                        </p:attrNameLst>
+                                      </p:cBhvr>
+                                      <p:tavLst>
+                                        <p:tav tm="0">
+                                          <p:val>
+                                            <p:strVal val="#ppt_x"/>
+                                          </p:val>
+                                        </p:tav>
+                                        <p:tav tm="100000">
+                                          <p:val>
+                                            <p:strVal val="#ppt_x"/>
+                                          </p:val>
+                                        </p:tav>
+                                      </p:tavLst>
+                                    </p:anim>
+                                    <p:anim calcmode="lin" valueType="num">
+                                      <p:cBhvr additive="base">
+                                        <p:cTn id="32" dur="500" fill="hold"/>
+                                        <p:tgtEl>
+                                          <p:spTgt spid="3">
+                                            <p:txEl>
+                                              <p:pRg st="5" end="5"/>
+                                            </p:txEl>
+                                          </p:spTgt>
+                                        </p:tgtEl>
+                                        <p:attrNameLst>
+                                          <p:attrName>ppt_y</p:attrName>
+                                        </p:attrNameLst>
+                                      </p:cBhvr>
+                                      <p:tavLst>
+                                        <p:tav tm="0">
+                                          <p:val>
+                                            <p:strVal val="1+#ppt_h/2"/>
+                                          </p:val>
+                                        </p:tav>
+                                        <p:tav tm="100000">
+                                          <p:val>
+                                            <p:strVal val="#ppt_y"/>
+                                          </p:val>
+                                        </p:tav>
+                                      </p:tavLst>
+                                    </p:anim>
+                                  </p:childTnLst>
+                                </p:cTn>
+                              </p:par>
+                            </p:childTnLst>
+                          </p:cTn>
+                        </p:par>
+                      </p:childTnLst>
+                    </p:cTn>
+                  </p:par>
+                </p:childTnLst>
+              </p:cTn>
+              <p:prevCondLst>
+                <p:cond evt="onPrev" delay="0">
+                  <p:tgtEl>
+                    <p:sldTgt/>
+                  </p:tgtEl>
+                </p:cond>
+              </p:prevCondLst>
+              <p:nextCondLst>
+                <p:cond evt="onNext" delay="0">
+                  <p:tgtEl>
+                    <p:sldTgt/>
+                  </p:tgtEl>
+                </p:cond>
+              </p:nextCondLst>
+            </p:seq>
+          </p:childTnLst>
+        </p:cTn>
+      </p:par>
+    </p:tnLst>
+  </p:timing>
+</p:sld>
+</file>
+
+<file path=ppt/slides/slide21.xml><?xml version="1.0" encoding="utf-8"?>
+<p:sld xmlns:a="http://schemas.openxmlformats.org/drawingml/2006/main" xmlns:r="http://schemas.openxmlformats.org/officeDocument/2006/relationships" xmlns:p="http://schemas.openxmlformats.org/presentationml/2006/main">
+  <p:cSld>
+    <p:spTree>
+      <p:nvGrpSpPr>
+        <p:cNvPr id="1" name=""/>
+        <p:cNvGrpSpPr/>
+        <p:nvPr/>
+      </p:nvGrpSpPr>
+      <p:grpSpPr>
+        <a:xfrm>
+          <a:off x="0" y="0"/>
+          <a:ext cx="0" cy="0"/>
+          <a:chOff x="0" y="0"/>
+          <a:chExt cx="0" cy="0"/>
+        </a:xfrm>
+      </p:grpSpPr>
+      <p:sp>
+        <p:nvSpPr>
+          <p:cNvPr id="2" name="Title 1"/>
+          <p:cNvSpPr>
+            <a:spLocks noGrp="1"/>
+          </p:cNvSpPr>
+          <p:nvPr>
+            <p:ph type="title"/>
+          </p:nvPr>
+        </p:nvSpPr>
+        <p:spPr/>
+        <p:txBody>
+          <a:bodyPr/>
+          <a:lstStyle/>
+          <a:p>
+            <a:r>
+              <a:t>Why Use Boolean Methods?</a:t>
+            </a:r>
+          </a:p>
+        </p:txBody>
+      </p:sp>
+      <p:sp>
+        <p:nvSpPr>
+          <p:cNvPr id="3" name="Content Placeholder 2"/>
+          <p:cNvSpPr>
+            <a:spLocks noGrp="1"/>
+          </p:cNvSpPr>
+          <p:nvPr>
+            <p:ph idx="1"/>
+          </p:nvPr>
+        </p:nvSpPr>
+        <p:spPr/>
+        <p:txBody>
+          <a:bodyPr wrap="square"/>
+          <a:lstStyle/>
+          <a:p>
+            <a:endParaRPr dirty="0"/>
+          </a:p>
+          <a:p>
+            <a:pPr>
+              <a:defRPr sz="2000"/>
+            </a:pPr>
+            <a:r>
+              <a:rPr dirty="0"/>
+              <a:t>✅ </a:t>
+            </a:r>
+            <a:r>
+              <a:rPr sz="2800" dirty="0"/>
+              <a:t>Make code clearer and reusable</a:t>
+            </a:r>
+          </a:p>
+          <a:p>
+            <a:pPr>
+              <a:defRPr sz="2000"/>
+            </a:pPr>
+            <a:r>
+              <a:rPr sz="2800" dirty="0"/>
+              <a:t>✅ Separate checking logic from actions</a:t>
+            </a:r>
+          </a:p>
+          <a:p>
+            <a:pPr>
+              <a:defRPr sz="2000"/>
+            </a:pPr>
+            <a:r>
+              <a:rPr sz="2800" dirty="0"/>
+              <a:t>✅ Work naturally with if, while, and logical operators (&amp;&amp;, ||, !)</a:t>
+            </a:r>
+          </a:p>
+        </p:txBody>
+      </p:sp>
+    </p:spTree>
+  </p:cSld>
+  <p:clrMapOvr>
+    <a:masterClrMapping/>
+  </p:clrMapOvr>
+  <p:timing>
+    <p:tnLst>
+      <p:par>
+        <p:cTn id="1" dur="indefinite" restart="never" nodeType="tmRoot">
+          <p:childTnLst>
+            <p:seq concurrent="1" nextAc="seek">
+              <p:cTn id="2" dur="indefinite" nodeType="mainSeq">
+                <p:childTnLst>
+                  <p:par>
+                    <p:cTn id="3" fill="hold">
+                      <p:stCondLst>
+                        <p:cond delay="indefinite"/>
+                      </p:stCondLst>
+                      <p:childTnLst>
+                        <p:par>
+                          <p:cTn id="4" fill="hold">
+                            <p:stCondLst>
+                              <p:cond delay="0"/>
+                            </p:stCondLst>
+                            <p:childTnLst>
+                              <p:par>
+                                <p:cTn id="5" presetID="2" presetClass="entr" presetSubtype="4" fill="hold" nodeType="clickEffect">
+                                  <p:stCondLst>
+                                    <p:cond delay="0"/>
+                                  </p:stCondLst>
+                                  <p:childTnLst>
+                                    <p:set>
+                                      <p:cBhvr>
+                                        <p:cTn id="6" dur="1" fill="hold">
+                                          <p:stCondLst>
+                                            <p:cond delay="0"/>
+                                          </p:stCondLst>
+                                        </p:cTn>
+                                        <p:tgtEl>
+                                          <p:spTgt spid="3">
+                                            <p:txEl>
+                                              <p:pRg st="1" end="1"/>
+                                            </p:txEl>
+                                          </p:spTgt>
+                                        </p:tgtEl>
+                                        <p:attrNameLst>
+                                          <p:attrName>style.visibility</p:attrName>
+                                        </p:attrNameLst>
+                                      </p:cBhvr>
+                                      <p:to>
+                                        <p:strVal val="visible"/>
+                                      </p:to>
+                                    </p:set>
+                                    <p:anim calcmode="lin" valueType="num">
+                                      <p:cBhvr additive="base">
+                                        <p:cTn id="7" dur="500" fill="hold"/>
+                                        <p:tgtEl>
+                                          <p:spTgt spid="3">
+                                            <p:txEl>
+                                              <p:pRg st="1" end="1"/>
+                                            </p:txEl>
+                                          </p:spTgt>
+                                        </p:tgtEl>
+                                        <p:attrNameLst>
+                                          <p:attrName>ppt_x</p:attrName>
+                                        </p:attrNameLst>
+                                      </p:cBhvr>
+                                      <p:tavLst>
+                                        <p:tav tm="0">
+                                          <p:val>
+                                            <p:strVal val="#ppt_x"/>
+                                          </p:val>
+                                        </p:tav>
+                                        <p:tav tm="100000">
+                                          <p:val>
+                                            <p:strVal val="#ppt_x"/>
+                                          </p:val>
+                                        </p:tav>
+                                      </p:tavLst>
+                                    </p:anim>
+                                    <p:anim calcmode="lin" valueType="num">
+                                      <p:cBhvr additive="base">
+                                        <p:cTn id="8" dur="500" fill="hold"/>
+                                        <p:tgtEl>
+                                          <p:spTgt spid="3">
+                                            <p:txEl>
+                                              <p:pRg st="1" end="1"/>
+                                            </p:txEl>
+                                          </p:spTgt>
+                                        </p:tgtEl>
+                                        <p:attrNameLst>
+                                          <p:attrName>ppt_y</p:attrName>
+                                        </p:attrNameLst>
+                                      </p:cBhvr>
+                                      <p:tavLst>
+                                        <p:tav tm="0">
+                                          <p:val>
+                                            <p:strVal val="1+#ppt_h/2"/>
+                                          </p:val>
+                                        </p:tav>
+                                        <p:tav tm="100000">
+                                          <p:val>
+                                            <p:strVal val="#ppt_y"/>
+                                          </p:val>
+                                        </p:tav>
+                                      </p:tavLst>
+                                    </p:anim>
+                                  </p:childTnLst>
+                                </p:cTn>
+                              </p:par>
+                            </p:childTnLst>
+                          </p:cTn>
+                        </p:par>
+                      </p:childTnLst>
+                    </p:cTn>
+                  </p:par>
+                  <p:par>
+                    <p:cTn id="9" fill="hold">
+                      <p:stCondLst>
+                        <p:cond delay="indefinite"/>
+                      </p:stCondLst>
+                      <p:childTnLst>
+                        <p:par>
+                          <p:cTn id="10" fill="hold">
+                            <p:stCondLst>
+                              <p:cond delay="0"/>
+                            </p:stCondLst>
+                            <p:childTnLst>
+                              <p:par>
+                                <p:cTn id="11" presetID="2" presetClass="entr" presetSubtype="4" fill="hold" nodeType="clickEffect">
+                                  <p:stCondLst>
+                                    <p:cond delay="0"/>
+                                  </p:stCondLst>
+                                  <p:childTnLst>
+                                    <p:set>
+                                      <p:cBhvr>
+                                        <p:cTn id="12" dur="1" fill="hold">
+                                          <p:stCondLst>
+                                            <p:cond delay="0"/>
+                                          </p:stCondLst>
+                                        </p:cTn>
+                                        <p:tgtEl>
+                                          <p:spTgt spid="3">
+                                            <p:txEl>
+                                              <p:pRg st="2" end="2"/>
+                                            </p:txEl>
+                                          </p:spTgt>
+                                        </p:tgtEl>
+                                        <p:attrNameLst>
+                                          <p:attrName>style.visibility</p:attrName>
+                                        </p:attrNameLst>
+                                      </p:cBhvr>
+                                      <p:to>
+                                        <p:strVal val="visible"/>
+                                      </p:to>
+                                    </p:set>
+                                    <p:anim calcmode="lin" valueType="num">
+                                      <p:cBhvr additive="base">
+                                        <p:cTn id="13" dur="500" fill="hold"/>
+                                        <p:tgtEl>
+                                          <p:spTgt spid="3">
+                                            <p:txEl>
+                                              <p:pRg st="2" end="2"/>
+                                            </p:txEl>
+                                          </p:spTgt>
+                                        </p:tgtEl>
+                                        <p:attrNameLst>
+                                          <p:attrName>ppt_x</p:attrName>
+                                        </p:attrNameLst>
+                                      </p:cBhvr>
+                                      <p:tavLst>
+                                        <p:tav tm="0">
+                                          <p:val>
+                                            <p:strVal val="#ppt_x"/>
+                                          </p:val>
+                                        </p:tav>
+                                        <p:tav tm="100000">
+                                          <p:val>
+                                            <p:strVal val="#ppt_x"/>
+                                          </p:val>
+                                        </p:tav>
+                                      </p:tavLst>
+                                    </p:anim>
+                                    <p:anim calcmode="lin" valueType="num">
+                                      <p:cBhvr additive="base">
+                                        <p:cTn id="14" dur="500" fill="hold"/>
+                                        <p:tgtEl>
+                                          <p:spTgt spid="3">
+                                            <p:txEl>
+                                              <p:pRg st="2" end="2"/>
+                                            </p:txEl>
+                                          </p:spTgt>
+                                        </p:tgtEl>
+                                        <p:attrNameLst>
+                                          <p:attrName>ppt_y</p:attrName>
+                                        </p:attrNameLst>
+                                      </p:cBhvr>
+                                      <p:tavLst>
+                                        <p:tav tm="0">
+                                          <p:val>
+                                            <p:strVal val="1+#ppt_h/2"/>
+                                          </p:val>
+                                        </p:tav>
+                                        <p:tav tm="100000">
+                                          <p:val>
+                                            <p:strVal val="#ppt_y"/>
+                                          </p:val>
+                                        </p:tav>
+                                      </p:tavLst>
+                                    </p:anim>
+                                  </p:childTnLst>
+                                </p:cTn>
+                              </p:par>
+                            </p:childTnLst>
+                          </p:cTn>
+                        </p:par>
+                      </p:childTnLst>
+                    </p:cTn>
+                  </p:par>
+                  <p:par>
+                    <p:cTn id="15" fill="hold">
+                      <p:stCondLst>
+                        <p:cond delay="indefinite"/>
+                      </p:stCondLst>
+                      <p:childTnLst>
+                        <p:par>
+                          <p:cTn id="16" fill="hold">
+                            <p:stCondLst>
+                              <p:cond delay="0"/>
+                            </p:stCondLst>
+                            <p:childTnLst>
+                              <p:par>
+                                <p:cTn id="17" presetID="2" presetClass="entr" presetSubtype="4" fill="hold" nodeType="clickEffect">
+                                  <p:stCondLst>
+                                    <p:cond delay="0"/>
+                                  </p:stCondLst>
+                                  <p:childTnLst>
+                                    <p:set>
+                                      <p:cBhvr>
+                                        <p:cTn id="18" dur="1" fill="hold">
+                                          <p:stCondLst>
+                                            <p:cond delay="0"/>
+                                          </p:stCondLst>
+                                        </p:cTn>
+                                        <p:tgtEl>
+                                          <p:spTgt spid="3">
+                                            <p:txEl>
+                                              <p:pRg st="3" end="3"/>
+                                            </p:txEl>
+                                          </p:spTgt>
+                                        </p:tgtEl>
+                                        <p:attrNameLst>
+                                          <p:attrName>style.visibility</p:attrName>
+                                        </p:attrNameLst>
+                                      </p:cBhvr>
+                                      <p:to>
+                                        <p:strVal val="visible"/>
+                                      </p:to>
+                                    </p:set>
+                                    <p:anim calcmode="lin" valueType="num">
+                                      <p:cBhvr additive="base">
+                                        <p:cTn id="19" dur="500" fill="hold"/>
+                                        <p:tgtEl>
+                                          <p:spTgt spid="3">
+                                            <p:txEl>
+                                              <p:pRg st="3" end="3"/>
+                                            </p:txEl>
+                                          </p:spTgt>
+                                        </p:tgtEl>
+                                        <p:attrNameLst>
+                                          <p:attrName>ppt_x</p:attrName>
+                                        </p:attrNameLst>
+                                      </p:cBhvr>
+                                      <p:tavLst>
+                                        <p:tav tm="0">
+                                          <p:val>
+                                            <p:strVal val="#ppt_x"/>
+                                          </p:val>
+                                        </p:tav>
+                                        <p:tav tm="100000">
+                                          <p:val>
+                                            <p:strVal val="#ppt_x"/>
+                                          </p:val>
+                                        </p:tav>
+                                      </p:tavLst>
+                                    </p:anim>
+                                    <p:anim calcmode="lin" valueType="num">
+                                      <p:cBhvr additive="base">
+                                        <p:cTn id="20" dur="500" fill="hold"/>
+                                        <p:tgtEl>
+                                          <p:spTgt spid="3">
+                                            <p:txEl>
+                                              <p:pRg st="3" end="3"/>
+                                            </p:txEl>
+                                          </p:spTgt>
+                                        </p:tgtEl>
+                                        <p:attrNameLst>
+                                          <p:attrName>ppt_y</p:attrName>
+                                        </p:attrNameLst>
+                                      </p:cBhvr>
+                                      <p:tavLst>
+                                        <p:tav tm="0">
+                                          <p:val>
+                                            <p:strVal val="1+#ppt_h/2"/>
+                                          </p:val>
+                                        </p:tav>
+                                        <p:tav tm="100000">
+                                          <p:val>
+                                            <p:strVal val="#ppt_y"/>
+                                          </p:val>
+                                        </p:tav>
+                                      </p:tavLst>
+                                    </p:anim>
+                                  </p:childTnLst>
+                                </p:cTn>
+                              </p:par>
+                            </p:childTnLst>
+                          </p:cTn>
+                        </p:par>
+                      </p:childTnLst>
+                    </p:cTn>
+                  </p:par>
+                </p:childTnLst>
+              </p:cTn>
+              <p:prevCondLst>
+                <p:cond evt="onPrev" delay="0">
+                  <p:tgtEl>
+                    <p:sldTgt/>
+                  </p:tgtEl>
+                </p:cond>
+              </p:prevCondLst>
+              <p:nextCondLst>
+                <p:cond evt="onNext" delay="0">
+                  <p:tgtEl>
+                    <p:sldTgt/>
+                  </p:tgtEl>
+                </p:cond>
+              </p:nextCondLst>
+            </p:seq>
+          </p:childTnLst>
+        </p:cTn>
+      </p:par>
+    </p:tnLst>
+  </p:timing>
+</p:sld>
+</file>
+
+<file path=ppt/slides/slide22.xml><?xml version="1.0" encoding="utf-8"?>
+<p:sld xmlns:a="http://schemas.openxmlformats.org/drawingml/2006/main" xmlns:r="http://schemas.openxmlformats.org/officeDocument/2006/relationships" xmlns:p="http://schemas.openxmlformats.org/presentationml/2006/main">
+  <p:cSld>
+    <p:spTree>
+      <p:nvGrpSpPr>
+        <p:cNvPr id="1" name=""/>
+        <p:cNvGrpSpPr/>
+        <p:nvPr/>
+      </p:nvGrpSpPr>
+      <p:grpSpPr>
+        <a:xfrm>
+          <a:off x="0" y="0"/>
+          <a:ext cx="0" cy="0"/>
+          <a:chOff x="0" y="0"/>
+          <a:chExt cx="0" cy="0"/>
+        </a:xfrm>
+      </p:grpSpPr>
+      <p:sp>
+        <p:nvSpPr>
+          <p:cNvPr id="2" name="Title 1"/>
+          <p:cNvSpPr>
+            <a:spLocks noGrp="1"/>
+          </p:cNvSpPr>
+          <p:nvPr>
+            <p:ph type="title"/>
+          </p:nvPr>
+        </p:nvSpPr>
+        <p:spPr/>
+        <p:txBody>
+          <a:bodyPr/>
+          <a:lstStyle/>
+          <a:p>
+            <a:r>
+              <a:rPr lang="en-IE" dirty="0"/>
+              <a:t>Other Examples</a:t>
+            </a:r>
+            <a:endParaRPr dirty="0"/>
+          </a:p>
+        </p:txBody>
+      </p:sp>
+      <p:sp>
+        <p:nvSpPr>
+          <p:cNvPr id="3" name="Content Placeholder 2"/>
+          <p:cNvSpPr>
+            <a:spLocks noGrp="1"/>
+          </p:cNvSpPr>
+          <p:nvPr>
+            <p:ph idx="1"/>
+          </p:nvPr>
+        </p:nvSpPr>
+        <p:spPr/>
+        <p:txBody>
+          <a:bodyPr wrap="square"/>
+          <a:lstStyle/>
+          <a:p>
+            <a:pPr marL="0" indent="0">
+              <a:buNone/>
+            </a:pPr>
+            <a:r>
+              <a:rPr lang="en-IE" dirty="0"/>
+              <a:t>Check is a number between (inclusive) a lower and upper limit</a:t>
+            </a:r>
+          </a:p>
+          <a:p>
+            <a:pPr marL="0" indent="0">
+              <a:buNone/>
+            </a:pPr>
+            <a:endParaRPr dirty="0"/>
+          </a:p>
+        </p:txBody>
+      </p:sp>
+      <p:sp>
+        <p:nvSpPr>
+          <p:cNvPr id="4" name="TextBox 3">
+            <a:extLst>
+              <a:ext uri="{FF2B5EF4-FFF2-40B4-BE49-F238E27FC236}">
+                <a16:creationId xmlns:a16="http://schemas.microsoft.com/office/drawing/2014/main" id="{BDC7F0F3-B4B5-56A6-C242-BC0FB6CABE89}"/>
+              </a:ext>
+            </a:extLst>
+          </p:cNvPr>
+          <p:cNvSpPr txBox="1"/>
+          <p:nvPr/>
+        </p:nvSpPr>
+        <p:spPr>
+          <a:xfrm>
+            <a:off x="228600" y="2856306"/>
+            <a:ext cx="11963400" cy="3046988"/>
+          </a:xfrm>
+          <a:prstGeom prst="rect">
+            <a:avLst/>
+          </a:prstGeom>
+          <a:solidFill>
+            <a:schemeClr val="accent6">
+              <a:lumMod val="40000"/>
+              <a:lumOff val="60000"/>
+            </a:schemeClr>
+          </a:solidFill>
+          <a:ln>
+            <a:solidFill>
+              <a:schemeClr val="tx1"/>
+            </a:solidFill>
+          </a:ln>
+        </p:spPr>
+        <p:txBody>
+          <a:bodyPr wrap="square" rtlCol="0">
+            <a:spAutoFit/>
+          </a:bodyPr>
+          <a:lstStyle/>
+          <a:p>
+            <a:pPr>
+              <a:defRPr sz="2000"/>
+            </a:pPr>
+            <a:r>
+              <a:rPr lang="en-IE" sz="2400" dirty="0">
+                <a:latin typeface="Consolas" panose="020B0609020204030204" pitchFamily="49" charset="0"/>
+                <a:cs typeface="Consolas" panose="020B0609020204030204" pitchFamily="49" charset="0"/>
+              </a:rPr>
+              <a:t>public </a:t>
+            </a:r>
+            <a:r>
+              <a:rPr lang="en-IE" sz="2400" dirty="0" err="1">
+                <a:latin typeface="Consolas" panose="020B0609020204030204" pitchFamily="49" charset="0"/>
+                <a:cs typeface="Consolas" panose="020B0609020204030204" pitchFamily="49" charset="0"/>
+              </a:rPr>
+              <a:t>boolean</a:t>
+            </a:r>
+            <a:r>
+              <a:rPr lang="en-IE" sz="2400" dirty="0">
+                <a:latin typeface="Consolas" panose="020B0609020204030204" pitchFamily="49" charset="0"/>
+                <a:cs typeface="Consolas" panose="020B0609020204030204" pitchFamily="49" charset="0"/>
+              </a:rPr>
+              <a:t> </a:t>
+            </a:r>
+            <a:r>
+              <a:rPr lang="en-IE" sz="2400" dirty="0" err="1">
+                <a:latin typeface="Consolas" panose="020B0609020204030204" pitchFamily="49" charset="0"/>
+                <a:cs typeface="Consolas" panose="020B0609020204030204" pitchFamily="49" charset="0"/>
+              </a:rPr>
+              <a:t>isBetween</a:t>
+            </a:r>
+            <a:r>
+              <a:rPr lang="en-IE" sz="2400" dirty="0">
+                <a:latin typeface="Consolas" panose="020B0609020204030204" pitchFamily="49" charset="0"/>
+                <a:cs typeface="Consolas" panose="020B0609020204030204" pitchFamily="49" charset="0"/>
+              </a:rPr>
+              <a:t>(int </a:t>
+            </a:r>
+            <a:r>
+              <a:rPr lang="en-IE" sz="2400" dirty="0" err="1">
+                <a:latin typeface="Consolas" panose="020B0609020204030204" pitchFamily="49" charset="0"/>
+                <a:cs typeface="Consolas" panose="020B0609020204030204" pitchFamily="49" charset="0"/>
+              </a:rPr>
+              <a:t>numToCheck</a:t>
+            </a:r>
+            <a:r>
+              <a:rPr lang="en-IE" sz="2400" dirty="0">
+                <a:latin typeface="Consolas" panose="020B0609020204030204" pitchFamily="49" charset="0"/>
+                <a:cs typeface="Consolas" panose="020B0609020204030204" pitchFamily="49" charset="0"/>
+              </a:rPr>
+              <a:t>, int lower, int upper) {</a:t>
+            </a:r>
+          </a:p>
+          <a:p>
+            <a:pPr>
+              <a:defRPr sz="2000"/>
+            </a:pPr>
+            <a:r>
+              <a:rPr lang="en-IE" sz="2400" dirty="0">
+                <a:latin typeface="Consolas" panose="020B0609020204030204" pitchFamily="49" charset="0"/>
+                <a:cs typeface="Consolas" panose="020B0609020204030204" pitchFamily="49" charset="0"/>
+              </a:rPr>
+              <a:t>    if (lower &lt;= </a:t>
+            </a:r>
+            <a:r>
+              <a:rPr lang="en-IE" sz="2400" dirty="0" err="1">
+                <a:latin typeface="Consolas" panose="020B0609020204030204" pitchFamily="49" charset="0"/>
+                <a:cs typeface="Consolas" panose="020B0609020204030204" pitchFamily="49" charset="0"/>
+              </a:rPr>
+              <a:t>numToCheck</a:t>
+            </a:r>
+            <a:r>
+              <a:rPr lang="en-IE" sz="2400" dirty="0">
+                <a:latin typeface="Consolas" panose="020B0609020204030204" pitchFamily="49" charset="0"/>
+                <a:cs typeface="Consolas" panose="020B0609020204030204" pitchFamily="49" charset="0"/>
+              </a:rPr>
+              <a:t> &amp;&amp; </a:t>
+            </a:r>
+            <a:r>
+              <a:rPr lang="en-IE" sz="2400" dirty="0" err="1">
+                <a:latin typeface="Consolas" panose="020B0609020204030204" pitchFamily="49" charset="0"/>
+                <a:cs typeface="Consolas" panose="020B0609020204030204" pitchFamily="49" charset="0"/>
+              </a:rPr>
+              <a:t>numCheck</a:t>
+            </a:r>
+            <a:r>
+              <a:rPr lang="en-IE" sz="2400" dirty="0">
+                <a:latin typeface="Consolas" panose="020B0609020204030204" pitchFamily="49" charset="0"/>
+                <a:cs typeface="Consolas" panose="020B0609020204030204" pitchFamily="49" charset="0"/>
+              </a:rPr>
+              <a:t> &lt;= upper) { </a:t>
+            </a:r>
+          </a:p>
+          <a:p>
+            <a:pPr>
+              <a:defRPr sz="2000"/>
+            </a:pPr>
+            <a:r>
+              <a:rPr lang="en-IE" sz="2400" dirty="0">
+                <a:latin typeface="Consolas" panose="020B0609020204030204" pitchFamily="49" charset="0"/>
+                <a:cs typeface="Consolas" panose="020B0609020204030204" pitchFamily="49" charset="0"/>
+              </a:rPr>
+              <a:t>        return true; </a:t>
+            </a:r>
+          </a:p>
+          <a:p>
+            <a:pPr>
+              <a:defRPr sz="2000"/>
+            </a:pPr>
+            <a:r>
+              <a:rPr lang="en-IE" sz="2400" dirty="0">
+                <a:latin typeface="Consolas" panose="020B0609020204030204" pitchFamily="49" charset="0"/>
+                <a:cs typeface="Consolas" panose="020B0609020204030204" pitchFamily="49" charset="0"/>
+              </a:rPr>
+              <a:t>       }</a:t>
+            </a:r>
+          </a:p>
+          <a:p>
+            <a:pPr>
+              <a:defRPr sz="2000"/>
+            </a:pPr>
+            <a:r>
+              <a:rPr lang="en-IE" sz="2400" dirty="0">
+                <a:latin typeface="Consolas" panose="020B0609020204030204" pitchFamily="49" charset="0"/>
+                <a:cs typeface="Consolas" panose="020B0609020204030204" pitchFamily="49" charset="0"/>
+              </a:rPr>
+              <a:t>    else {</a:t>
+            </a:r>
+          </a:p>
+          <a:p>
+            <a:pPr>
+              <a:defRPr sz="2000"/>
+            </a:pPr>
+            <a:r>
+              <a:rPr lang="en-IE" sz="2400" dirty="0">
+                <a:latin typeface="Consolas" panose="020B0609020204030204" pitchFamily="49" charset="0"/>
+                <a:cs typeface="Consolas" panose="020B0609020204030204" pitchFamily="49" charset="0"/>
+              </a:rPr>
+              <a:t>       return false;</a:t>
+            </a:r>
+          </a:p>
+          <a:p>
+            <a:pPr>
+              <a:defRPr sz="2000"/>
+            </a:pPr>
+            <a:r>
+              <a:rPr lang="en-IE" sz="2400" dirty="0">
+                <a:latin typeface="Consolas" panose="020B0609020204030204" pitchFamily="49" charset="0"/>
+                <a:cs typeface="Consolas" panose="020B0609020204030204" pitchFamily="49" charset="0"/>
+              </a:rPr>
+              <a:t>    }</a:t>
+            </a:r>
+          </a:p>
+          <a:p>
+            <a:pPr>
+              <a:defRPr sz="2000"/>
+            </a:pPr>
+            <a:r>
+              <a:rPr lang="en-IE" sz="2400" dirty="0">
+                <a:latin typeface="Consolas" panose="020B0609020204030204" pitchFamily="49" charset="0"/>
+                <a:cs typeface="Consolas" panose="020B0609020204030204" pitchFamily="49" charset="0"/>
+              </a:rPr>
+              <a:t>}</a:t>
+            </a:r>
+          </a:p>
+        </p:txBody>
+      </p:sp>
+    </p:spTree>
+  </p:cSld>
+  <p:clrMapOvr>
+    <a:masterClrMapping/>
+  </p:clrMapOvr>
+  <mc:AlternateContent xmlns:mc="http://schemas.openxmlformats.org/markup-compatibility/2006" xmlns:p159="http://schemas.microsoft.com/office/powerpoint/2015/09/main">
+    <mc:Choice Requires="p159">
+      <p:transition xmlns:p14="http://schemas.microsoft.com/office/powerpoint/2010/main" spd="slow" p14:dur="2000">
+        <p159:morph option="byObject"/>
+      </p:transition>
+    </mc:Choice>
+    <mc:Fallback xmlns="">
+      <p:transition spd="slow">
+        <p:fade/>
+      </p:transition>
+    </mc:Fallback>
+  </mc:AlternateContent>
+</p:sld>
+</file>
+
+<file path=ppt/slides/slide23.xml><?xml version="1.0" encoding="utf-8"?>
+<p:sld xmlns:a="http://schemas.openxmlformats.org/drawingml/2006/main" xmlns:r="http://schemas.openxmlformats.org/officeDocument/2006/relationships" xmlns:p="http://schemas.openxmlformats.org/presentationml/2006/main">
+  <p:cSld>
+    <p:spTree>
+      <p:nvGrpSpPr>
+        <p:cNvPr id="1" name="">
+          <a:extLst>
+            <a:ext uri="{FF2B5EF4-FFF2-40B4-BE49-F238E27FC236}">
+              <a16:creationId xmlns:a16="http://schemas.microsoft.com/office/drawing/2014/main" id="{3B343351-C605-8A97-9DBE-4AB3583B1CEA}"/>
+            </a:ext>
+          </a:extLst>
+        </p:cNvPr>
+        <p:cNvGrpSpPr/>
+        <p:nvPr/>
+      </p:nvGrpSpPr>
+      <p:grpSpPr>
+        <a:xfrm>
+          <a:off x="0" y="0"/>
+          <a:ext cx="0" cy="0"/>
+          <a:chOff x="0" y="0"/>
+          <a:chExt cx="0" cy="0"/>
+        </a:xfrm>
+      </p:grpSpPr>
+      <p:sp>
+        <p:nvSpPr>
+          <p:cNvPr id="2" name="TextBox 1">
+            <a:extLst>
+              <a:ext uri="{FF2B5EF4-FFF2-40B4-BE49-F238E27FC236}">
+                <a16:creationId xmlns:a16="http://schemas.microsoft.com/office/drawing/2014/main" id="{D2E71FA8-F08C-9236-0DBC-F45F9CE2680B}"/>
+              </a:ext>
+            </a:extLst>
+          </p:cNvPr>
+          <p:cNvSpPr txBox="1"/>
+          <p:nvPr/>
+        </p:nvSpPr>
+        <p:spPr>
+          <a:xfrm>
+            <a:off x="566281" y="1371600"/>
+            <a:ext cx="11059438" cy="3323987"/>
+          </a:xfrm>
+          <a:prstGeom prst="rect">
+            <a:avLst/>
+          </a:prstGeom>
+          <a:solidFill>
+            <a:schemeClr val="accent6">
+              <a:lumMod val="60000"/>
+              <a:lumOff val="40000"/>
+            </a:schemeClr>
+          </a:solidFill>
+          <a:ln>
+            <a:solidFill>
+              <a:schemeClr val="tx1"/>
+            </a:solidFill>
+          </a:ln>
+        </p:spPr>
+        <p:txBody>
+          <a:bodyPr wrap="none">
+            <a:spAutoFit/>
+          </a:bodyPr>
+          <a:lstStyle/>
+          <a:p>
+            <a:endParaRPr dirty="0"/>
+          </a:p>
+          <a:p>
+            <a:pPr>
+              <a:defRPr sz="2000"/>
+            </a:pPr>
+            <a:r>
+              <a:rPr lang="en-IE" sz="2400" dirty="0">
+                <a:latin typeface="Consolas" panose="020B0609020204030204" pitchFamily="49" charset="0"/>
+                <a:cs typeface="Consolas" panose="020B0609020204030204" pitchFamily="49" charset="0"/>
+              </a:rPr>
+              <a:t>public </a:t>
+            </a:r>
+            <a:r>
+              <a:rPr lang="en-IE" sz="2400" dirty="0" err="1">
+                <a:latin typeface="Consolas" panose="020B0609020204030204" pitchFamily="49" charset="0"/>
+                <a:cs typeface="Consolas" panose="020B0609020204030204" pitchFamily="49" charset="0"/>
+              </a:rPr>
+              <a:t>boolean</a:t>
+            </a:r>
+            <a:r>
+              <a:rPr lang="en-IE" sz="2400" dirty="0">
+                <a:latin typeface="Consolas" panose="020B0609020204030204" pitchFamily="49" charset="0"/>
+                <a:cs typeface="Consolas" panose="020B0609020204030204" pitchFamily="49" charset="0"/>
+              </a:rPr>
+              <a:t> </a:t>
+            </a:r>
+            <a:r>
+              <a:rPr lang="en-IE" sz="2400" dirty="0" err="1">
+                <a:latin typeface="Consolas" panose="020B0609020204030204" pitchFamily="49" charset="0"/>
+                <a:cs typeface="Consolas" panose="020B0609020204030204" pitchFamily="49" charset="0"/>
+              </a:rPr>
+              <a:t>isBetween</a:t>
+            </a:r>
+            <a:r>
+              <a:rPr lang="en-IE" sz="2400" dirty="0">
+                <a:latin typeface="Consolas" panose="020B0609020204030204" pitchFamily="49" charset="0"/>
+                <a:cs typeface="Consolas" panose="020B0609020204030204" pitchFamily="49" charset="0"/>
+              </a:rPr>
+              <a:t>(int </a:t>
+            </a:r>
+            <a:r>
+              <a:rPr lang="en-IE" sz="2400" dirty="0" err="1">
+                <a:latin typeface="Consolas" panose="020B0609020204030204" pitchFamily="49" charset="0"/>
+                <a:cs typeface="Consolas" panose="020B0609020204030204" pitchFamily="49" charset="0"/>
+              </a:rPr>
+              <a:t>numToCheck</a:t>
+            </a:r>
+            <a:r>
+              <a:rPr lang="en-IE" sz="2400" dirty="0">
+                <a:latin typeface="Consolas" panose="020B0609020204030204" pitchFamily="49" charset="0"/>
+                <a:cs typeface="Consolas" panose="020B0609020204030204" pitchFamily="49" charset="0"/>
+              </a:rPr>
+              <a:t>, int lower, int upper) {</a:t>
+            </a:r>
+          </a:p>
+          <a:p>
+            <a:pPr>
+              <a:defRPr sz="2000"/>
+            </a:pPr>
+            <a:r>
+              <a:rPr lang="en-IE" sz="2400" dirty="0">
+                <a:latin typeface="Consolas" panose="020B0609020204030204" pitchFamily="49" charset="0"/>
+                <a:cs typeface="Consolas" panose="020B0609020204030204" pitchFamily="49" charset="0"/>
+              </a:rPr>
+              <a:t>    if (lower &lt;= </a:t>
+            </a:r>
+            <a:r>
+              <a:rPr lang="en-IE" sz="2400" dirty="0" err="1">
+                <a:latin typeface="Consolas" panose="020B0609020204030204" pitchFamily="49" charset="0"/>
+                <a:cs typeface="Consolas" panose="020B0609020204030204" pitchFamily="49" charset="0"/>
+              </a:rPr>
+              <a:t>numToCheck</a:t>
+            </a:r>
+            <a:r>
+              <a:rPr lang="en-IE" sz="2400" dirty="0">
+                <a:latin typeface="Consolas" panose="020B0609020204030204" pitchFamily="49" charset="0"/>
+                <a:cs typeface="Consolas" panose="020B0609020204030204" pitchFamily="49" charset="0"/>
+              </a:rPr>
+              <a:t> &amp;&amp; </a:t>
+            </a:r>
+            <a:r>
+              <a:rPr lang="en-IE" sz="2400" dirty="0" err="1">
+                <a:latin typeface="Consolas" panose="020B0609020204030204" pitchFamily="49" charset="0"/>
+                <a:cs typeface="Consolas" panose="020B0609020204030204" pitchFamily="49" charset="0"/>
+              </a:rPr>
+              <a:t>numCheck</a:t>
+            </a:r>
+            <a:r>
+              <a:rPr lang="en-IE" sz="2400" dirty="0">
+                <a:latin typeface="Consolas" panose="020B0609020204030204" pitchFamily="49" charset="0"/>
+                <a:cs typeface="Consolas" panose="020B0609020204030204" pitchFamily="49" charset="0"/>
+              </a:rPr>
+              <a:t> &lt;= upper) { </a:t>
+            </a:r>
+          </a:p>
+          <a:p>
+            <a:pPr>
+              <a:defRPr sz="2000"/>
+            </a:pPr>
+            <a:r>
+              <a:rPr lang="en-IE" sz="2400" dirty="0">
+                <a:latin typeface="Consolas" panose="020B0609020204030204" pitchFamily="49" charset="0"/>
+                <a:cs typeface="Consolas" panose="020B0609020204030204" pitchFamily="49" charset="0"/>
+              </a:rPr>
+              <a:t>        return true; </a:t>
+            </a:r>
+          </a:p>
+          <a:p>
+            <a:pPr>
+              <a:defRPr sz="2000"/>
+            </a:pPr>
+            <a:r>
+              <a:rPr lang="en-IE" sz="2400" dirty="0">
+                <a:latin typeface="Consolas" panose="020B0609020204030204" pitchFamily="49" charset="0"/>
+                <a:cs typeface="Consolas" panose="020B0609020204030204" pitchFamily="49" charset="0"/>
+              </a:rPr>
+              <a:t>       }</a:t>
+            </a:r>
+          </a:p>
+          <a:p>
+            <a:pPr>
+              <a:defRPr sz="2000"/>
+            </a:pPr>
+            <a:r>
+              <a:rPr lang="en-IE" sz="2400" dirty="0">
+                <a:latin typeface="Consolas" panose="020B0609020204030204" pitchFamily="49" charset="0"/>
+                <a:cs typeface="Consolas" panose="020B0609020204030204" pitchFamily="49" charset="0"/>
+              </a:rPr>
+              <a:t>    else {</a:t>
+            </a:r>
+          </a:p>
+          <a:p>
+            <a:pPr>
+              <a:defRPr sz="2000"/>
+            </a:pPr>
+            <a:r>
+              <a:rPr lang="en-IE" sz="2400" dirty="0">
+                <a:latin typeface="Consolas" panose="020B0609020204030204" pitchFamily="49" charset="0"/>
+                <a:cs typeface="Consolas" panose="020B0609020204030204" pitchFamily="49" charset="0"/>
+              </a:rPr>
+              <a:t>       return false;</a:t>
+            </a:r>
+          </a:p>
+          <a:p>
+            <a:pPr>
+              <a:defRPr sz="2000"/>
+            </a:pPr>
+            <a:r>
+              <a:rPr lang="en-IE" sz="2400" dirty="0">
+                <a:latin typeface="Consolas" panose="020B0609020204030204" pitchFamily="49" charset="0"/>
+                <a:cs typeface="Consolas" panose="020B0609020204030204" pitchFamily="49" charset="0"/>
+              </a:rPr>
+              <a:t>    }</a:t>
+            </a:r>
+          </a:p>
+          <a:p>
+            <a:pPr>
+              <a:defRPr sz="2000"/>
+            </a:pPr>
+            <a:r>
+              <a:rPr lang="en-IE" sz="2400" dirty="0">
+                <a:latin typeface="Consolas" panose="020B0609020204030204" pitchFamily="49" charset="0"/>
+                <a:cs typeface="Consolas" panose="020B0609020204030204" pitchFamily="49" charset="0"/>
+              </a:rPr>
+              <a:t>}</a:t>
+            </a:r>
+          </a:p>
+        </p:txBody>
+      </p:sp>
+    </p:spTree>
+    <p:extLst>
+      <p:ext uri="{BB962C8B-B14F-4D97-AF65-F5344CB8AC3E}">
+        <p14:creationId xmlns:p14="http://schemas.microsoft.com/office/powerpoint/2010/main" val="1948027256"/>
+      </p:ext>
+    </p:extLst>
+  </p:cSld>
+  <p:clrMapOvr>
+    <a:masterClrMapping/>
+  </p:clrMapOvr>
+</p:sld>
+</file>
+
+<file path=ppt/slides/slide24.xml><?xml version="1.0" encoding="utf-8"?>
+<p:sld xmlns:a="http://schemas.openxmlformats.org/drawingml/2006/main" xmlns:r="http://schemas.openxmlformats.org/officeDocument/2006/relationships" xmlns:p="http://schemas.openxmlformats.org/presentationml/2006/main">
+  <p:cSld>
+    <p:spTree>
+      <p:nvGrpSpPr>
+        <p:cNvPr id="1" name="">
+          <a:extLst>
+            <a:ext uri="{FF2B5EF4-FFF2-40B4-BE49-F238E27FC236}">
+              <a16:creationId xmlns:a16="http://schemas.microsoft.com/office/drawing/2014/main" id="{FDCE4248-C5A6-1853-5A02-7D3F2959A1AF}"/>
+            </a:ext>
+          </a:extLst>
+        </p:cNvPr>
+        <p:cNvGrpSpPr/>
+        <p:nvPr/>
+      </p:nvGrpSpPr>
+      <p:grpSpPr>
+        <a:xfrm>
+          <a:off x="0" y="0"/>
+          <a:ext cx="0" cy="0"/>
+          <a:chOff x="0" y="0"/>
+          <a:chExt cx="0" cy="0"/>
+        </a:xfrm>
+      </p:grpSpPr>
+      <p:sp>
+        <p:nvSpPr>
+          <p:cNvPr id="2" name="TextBox 1">
+            <a:extLst>
+              <a:ext uri="{FF2B5EF4-FFF2-40B4-BE49-F238E27FC236}">
+                <a16:creationId xmlns:a16="http://schemas.microsoft.com/office/drawing/2014/main" id="{B0445C00-4B0F-74C9-2A7D-FE3AD13D791E}"/>
+              </a:ext>
+            </a:extLst>
+          </p:cNvPr>
+          <p:cNvSpPr txBox="1"/>
+          <p:nvPr/>
+        </p:nvSpPr>
+        <p:spPr>
+          <a:xfrm>
+            <a:off x="381000" y="1371601"/>
+            <a:ext cx="9212778" cy="2554545"/>
+          </a:xfrm>
+          <a:prstGeom prst="rect">
+            <a:avLst/>
+          </a:prstGeom>
+          <a:solidFill>
+            <a:schemeClr val="accent6">
+              <a:lumMod val="60000"/>
+              <a:lumOff val="40000"/>
+            </a:schemeClr>
+          </a:solidFill>
+          <a:ln>
+            <a:solidFill>
+              <a:schemeClr val="tx1"/>
+            </a:solidFill>
+          </a:ln>
+        </p:spPr>
+        <p:txBody>
+          <a:bodyPr wrap="none">
+            <a:spAutoFit/>
+          </a:bodyPr>
+          <a:lstStyle/>
+          <a:p>
+            <a:pPr>
+              <a:defRPr sz="2000"/>
+            </a:pPr>
+            <a:r>
+              <a:rPr lang="en-IE" dirty="0">
+                <a:latin typeface="Consolas" panose="020B0609020204030204" pitchFamily="49" charset="0"/>
+                <a:cs typeface="Consolas" panose="020B0609020204030204" pitchFamily="49" charset="0"/>
+              </a:rPr>
+              <a:t>public </a:t>
+            </a:r>
+            <a:r>
+              <a:rPr lang="en-IE" dirty="0" err="1">
+                <a:latin typeface="Consolas" panose="020B0609020204030204" pitchFamily="49" charset="0"/>
+                <a:cs typeface="Consolas" panose="020B0609020204030204" pitchFamily="49" charset="0"/>
+              </a:rPr>
+              <a:t>boolean</a:t>
+            </a:r>
+            <a:r>
+              <a:rPr lang="en-IE" dirty="0">
+                <a:latin typeface="Consolas" panose="020B0609020204030204" pitchFamily="49" charset="0"/>
+                <a:cs typeface="Consolas" panose="020B0609020204030204" pitchFamily="49" charset="0"/>
+              </a:rPr>
+              <a:t> </a:t>
+            </a:r>
+            <a:r>
+              <a:rPr lang="en-IE" dirty="0" err="1">
+                <a:latin typeface="Consolas" panose="020B0609020204030204" pitchFamily="49" charset="0"/>
+                <a:cs typeface="Consolas" panose="020B0609020204030204" pitchFamily="49" charset="0"/>
+              </a:rPr>
+              <a:t>isBetween</a:t>
+            </a:r>
+            <a:r>
+              <a:rPr lang="en-IE" dirty="0">
+                <a:latin typeface="Consolas" panose="020B0609020204030204" pitchFamily="49" charset="0"/>
+                <a:cs typeface="Consolas" panose="020B0609020204030204" pitchFamily="49" charset="0"/>
+              </a:rPr>
+              <a:t>(int </a:t>
+            </a:r>
+            <a:r>
+              <a:rPr lang="en-IE" dirty="0" err="1">
+                <a:latin typeface="Consolas" panose="020B0609020204030204" pitchFamily="49" charset="0"/>
+                <a:cs typeface="Consolas" panose="020B0609020204030204" pitchFamily="49" charset="0"/>
+              </a:rPr>
+              <a:t>numToCheck</a:t>
+            </a:r>
+            <a:r>
+              <a:rPr lang="en-IE" dirty="0">
+                <a:latin typeface="Consolas" panose="020B0609020204030204" pitchFamily="49" charset="0"/>
+                <a:cs typeface="Consolas" panose="020B0609020204030204" pitchFamily="49" charset="0"/>
+              </a:rPr>
+              <a:t>, int lower, int upper) {</a:t>
+            </a:r>
+          </a:p>
+          <a:p>
+            <a:pPr>
+              <a:defRPr sz="2000"/>
+            </a:pPr>
+            <a:r>
+              <a:rPr lang="en-IE" dirty="0">
+                <a:latin typeface="Consolas" panose="020B0609020204030204" pitchFamily="49" charset="0"/>
+                <a:cs typeface="Consolas" panose="020B0609020204030204" pitchFamily="49" charset="0"/>
+              </a:rPr>
+              <a:t>    if (lower &lt;= </a:t>
+            </a:r>
+            <a:r>
+              <a:rPr lang="en-IE" dirty="0" err="1">
+                <a:latin typeface="Consolas" panose="020B0609020204030204" pitchFamily="49" charset="0"/>
+                <a:cs typeface="Consolas" panose="020B0609020204030204" pitchFamily="49" charset="0"/>
+              </a:rPr>
+              <a:t>numToCheck</a:t>
+            </a:r>
+            <a:r>
+              <a:rPr lang="en-IE" dirty="0">
+                <a:latin typeface="Consolas" panose="020B0609020204030204" pitchFamily="49" charset="0"/>
+                <a:cs typeface="Consolas" panose="020B0609020204030204" pitchFamily="49" charset="0"/>
+              </a:rPr>
+              <a:t> &amp;&amp; </a:t>
+            </a:r>
+            <a:r>
+              <a:rPr lang="en-IE" dirty="0" err="1">
+                <a:latin typeface="Consolas" panose="020B0609020204030204" pitchFamily="49" charset="0"/>
+                <a:cs typeface="Consolas" panose="020B0609020204030204" pitchFamily="49" charset="0"/>
+              </a:rPr>
+              <a:t>numCheck</a:t>
+            </a:r>
+            <a:r>
+              <a:rPr lang="en-IE" dirty="0">
+                <a:latin typeface="Consolas" panose="020B0609020204030204" pitchFamily="49" charset="0"/>
+                <a:cs typeface="Consolas" panose="020B0609020204030204" pitchFamily="49" charset="0"/>
+              </a:rPr>
+              <a:t> &lt;= upper) { </a:t>
+            </a:r>
+          </a:p>
+          <a:p>
+            <a:pPr>
+              <a:defRPr sz="2000"/>
+            </a:pPr>
+            <a:r>
+              <a:rPr lang="en-IE" dirty="0">
+                <a:latin typeface="Consolas" panose="020B0609020204030204" pitchFamily="49" charset="0"/>
+                <a:cs typeface="Consolas" panose="020B0609020204030204" pitchFamily="49" charset="0"/>
+              </a:rPr>
+              <a:t>        return true; </a:t>
+            </a:r>
+          </a:p>
+          <a:p>
+            <a:pPr>
+              <a:defRPr sz="2000"/>
+            </a:pPr>
+            <a:r>
+              <a:rPr lang="en-IE" dirty="0">
+                <a:latin typeface="Consolas" panose="020B0609020204030204" pitchFamily="49" charset="0"/>
+                <a:cs typeface="Consolas" panose="020B0609020204030204" pitchFamily="49" charset="0"/>
+              </a:rPr>
+              <a:t>       }</a:t>
+            </a:r>
+          </a:p>
+          <a:p>
+            <a:pPr>
+              <a:defRPr sz="2000"/>
+            </a:pPr>
+            <a:r>
+              <a:rPr lang="en-IE" dirty="0">
+                <a:latin typeface="Consolas" panose="020B0609020204030204" pitchFamily="49" charset="0"/>
+                <a:cs typeface="Consolas" panose="020B0609020204030204" pitchFamily="49" charset="0"/>
+              </a:rPr>
+              <a:t>    else {</a:t>
+            </a:r>
+          </a:p>
+          <a:p>
+            <a:pPr>
+              <a:defRPr sz="2000"/>
+            </a:pPr>
+            <a:r>
+              <a:rPr lang="en-IE" dirty="0">
+                <a:latin typeface="Consolas" panose="020B0609020204030204" pitchFamily="49" charset="0"/>
+                <a:cs typeface="Consolas" panose="020B0609020204030204" pitchFamily="49" charset="0"/>
+              </a:rPr>
+              <a:t>       return false;</a:t>
+            </a:r>
+          </a:p>
+          <a:p>
+            <a:pPr>
+              <a:defRPr sz="2000"/>
+            </a:pPr>
+            <a:r>
+              <a:rPr lang="en-IE" dirty="0">
+                <a:latin typeface="Consolas" panose="020B0609020204030204" pitchFamily="49" charset="0"/>
+                <a:cs typeface="Consolas" panose="020B0609020204030204" pitchFamily="49" charset="0"/>
+              </a:rPr>
+              <a:t>    }</a:t>
+            </a:r>
+          </a:p>
+          <a:p>
+            <a:pPr>
+              <a:defRPr sz="2000"/>
+            </a:pPr>
+            <a:r>
+              <a:rPr lang="en-IE" dirty="0">
+                <a:latin typeface="Consolas" panose="020B0609020204030204" pitchFamily="49" charset="0"/>
+                <a:cs typeface="Consolas" panose="020B0609020204030204" pitchFamily="49" charset="0"/>
+              </a:rPr>
+              <a:t>}</a:t>
+            </a:r>
+          </a:p>
+        </p:txBody>
+      </p:sp>
+      <p:sp>
+        <p:nvSpPr>
+          <p:cNvPr id="3" name="TextBox 2">
+            <a:extLst>
+              <a:ext uri="{FF2B5EF4-FFF2-40B4-BE49-F238E27FC236}">
+                <a16:creationId xmlns:a16="http://schemas.microsoft.com/office/drawing/2014/main" id="{A5C74368-45F0-604E-068A-626F6272EBF3}"/>
+              </a:ext>
+            </a:extLst>
+          </p:cNvPr>
+          <p:cNvSpPr txBox="1"/>
+          <p:nvPr/>
+        </p:nvSpPr>
+        <p:spPr>
+          <a:xfrm>
+            <a:off x="6324600" y="1371601"/>
+            <a:ext cx="5622052" cy="923330"/>
+          </a:xfrm>
+          <a:prstGeom prst="rect">
+            <a:avLst/>
+          </a:prstGeom>
+          <a:solidFill>
+            <a:schemeClr val="accent6">
+              <a:lumMod val="40000"/>
+              <a:lumOff val="60000"/>
+            </a:schemeClr>
+          </a:solidFill>
+          <a:ln>
+            <a:solidFill>
+              <a:schemeClr val="tx1"/>
+            </a:solidFill>
+          </a:ln>
+        </p:spPr>
+        <p:txBody>
+          <a:bodyPr wrap="none">
+            <a:spAutoFit/>
+          </a:bodyPr>
+          <a:lstStyle/>
+          <a:p>
+            <a:endParaRPr dirty="0"/>
+          </a:p>
+          <a:p>
+            <a:pPr>
+              <a:defRPr sz="2000"/>
+            </a:pPr>
+            <a:r>
+              <a:rPr lang="en-IE" sz="1200" dirty="0">
+                <a:latin typeface="Consolas" panose="020B0609020204030204" pitchFamily="49" charset="0"/>
+                <a:cs typeface="Consolas" panose="020B0609020204030204" pitchFamily="49" charset="0"/>
+              </a:rPr>
+              <a:t>public </a:t>
+            </a:r>
+            <a:r>
+              <a:rPr lang="en-IE" sz="1200" dirty="0" err="1">
+                <a:latin typeface="Consolas" panose="020B0609020204030204" pitchFamily="49" charset="0"/>
+                <a:cs typeface="Consolas" panose="020B0609020204030204" pitchFamily="49" charset="0"/>
+              </a:rPr>
+              <a:t>boolean</a:t>
+            </a:r>
+            <a:r>
+              <a:rPr lang="en-IE" sz="1200" dirty="0">
+                <a:latin typeface="Consolas" panose="020B0609020204030204" pitchFamily="49" charset="0"/>
+                <a:cs typeface="Consolas" panose="020B0609020204030204" pitchFamily="49" charset="0"/>
+              </a:rPr>
+              <a:t> </a:t>
+            </a:r>
+            <a:r>
+              <a:rPr lang="en-IE" sz="1200" dirty="0" err="1">
+                <a:latin typeface="Consolas" panose="020B0609020204030204" pitchFamily="49" charset="0"/>
+                <a:cs typeface="Consolas" panose="020B0609020204030204" pitchFamily="49" charset="0"/>
+              </a:rPr>
+              <a:t>isBetween</a:t>
+            </a:r>
+            <a:r>
+              <a:rPr lang="en-IE" sz="1200" dirty="0">
+                <a:latin typeface="Consolas" panose="020B0609020204030204" pitchFamily="49" charset="0"/>
+                <a:cs typeface="Consolas" panose="020B0609020204030204" pitchFamily="49" charset="0"/>
+              </a:rPr>
+              <a:t>(int </a:t>
+            </a:r>
+            <a:r>
+              <a:rPr lang="en-IE" sz="1200" dirty="0" err="1">
+                <a:latin typeface="Consolas" panose="020B0609020204030204" pitchFamily="49" charset="0"/>
+                <a:cs typeface="Consolas" panose="020B0609020204030204" pitchFamily="49" charset="0"/>
+              </a:rPr>
+              <a:t>numToCheck</a:t>
+            </a:r>
+            <a:r>
+              <a:rPr lang="en-IE" sz="1200" dirty="0">
+                <a:latin typeface="Consolas" panose="020B0609020204030204" pitchFamily="49" charset="0"/>
+                <a:cs typeface="Consolas" panose="020B0609020204030204" pitchFamily="49" charset="0"/>
+              </a:rPr>
+              <a:t>, int lower, int upper) {</a:t>
+            </a:r>
+          </a:p>
+          <a:p>
+            <a:pPr>
+              <a:defRPr sz="2000"/>
+            </a:pPr>
+            <a:r>
+              <a:rPr lang="en-IE" sz="1200" dirty="0">
+                <a:latin typeface="Consolas" panose="020B0609020204030204" pitchFamily="49" charset="0"/>
+                <a:cs typeface="Consolas" panose="020B0609020204030204" pitchFamily="49" charset="0"/>
+              </a:rPr>
+              <a:t>    return(lower &lt;= </a:t>
+            </a:r>
+            <a:r>
+              <a:rPr lang="en-IE" sz="1200" dirty="0" err="1">
+                <a:latin typeface="Consolas" panose="020B0609020204030204" pitchFamily="49" charset="0"/>
+                <a:cs typeface="Consolas" panose="020B0609020204030204" pitchFamily="49" charset="0"/>
+              </a:rPr>
+              <a:t>numToCheck</a:t>
+            </a:r>
+            <a:r>
+              <a:rPr lang="en-IE" sz="1200" dirty="0">
+                <a:latin typeface="Consolas" panose="020B0609020204030204" pitchFamily="49" charset="0"/>
+                <a:cs typeface="Consolas" panose="020B0609020204030204" pitchFamily="49" charset="0"/>
+              </a:rPr>
+              <a:t> &amp;&amp; </a:t>
+            </a:r>
+            <a:r>
+              <a:rPr lang="en-IE" sz="1200" dirty="0" err="1">
+                <a:latin typeface="Consolas" panose="020B0609020204030204" pitchFamily="49" charset="0"/>
+                <a:cs typeface="Consolas" panose="020B0609020204030204" pitchFamily="49" charset="0"/>
+              </a:rPr>
+              <a:t>numCheck</a:t>
+            </a:r>
+            <a:r>
+              <a:rPr lang="en-IE" sz="1200" dirty="0">
+                <a:latin typeface="Consolas" panose="020B0609020204030204" pitchFamily="49" charset="0"/>
+                <a:cs typeface="Consolas" panose="020B0609020204030204" pitchFamily="49" charset="0"/>
+              </a:rPr>
+              <a:t> &lt;= upper) ;</a:t>
+            </a:r>
+          </a:p>
+          <a:p>
+            <a:pPr>
+              <a:defRPr sz="2000"/>
+            </a:pPr>
+            <a:r>
+              <a:rPr lang="en-IE" sz="1200" dirty="0">
+                <a:latin typeface="Consolas" panose="020B0609020204030204" pitchFamily="49" charset="0"/>
+                <a:cs typeface="Consolas" panose="020B0609020204030204" pitchFamily="49" charset="0"/>
+              </a:rPr>
+              <a:t>}</a:t>
+            </a:r>
+          </a:p>
+        </p:txBody>
+      </p:sp>
+      <p:sp>
+        <p:nvSpPr>
+          <p:cNvPr id="4" name="TextBox 3">
+            <a:extLst>
+              <a:ext uri="{FF2B5EF4-FFF2-40B4-BE49-F238E27FC236}">
+                <a16:creationId xmlns:a16="http://schemas.microsoft.com/office/drawing/2014/main" id="{7347CC18-8290-989C-9FF3-76E3BBF1D24F}"/>
+              </a:ext>
+            </a:extLst>
+          </p:cNvPr>
+          <p:cNvSpPr txBox="1"/>
+          <p:nvPr/>
+        </p:nvSpPr>
+        <p:spPr>
+          <a:xfrm>
+            <a:off x="3169921" y="914400"/>
+            <a:ext cx="1176989" cy="369332"/>
+          </a:xfrm>
+          <a:prstGeom prst="rect">
+            <a:avLst/>
+          </a:prstGeom>
+          <a:noFill/>
+        </p:spPr>
+        <p:txBody>
+          <a:bodyPr wrap="none">
+            <a:spAutoFit/>
+          </a:bodyPr>
+          <a:lstStyle/>
+          <a:p>
+            <a:r>
+              <a:rPr dirty="0"/>
+              <a:t>Long Form</a:t>
+            </a:r>
+          </a:p>
+        </p:txBody>
+      </p:sp>
+      <p:sp>
+        <p:nvSpPr>
+          <p:cNvPr id="5" name="TextBox 4">
+            <a:extLst>
+              <a:ext uri="{FF2B5EF4-FFF2-40B4-BE49-F238E27FC236}">
+                <a16:creationId xmlns:a16="http://schemas.microsoft.com/office/drawing/2014/main" id="{D69A19EA-0190-EFF1-9F64-B8CCCB3994F7}"/>
+              </a:ext>
+            </a:extLst>
+          </p:cNvPr>
+          <p:cNvSpPr txBox="1"/>
+          <p:nvPr/>
+        </p:nvSpPr>
+        <p:spPr>
+          <a:xfrm>
+            <a:off x="7010400" y="914400"/>
+            <a:ext cx="1233094" cy="369332"/>
+          </a:xfrm>
+          <a:prstGeom prst="rect">
+            <a:avLst/>
+          </a:prstGeom>
+          <a:noFill/>
+        </p:spPr>
+        <p:txBody>
+          <a:bodyPr wrap="none">
+            <a:spAutoFit/>
+          </a:bodyPr>
+          <a:lstStyle/>
+          <a:p>
+            <a:r>
+              <a:t>Short Form</a:t>
+            </a:r>
+          </a:p>
+        </p:txBody>
+      </p:sp>
+    </p:spTree>
+    <p:extLst>
+      <p:ext uri="{BB962C8B-B14F-4D97-AF65-F5344CB8AC3E}">
+        <p14:creationId xmlns:p14="http://schemas.microsoft.com/office/powerpoint/2010/main" val="1489393190"/>
+      </p:ext>
+    </p:extLst>
+  </p:cSld>
+  <p:clrMapOvr>
+    <a:masterClrMapping/>
+  </p:clrMapOvr>
+  <mc:AlternateContent xmlns:mc="http://schemas.openxmlformats.org/markup-compatibility/2006" xmlns:p159="http://schemas.microsoft.com/office/powerpoint/2015/09/main">
+    <mc:Choice Requires="p159">
+      <p:transition xmlns:p14="http://schemas.microsoft.com/office/powerpoint/2010/main" spd="slow" p14:dur="2000">
+        <p159:morph option="byObject"/>
+      </p:transition>
+    </mc:Choice>
+    <mc:Fallback xmlns="">
+      <p:transition spd="slow">
+        <p:fade/>
+      </p:transition>
+    </mc:Fallback>
+  </mc:AlternateContent>
+</p:sld>
+</file>
+
+<file path=ppt/slides/slide25.xml><?xml version="1.0" encoding="utf-8"?>
+<p:sld xmlns:a="http://schemas.openxmlformats.org/drawingml/2006/main" xmlns:r="http://schemas.openxmlformats.org/officeDocument/2006/relationships" xmlns:p="http://schemas.openxmlformats.org/presentationml/2006/main">
+  <p:cSld>
+    <p:spTree>
+      <p:nvGrpSpPr>
+        <p:cNvPr id="1" name="">
+          <a:extLst>
+            <a:ext uri="{FF2B5EF4-FFF2-40B4-BE49-F238E27FC236}">
+              <a16:creationId xmlns:a16="http://schemas.microsoft.com/office/drawing/2014/main" id="{02AA1FF4-1DA4-531E-787A-6FD18BBBD296}"/>
+            </a:ext>
+          </a:extLst>
+        </p:cNvPr>
+        <p:cNvGrpSpPr/>
+        <p:nvPr/>
+      </p:nvGrpSpPr>
+      <p:grpSpPr>
+        <a:xfrm>
+          <a:off x="0" y="0"/>
+          <a:ext cx="0" cy="0"/>
+          <a:chOff x="0" y="0"/>
+          <a:chExt cx="0" cy="0"/>
+        </a:xfrm>
+      </p:grpSpPr>
+      <p:sp>
+        <p:nvSpPr>
+          <p:cNvPr id="2" name="TextBox 1">
+            <a:extLst>
+              <a:ext uri="{FF2B5EF4-FFF2-40B4-BE49-F238E27FC236}">
+                <a16:creationId xmlns:a16="http://schemas.microsoft.com/office/drawing/2014/main" id="{736C087D-C3BF-291B-F73A-8939E7C6DF77}"/>
+              </a:ext>
+            </a:extLst>
+          </p:cNvPr>
+          <p:cNvSpPr txBox="1"/>
+          <p:nvPr/>
+        </p:nvSpPr>
+        <p:spPr>
+          <a:xfrm>
+            <a:off x="566281" y="1828800"/>
+            <a:ext cx="11059438" cy="1569660"/>
+          </a:xfrm>
+          <a:prstGeom prst="rect">
+            <a:avLst/>
+          </a:prstGeom>
+          <a:solidFill>
+            <a:schemeClr val="accent6">
+              <a:lumMod val="40000"/>
+              <a:lumOff val="60000"/>
+            </a:schemeClr>
+          </a:solidFill>
+          <a:ln>
+            <a:solidFill>
+              <a:schemeClr val="tx1"/>
+            </a:solidFill>
+          </a:ln>
+        </p:spPr>
+        <p:txBody>
+          <a:bodyPr wrap="none">
+            <a:spAutoFit/>
+          </a:bodyPr>
+          <a:lstStyle/>
+          <a:p>
+            <a:endParaRPr lang="en-IE" sz="2400" dirty="0"/>
+          </a:p>
+          <a:p>
+            <a:pPr>
+              <a:defRPr sz="2000"/>
+            </a:pPr>
+            <a:r>
+              <a:rPr lang="en-IE" sz="2400" dirty="0">
+                <a:latin typeface="Consolas" panose="020B0609020204030204" pitchFamily="49" charset="0"/>
+                <a:cs typeface="Consolas" panose="020B0609020204030204" pitchFamily="49" charset="0"/>
+              </a:rPr>
+              <a:t>public </a:t>
+            </a:r>
+            <a:r>
+              <a:rPr lang="en-IE" sz="2400" dirty="0" err="1">
+                <a:latin typeface="Consolas" panose="020B0609020204030204" pitchFamily="49" charset="0"/>
+                <a:cs typeface="Consolas" panose="020B0609020204030204" pitchFamily="49" charset="0"/>
+              </a:rPr>
+              <a:t>boolean</a:t>
+            </a:r>
+            <a:r>
+              <a:rPr lang="en-IE" sz="2400" dirty="0">
+                <a:latin typeface="Consolas" panose="020B0609020204030204" pitchFamily="49" charset="0"/>
+                <a:cs typeface="Consolas" panose="020B0609020204030204" pitchFamily="49" charset="0"/>
+              </a:rPr>
+              <a:t> </a:t>
+            </a:r>
+            <a:r>
+              <a:rPr lang="en-IE" sz="2400" dirty="0" err="1">
+                <a:latin typeface="Consolas" panose="020B0609020204030204" pitchFamily="49" charset="0"/>
+                <a:cs typeface="Consolas" panose="020B0609020204030204" pitchFamily="49" charset="0"/>
+              </a:rPr>
+              <a:t>isBetween</a:t>
+            </a:r>
+            <a:r>
+              <a:rPr lang="en-IE" sz="2400" dirty="0">
+                <a:latin typeface="Consolas" panose="020B0609020204030204" pitchFamily="49" charset="0"/>
+                <a:cs typeface="Consolas" panose="020B0609020204030204" pitchFamily="49" charset="0"/>
+              </a:rPr>
+              <a:t>(int </a:t>
+            </a:r>
+            <a:r>
+              <a:rPr lang="en-IE" sz="2400" dirty="0" err="1">
+                <a:latin typeface="Consolas" panose="020B0609020204030204" pitchFamily="49" charset="0"/>
+                <a:cs typeface="Consolas" panose="020B0609020204030204" pitchFamily="49" charset="0"/>
+              </a:rPr>
+              <a:t>numToCheck</a:t>
+            </a:r>
+            <a:r>
+              <a:rPr lang="en-IE" sz="2400" dirty="0">
+                <a:latin typeface="Consolas" panose="020B0609020204030204" pitchFamily="49" charset="0"/>
+                <a:cs typeface="Consolas" panose="020B0609020204030204" pitchFamily="49" charset="0"/>
+              </a:rPr>
+              <a:t>, int lower, int upper) {</a:t>
+            </a:r>
+          </a:p>
+          <a:p>
+            <a:pPr>
+              <a:defRPr sz="2000"/>
+            </a:pPr>
+            <a:r>
+              <a:rPr lang="en-IE" sz="2400" dirty="0">
+                <a:latin typeface="Consolas" panose="020B0609020204030204" pitchFamily="49" charset="0"/>
+                <a:cs typeface="Consolas" panose="020B0609020204030204" pitchFamily="49" charset="0"/>
+              </a:rPr>
+              <a:t>    return(lower &lt;= </a:t>
+            </a:r>
+            <a:r>
+              <a:rPr lang="en-IE" sz="2400" dirty="0" err="1">
+                <a:latin typeface="Consolas" panose="020B0609020204030204" pitchFamily="49" charset="0"/>
+                <a:cs typeface="Consolas" panose="020B0609020204030204" pitchFamily="49" charset="0"/>
+              </a:rPr>
+              <a:t>numToCheck</a:t>
+            </a:r>
+            <a:r>
+              <a:rPr lang="en-IE" sz="2400" dirty="0">
+                <a:latin typeface="Consolas" panose="020B0609020204030204" pitchFamily="49" charset="0"/>
+                <a:cs typeface="Consolas" panose="020B0609020204030204" pitchFamily="49" charset="0"/>
+              </a:rPr>
+              <a:t> &amp;&amp; </a:t>
+            </a:r>
+            <a:r>
+              <a:rPr lang="en-IE" sz="2400" dirty="0" err="1">
+                <a:latin typeface="Consolas" panose="020B0609020204030204" pitchFamily="49" charset="0"/>
+                <a:cs typeface="Consolas" panose="020B0609020204030204" pitchFamily="49" charset="0"/>
+              </a:rPr>
+              <a:t>numCheck</a:t>
+            </a:r>
+            <a:r>
+              <a:rPr lang="en-IE" sz="2400" dirty="0">
+                <a:latin typeface="Consolas" panose="020B0609020204030204" pitchFamily="49" charset="0"/>
+                <a:cs typeface="Consolas" panose="020B0609020204030204" pitchFamily="49" charset="0"/>
+              </a:rPr>
+              <a:t> &lt;= upper) ;</a:t>
+            </a:r>
+          </a:p>
+          <a:p>
+            <a:pPr>
+              <a:defRPr sz="2000"/>
+            </a:pPr>
+            <a:r>
+              <a:rPr lang="en-IE" sz="2400" dirty="0">
+                <a:latin typeface="Consolas" panose="020B0609020204030204" pitchFamily="49" charset="0"/>
+                <a:cs typeface="Consolas" panose="020B0609020204030204" pitchFamily="49" charset="0"/>
+              </a:rPr>
+              <a:t>}</a:t>
+            </a:r>
+          </a:p>
+        </p:txBody>
+      </p:sp>
+    </p:spTree>
+    <p:extLst>
+      <p:ext uri="{BB962C8B-B14F-4D97-AF65-F5344CB8AC3E}">
+        <p14:creationId xmlns:p14="http://schemas.microsoft.com/office/powerpoint/2010/main" val="2145166421"/>
+      </p:ext>
+    </p:extLst>
+  </p:cSld>
+  <p:clrMapOvr>
+    <a:masterClrMapping/>
+  </p:clrMapOvr>
+  <mc:AlternateContent xmlns:mc="http://schemas.openxmlformats.org/markup-compatibility/2006" xmlns:p159="http://schemas.microsoft.com/office/powerpoint/2015/09/main">
+    <mc:Choice Requires="p159">
+      <p:transition xmlns:p14="http://schemas.microsoft.com/office/powerpoint/2010/main" spd="slow" p14:dur="2000">
+        <p159:morph option="byObject"/>
+      </p:transition>
+    </mc:Choice>
+    <mc:Fallback xmlns="">
+      <p:transition spd="slow">
+        <p:fade/>
+      </p:transition>
+    </mc:Fallback>
+  </mc:AlternateContent>
+</p:sld>
+</file>
+
+<file path=ppt/slides/slide26.xml><?xml version="1.0" encoding="utf-8"?>
 <p:sld xmlns:a="http://schemas.openxmlformats.org/drawingml/2006/main" xmlns:r="http://schemas.openxmlformats.org/officeDocument/2006/relationships" xmlns:p="http://schemas.openxmlformats.org/presentationml/2006/main">
   <p:cSld>
     <p:spTree>
@@ -8244,458 +13642,7 @@
 </p:sld>
 </file>
 
-<file path=ppt/slides/slide14.xml><?xml version="1.0" encoding="utf-8"?>
-<p:sld xmlns:a="http://schemas.openxmlformats.org/drawingml/2006/main" xmlns:r="http://schemas.openxmlformats.org/officeDocument/2006/relationships" xmlns:p="http://schemas.openxmlformats.org/presentationml/2006/main">
-  <p:cSld>
-    <p:spTree>
-      <p:nvGrpSpPr>
-        <p:cNvPr id="1" name="">
-          <a:extLst>
-            <a:ext uri="{FF2B5EF4-FFF2-40B4-BE49-F238E27FC236}">
-              <a16:creationId xmlns:a16="http://schemas.microsoft.com/office/drawing/2014/main" id="{92AE77AA-8379-7B50-64A8-7D131788DDB2}"/>
-            </a:ext>
-          </a:extLst>
-        </p:cNvPr>
-        <p:cNvGrpSpPr/>
-        <p:nvPr/>
-      </p:nvGrpSpPr>
-      <p:grpSpPr>
-        <a:xfrm>
-          <a:off x="0" y="0"/>
-          <a:ext cx="0" cy="0"/>
-          <a:chOff x="0" y="0"/>
-          <a:chExt cx="0" cy="0"/>
-        </a:xfrm>
-      </p:grpSpPr>
-      <p:sp>
-        <p:nvSpPr>
-          <p:cNvPr id="2" name="Title 1">
-            <a:extLst>
-              <a:ext uri="{FF2B5EF4-FFF2-40B4-BE49-F238E27FC236}">
-                <a16:creationId xmlns:a16="http://schemas.microsoft.com/office/drawing/2014/main" id="{38F6A7BE-B445-3EC0-0B6C-38AAA0C6D34F}"/>
-              </a:ext>
-            </a:extLst>
-          </p:cNvPr>
-          <p:cNvSpPr>
-            <a:spLocks noGrp="1"/>
-          </p:cNvSpPr>
-          <p:nvPr>
-            <p:ph type="title"/>
-          </p:nvPr>
-        </p:nvSpPr>
-        <p:spPr/>
-        <p:txBody>
-          <a:bodyPr/>
-          <a:lstStyle/>
-          <a:p>
-            <a:r>
-              <a:rPr lang="en-IE"/>
-              <a:t>Topics list</a:t>
-            </a:r>
-            <a:endParaRPr lang="en-IE" dirty="0"/>
-          </a:p>
-        </p:txBody>
-      </p:sp>
-      <p:sp>
-        <p:nvSpPr>
-          <p:cNvPr id="7" name="Rectangle 6">
-            <a:extLst>
-              <a:ext uri="{FF2B5EF4-FFF2-40B4-BE49-F238E27FC236}">
-                <a16:creationId xmlns:a16="http://schemas.microsoft.com/office/drawing/2014/main" id="{000A1296-C508-5CA6-C678-96070AAFA493}"/>
-              </a:ext>
-            </a:extLst>
-          </p:cNvPr>
-          <p:cNvSpPr/>
-          <p:nvPr/>
-        </p:nvSpPr>
-        <p:spPr>
-          <a:xfrm>
-            <a:off x="1752600" y="4800600"/>
-            <a:ext cx="4038600" cy="457200"/>
-          </a:xfrm>
-          <a:prstGeom prst="rect">
-            <a:avLst/>
-          </a:prstGeom>
-          <a:noFill/>
-          <a:ln w="44450">
-            <a:solidFill>
-              <a:srgbClr val="FF0000"/>
-            </a:solidFill>
-          </a:ln>
-        </p:spPr>
-        <p:style>
-          <a:lnRef idx="2">
-            <a:schemeClr val="accent1">
-              <a:shade val="50000"/>
-            </a:schemeClr>
-          </a:lnRef>
-          <a:fillRef idx="1">
-            <a:schemeClr val="accent1"/>
-          </a:fillRef>
-          <a:effectRef idx="0">
-            <a:schemeClr val="accent1"/>
-          </a:effectRef>
-          <a:fontRef idx="minor">
-            <a:schemeClr val="lt1"/>
-          </a:fontRef>
-        </p:style>
-        <p:txBody>
-          <a:bodyPr rtlCol="0" anchor="ctr"/>
-          <a:lstStyle/>
-          <a:p>
-            <a:pPr algn="ctr"/>
-            <a:endParaRPr lang="en-IE"/>
-          </a:p>
-        </p:txBody>
-      </p:sp>
-      <p:sp>
-        <p:nvSpPr>
-          <p:cNvPr id="6" name="Content Placeholder 4">
-            <a:extLst>
-              <a:ext uri="{FF2B5EF4-FFF2-40B4-BE49-F238E27FC236}">
-                <a16:creationId xmlns:a16="http://schemas.microsoft.com/office/drawing/2014/main" id="{1CABE85C-74E8-C440-60DB-5AB051779FA6}"/>
-              </a:ext>
-            </a:extLst>
-          </p:cNvPr>
-          <p:cNvSpPr txBox="1">
-            <a:spLocks/>
-          </p:cNvSpPr>
-          <p:nvPr/>
-        </p:nvSpPr>
-        <p:spPr>
-          <a:xfrm>
-            <a:off x="1714500" y="2327274"/>
-            <a:ext cx="8763000" cy="4525963"/>
-          </a:xfrm>
-          <a:prstGeom prst="rect">
-            <a:avLst/>
-          </a:prstGeom>
-        </p:spPr>
-        <p:txBody>
-          <a:bodyPr vert="horz" lIns="91440" tIns="45720" rIns="91440" bIns="45720" rtlCol="0">
-            <a:normAutofit/>
-          </a:bodyPr>
-          <a:lstStyle>
-            <a:lvl1pPr marL="342900" indent="-342900" algn="l" defTabSz="914400" rtl="0" eaLnBrk="1" latinLnBrk="0" hangingPunct="1">
-              <a:spcBef>
-                <a:spcPct val="20000"/>
-              </a:spcBef>
-              <a:buFont typeface="Arial" pitchFamily="34" charset="0"/>
-              <a:buChar char="•"/>
-              <a:defRPr sz="3200" kern="1200">
-                <a:solidFill>
-                  <a:schemeClr val="tx1"/>
-                </a:solidFill>
-                <a:latin typeface="+mn-lt"/>
-                <a:ea typeface="+mn-ea"/>
-                <a:cs typeface="+mn-cs"/>
-              </a:defRPr>
-            </a:lvl1pPr>
-            <a:lvl2pPr marL="742950" indent="-285750" algn="l" defTabSz="914400" rtl="0" eaLnBrk="1" latinLnBrk="0" hangingPunct="1">
-              <a:spcBef>
-                <a:spcPct val="20000"/>
-              </a:spcBef>
-              <a:buFont typeface="Arial" pitchFamily="34" charset="0"/>
-              <a:buChar char="–"/>
-              <a:defRPr sz="2800" kern="1200">
-                <a:solidFill>
-                  <a:schemeClr val="tx1"/>
-                </a:solidFill>
-                <a:latin typeface="+mn-lt"/>
-                <a:ea typeface="+mn-ea"/>
-                <a:cs typeface="+mn-cs"/>
-              </a:defRPr>
-            </a:lvl2pPr>
-            <a:lvl3pPr marL="1143000" indent="-228600" algn="l" defTabSz="914400" rtl="0" eaLnBrk="1" latinLnBrk="0" hangingPunct="1">
-              <a:spcBef>
-                <a:spcPct val="20000"/>
-              </a:spcBef>
-              <a:buFont typeface="Arial" pitchFamily="34" charset="0"/>
-              <a:buChar char="•"/>
-              <a:defRPr sz="2400" kern="1200">
-                <a:solidFill>
-                  <a:schemeClr val="tx1"/>
-                </a:solidFill>
-                <a:latin typeface="+mn-lt"/>
-                <a:ea typeface="+mn-ea"/>
-                <a:cs typeface="+mn-cs"/>
-              </a:defRPr>
-            </a:lvl3pPr>
-            <a:lvl4pPr marL="1600200" indent="-228600" algn="l" defTabSz="914400" rtl="0" eaLnBrk="1" latinLnBrk="0" hangingPunct="1">
-              <a:spcBef>
-                <a:spcPct val="20000"/>
-              </a:spcBef>
-              <a:buFont typeface="Arial" pitchFamily="34" charset="0"/>
-              <a:buChar char="–"/>
-              <a:defRPr sz="2000" kern="1200">
-                <a:solidFill>
-                  <a:schemeClr val="tx1"/>
-                </a:solidFill>
-                <a:latin typeface="+mn-lt"/>
-                <a:ea typeface="+mn-ea"/>
-                <a:cs typeface="+mn-cs"/>
-              </a:defRPr>
-            </a:lvl4pPr>
-            <a:lvl5pPr marL="2057400" indent="-228600" algn="l" defTabSz="914400" rtl="0" eaLnBrk="1" latinLnBrk="0" hangingPunct="1">
-              <a:spcBef>
-                <a:spcPct val="20000"/>
-              </a:spcBef>
-              <a:buFont typeface="Arial" pitchFamily="34" charset="0"/>
-              <a:buChar char="»"/>
-              <a:defRPr sz="2000" kern="1200">
-                <a:solidFill>
-                  <a:schemeClr val="tx1"/>
-                </a:solidFill>
-                <a:latin typeface="+mn-lt"/>
-                <a:ea typeface="+mn-ea"/>
-                <a:cs typeface="+mn-cs"/>
-              </a:defRPr>
-            </a:lvl5pPr>
-            <a:lvl6pPr marL="2514600" indent="-228600" algn="l" defTabSz="914400" rtl="0" eaLnBrk="1" latinLnBrk="0" hangingPunct="1">
-              <a:spcBef>
-                <a:spcPct val="20000"/>
-              </a:spcBef>
-              <a:buFont typeface="Arial" pitchFamily="34" charset="0"/>
-              <a:buChar char="•"/>
-              <a:defRPr sz="2000" kern="1200">
-                <a:solidFill>
-                  <a:schemeClr val="tx1"/>
-                </a:solidFill>
-                <a:latin typeface="+mn-lt"/>
-                <a:ea typeface="+mn-ea"/>
-                <a:cs typeface="+mn-cs"/>
-              </a:defRPr>
-            </a:lvl6pPr>
-            <a:lvl7pPr marL="2971800" indent="-228600" algn="l" defTabSz="914400" rtl="0" eaLnBrk="1" latinLnBrk="0" hangingPunct="1">
-              <a:spcBef>
-                <a:spcPct val="20000"/>
-              </a:spcBef>
-              <a:buFont typeface="Arial" pitchFamily="34" charset="0"/>
-              <a:buChar char="•"/>
-              <a:defRPr sz="2000" kern="1200">
-                <a:solidFill>
-                  <a:schemeClr val="tx1"/>
-                </a:solidFill>
-                <a:latin typeface="+mn-lt"/>
-                <a:ea typeface="+mn-ea"/>
-                <a:cs typeface="+mn-cs"/>
-              </a:defRPr>
-            </a:lvl7pPr>
-            <a:lvl8pPr marL="3429000" indent="-228600" algn="l" defTabSz="914400" rtl="0" eaLnBrk="1" latinLnBrk="0" hangingPunct="1">
-              <a:spcBef>
-                <a:spcPct val="20000"/>
-              </a:spcBef>
-              <a:buFont typeface="Arial" pitchFamily="34" charset="0"/>
-              <a:buChar char="•"/>
-              <a:defRPr sz="2000" kern="1200">
-                <a:solidFill>
-                  <a:schemeClr val="tx1"/>
-                </a:solidFill>
-                <a:latin typeface="+mn-lt"/>
-                <a:ea typeface="+mn-ea"/>
-                <a:cs typeface="+mn-cs"/>
-              </a:defRPr>
-            </a:lvl8pPr>
-            <a:lvl9pPr marL="3886200" indent="-228600" algn="l" defTabSz="914400" rtl="0" eaLnBrk="1" latinLnBrk="0" hangingPunct="1">
-              <a:spcBef>
-                <a:spcPct val="20000"/>
-              </a:spcBef>
-              <a:buFont typeface="Arial" pitchFamily="34" charset="0"/>
-              <a:buChar char="•"/>
-              <a:defRPr sz="2000" kern="1200">
-                <a:solidFill>
-                  <a:schemeClr val="tx1"/>
-                </a:solidFill>
-                <a:latin typeface="+mn-lt"/>
-                <a:ea typeface="+mn-ea"/>
-                <a:cs typeface="+mn-cs"/>
-              </a:defRPr>
-            </a:lvl9pPr>
-          </a:lstStyle>
-          <a:p>
-            <a:endParaRPr lang="en-IE" sz="1600" dirty="0"/>
-          </a:p>
-          <a:p>
-            <a:pPr marL="514350" indent="-514350">
-              <a:buFont typeface="+mj-lt"/>
-              <a:buAutoNum type="arabicPeriod"/>
-            </a:pPr>
-            <a:r>
-              <a:rPr lang="en-IE" dirty="0"/>
-              <a:t> Method examples – return values</a:t>
-            </a:r>
-          </a:p>
-          <a:p>
-            <a:pPr marL="914400" lvl="1" indent="-514350"/>
-            <a:r>
-              <a:rPr lang="en-IE" dirty="0" err="1"/>
-              <a:t>Celcius</a:t>
-            </a:r>
-            <a:r>
-              <a:rPr lang="en-IE" dirty="0"/>
-              <a:t> / </a:t>
-            </a:r>
-            <a:r>
-              <a:rPr lang="en-IE" dirty="0" err="1"/>
-              <a:t>Farenheit</a:t>
-            </a:r>
-            <a:r>
-              <a:rPr lang="en-IE" dirty="0"/>
-              <a:t> </a:t>
-            </a:r>
-            <a:r>
-              <a:rPr lang="en-IE" b="1" dirty="0"/>
-              <a:t>Converter</a:t>
-            </a:r>
-            <a:r>
-              <a:rPr lang="en-IE" dirty="0"/>
-              <a:t>.</a:t>
-            </a:r>
-          </a:p>
-          <a:p>
-            <a:pPr marL="914400" lvl="1" indent="-514350"/>
-            <a:r>
-              <a:rPr lang="en-IE" b="1" dirty="0"/>
-              <a:t>Cubed</a:t>
-            </a:r>
-          </a:p>
-          <a:p>
-            <a:pPr marL="914400" lvl="1" indent="-514350"/>
-            <a:r>
-              <a:rPr lang="en-IE" b="1" dirty="0"/>
-              <a:t>Product</a:t>
-            </a:r>
-          </a:p>
-          <a:p>
-            <a:pPr marL="514350" indent="-514350">
-              <a:buFont typeface="+mj-lt"/>
-              <a:buAutoNum type="arabicPeriod"/>
-            </a:pPr>
-            <a:r>
-              <a:rPr lang="en-IE" b="1" dirty="0"/>
-              <a:t> </a:t>
-            </a:r>
-            <a:r>
-              <a:rPr lang="en-IE" dirty="0"/>
-              <a:t>Boolean methods</a:t>
-            </a:r>
-          </a:p>
-          <a:p>
-            <a:pPr marL="514350" indent="-514350">
-              <a:buFont typeface="+mj-lt"/>
-              <a:buAutoNum type="arabicPeriod"/>
-            </a:pPr>
-            <a:r>
-              <a:rPr lang="en-IE" b="1" dirty="0"/>
-              <a:t> Overloading</a:t>
-            </a:r>
-            <a:r>
-              <a:rPr lang="en-IE" dirty="0"/>
-              <a:t> methods.</a:t>
-            </a:r>
-          </a:p>
-        </p:txBody>
-      </p:sp>
-    </p:spTree>
-    <p:extLst>
-      <p:ext uri="{BB962C8B-B14F-4D97-AF65-F5344CB8AC3E}">
-        <p14:creationId xmlns:p14="http://schemas.microsoft.com/office/powerpoint/2010/main" val="824540014"/>
-      </p:ext>
-    </p:extLst>
-  </p:cSld>
-  <p:clrMapOvr>
-    <a:masterClrMapping/>
-  </p:clrMapOvr>
-  <p:timing>
-    <p:tnLst>
-      <p:par>
-        <p:cTn id="1" dur="indefinite" restart="never" nodeType="tmRoot">
-          <p:childTnLst>
-            <p:seq concurrent="1" nextAc="seek">
-              <p:cTn id="2" dur="indefinite" nodeType="mainSeq">
-                <p:childTnLst>
-                  <p:par>
-                    <p:cTn id="3" fill="hold">
-                      <p:stCondLst>
-                        <p:cond delay="indefinite"/>
-                      </p:stCondLst>
-                      <p:childTnLst>
-                        <p:par>
-                          <p:cTn id="4" fill="hold">
-                            <p:stCondLst>
-                              <p:cond delay="0"/>
-                            </p:stCondLst>
-                            <p:childTnLst>
-                              <p:par>
-                                <p:cTn id="5" presetID="21" presetClass="entr" presetSubtype="1" fill="hold" grpId="0" nodeType="clickEffect">
-                                  <p:stCondLst>
-                                    <p:cond delay="0"/>
-                                  </p:stCondLst>
-                                  <p:childTnLst>
-                                    <p:set>
-                                      <p:cBhvr>
-                                        <p:cTn id="6" dur="1" fill="hold">
-                                          <p:stCondLst>
-                                            <p:cond delay="0"/>
-                                          </p:stCondLst>
-                                        </p:cTn>
-                                        <p:tgtEl>
-                                          <p:spTgt spid="7"/>
-                                        </p:tgtEl>
-                                        <p:attrNameLst>
-                                          <p:attrName>style.visibility</p:attrName>
-                                        </p:attrNameLst>
-                                      </p:cBhvr>
-                                      <p:to>
-                                        <p:strVal val="visible"/>
-                                      </p:to>
-                                    </p:set>
-                                    <p:animEffect transition="in" filter="wheel(1)">
-                                      <p:cBhvr>
-                                        <p:cTn id="7" dur="2000"/>
-                                        <p:tgtEl>
-                                          <p:spTgt spid="7"/>
-                                        </p:tgtEl>
-                                      </p:cBhvr>
-                                    </p:animEffect>
-                                  </p:childTnLst>
-                                </p:cTn>
-                              </p:par>
-                            </p:childTnLst>
-                          </p:cTn>
-                        </p:par>
-                      </p:childTnLst>
-                    </p:cTn>
-                  </p:par>
-                </p:childTnLst>
-              </p:cTn>
-              <p:prevCondLst>
-                <p:cond evt="onPrev" delay="0">
-                  <p:tgtEl>
-                    <p:sldTgt/>
-                  </p:tgtEl>
-                </p:cond>
-              </p:prevCondLst>
-              <p:nextCondLst>
-                <p:cond evt="onNext" delay="0">
-                  <p:tgtEl>
-                    <p:sldTgt/>
-                  </p:tgtEl>
-                </p:cond>
-              </p:nextCondLst>
-            </p:seq>
-          </p:childTnLst>
-        </p:cTn>
-      </p:par>
-    </p:tnLst>
-    <p:bldLst>
-      <p:bldP spid="7" grpId="0" animBg="1"/>
-    </p:bldLst>
-  </p:timing>
-</p:sld>
-</file>
-
-<file path=ppt/slides/slide15.xml><?xml version="1.0" encoding="utf-8"?>
+<file path=ppt/slides/slide27.xml><?xml version="1.0" encoding="utf-8"?>
 <p:sld xmlns:a="http://schemas.openxmlformats.org/drawingml/2006/main" xmlns:r="http://schemas.openxmlformats.org/officeDocument/2006/relationships" xmlns:p="http://schemas.openxmlformats.org/presentationml/2006/main">
   <p:cSld>
     <p:spTree>
@@ -9258,7 +14205,7 @@
 </p:sld>
 </file>
 
-<file path=ppt/slides/slide16.xml><?xml version="1.0" encoding="utf-8"?>
+<file path=ppt/slides/slide28.xml><?xml version="1.0" encoding="utf-8"?>
 <p:sld xmlns:a="http://schemas.openxmlformats.org/drawingml/2006/main" xmlns:r="http://schemas.openxmlformats.org/officeDocument/2006/relationships" xmlns:p="http://schemas.openxmlformats.org/presentationml/2006/main">
   <p:cSld>
     <p:spTree>
@@ -9827,7 +14774,7 @@
 </p:sld>
 </file>
 
-<file path=ppt/slides/slide17.xml><?xml version="1.0" encoding="utf-8"?>
+<file path=ppt/slides/slide29.xml><?xml version="1.0" encoding="utf-8"?>
 <p:sld xmlns:a="http://schemas.openxmlformats.org/drawingml/2006/main" xmlns:r="http://schemas.openxmlformats.org/officeDocument/2006/relationships" xmlns:p="http://schemas.openxmlformats.org/presentationml/2006/main">
   <p:cSld>
     <p:spTree>
@@ -10263,7 +15210,878 @@
 </p:sld>
 </file>
 
-<file path=ppt/slides/slide18.xml><?xml version="1.0" encoding="utf-8"?>
+<file path=ppt/slides/slide3.xml><?xml version="1.0" encoding="utf-8"?>
+<p:sld xmlns:a="http://schemas.openxmlformats.org/drawingml/2006/main" xmlns:r="http://schemas.openxmlformats.org/officeDocument/2006/relationships" xmlns:p="http://schemas.openxmlformats.org/presentationml/2006/main">
+  <p:cSld>
+    <p:spTree>
+      <p:nvGrpSpPr>
+        <p:cNvPr id="1" name=""/>
+        <p:cNvGrpSpPr/>
+        <p:nvPr/>
+      </p:nvGrpSpPr>
+      <p:grpSpPr>
+        <a:xfrm>
+          <a:off x="0" y="0"/>
+          <a:ext cx="0" cy="0"/>
+          <a:chOff x="0" y="0"/>
+          <a:chExt cx="0" cy="0"/>
+        </a:xfrm>
+      </p:grpSpPr>
+      <p:sp>
+        <p:nvSpPr>
+          <p:cNvPr id="2" name="Title 1"/>
+          <p:cNvSpPr>
+            <a:spLocks noGrp="1"/>
+          </p:cNvSpPr>
+          <p:nvPr>
+            <p:ph type="title"/>
+          </p:nvPr>
+        </p:nvSpPr>
+        <p:spPr/>
+        <p:txBody>
+          <a:bodyPr>
+            <a:normAutofit/>
+          </a:bodyPr>
+          <a:lstStyle/>
+          <a:p>
+            <a:r>
+              <a:rPr lang="en-IE" dirty="0"/>
+              <a:t>Return Type</a:t>
+            </a:r>
+            <a:endParaRPr lang="en-IE" b="1" dirty="0"/>
+          </a:p>
+        </p:txBody>
+      </p:sp>
+      <p:sp>
+        <p:nvSpPr>
+          <p:cNvPr id="3" name="Content Placeholder 2"/>
+          <p:cNvSpPr>
+            <a:spLocks noGrp="1"/>
+          </p:cNvSpPr>
+          <p:nvPr>
+            <p:ph idx="1"/>
+          </p:nvPr>
+        </p:nvSpPr>
+        <p:spPr>
+          <a:xfrm>
+            <a:off x="609600" y="1600201"/>
+            <a:ext cx="11379200" cy="4525963"/>
+          </a:xfrm>
+        </p:spPr>
+        <p:txBody>
+          <a:bodyPr>
+            <a:normAutofit fontScale="85000" lnSpcReduction="20000"/>
+          </a:bodyPr>
+          <a:lstStyle/>
+          <a:p>
+            <a:endParaRPr lang="en-IE" dirty="0"/>
+          </a:p>
+          <a:p>
+            <a:r>
+              <a:rPr lang="en-IE" dirty="0"/>
+              <a:t>Methods can return information. </a:t>
+            </a:r>
+            <a:br>
+              <a:rPr lang="en-IE" dirty="0"/>
+            </a:br>
+            <a:endParaRPr lang="en-IE" dirty="0"/>
+          </a:p>
+          <a:p>
+            <a:r>
+              <a:rPr lang="en-IE" dirty="0"/>
+              <a:t>The </a:t>
+            </a:r>
+            <a:r>
+              <a:rPr lang="en-IE" dirty="0">
+                <a:solidFill>
+                  <a:srgbClr val="FF0000"/>
+                </a:solidFill>
+              </a:rPr>
+              <a:t>void</a:t>
+            </a:r>
+            <a:r>
+              <a:rPr lang="en-IE" dirty="0"/>
+              <a:t> keyword just before the method name </a:t>
+            </a:r>
+            <a:br>
+              <a:rPr lang="en-IE" dirty="0"/>
+            </a:br>
+            <a:r>
+              <a:rPr lang="en-IE" dirty="0"/>
+              <a:t>means that </a:t>
+            </a:r>
+            <a:r>
+              <a:rPr lang="en-IE" b="1" dirty="0"/>
+              <a:t>nothing is returned</a:t>
+            </a:r>
+            <a:r>
+              <a:rPr lang="en-IE" dirty="0"/>
+              <a:t> from the method.</a:t>
+            </a:r>
+            <a:br>
+              <a:rPr lang="en-IE" dirty="0"/>
+            </a:br>
+            <a:endParaRPr lang="en-IE" dirty="0"/>
+          </a:p>
+          <a:p>
+            <a:r>
+              <a:rPr lang="en-IE" dirty="0"/>
+              <a:t>When a data type (e.g. </a:t>
+            </a:r>
+            <a:r>
+              <a:rPr lang="en-IE" dirty="0">
+                <a:solidFill>
+                  <a:srgbClr val="FF0000"/>
+                </a:solidFill>
+              </a:rPr>
+              <a:t>int</a:t>
+            </a:r>
+            <a:r>
+              <a:rPr lang="en-IE" dirty="0"/>
+              <a:t>) </a:t>
+            </a:r>
+            <a:br>
+              <a:rPr lang="en-IE" dirty="0"/>
+            </a:br>
+            <a:r>
+              <a:rPr lang="en-IE" dirty="0"/>
+              <a:t>appears before the method name, </a:t>
+            </a:r>
+            <a:br>
+              <a:rPr lang="en-IE" dirty="0"/>
+            </a:br>
+            <a:r>
+              <a:rPr lang="en-IE" dirty="0"/>
+              <a:t>this means that </a:t>
+            </a:r>
+            <a:r>
+              <a:rPr lang="en-IE" b="1" dirty="0"/>
+              <a:t>something is returned</a:t>
+            </a:r>
+            <a:r>
+              <a:rPr lang="en-IE" dirty="0"/>
+              <a:t> from the method.</a:t>
+            </a:r>
+          </a:p>
+          <a:p>
+            <a:pPr marL="0" indent="0">
+              <a:buNone/>
+            </a:pPr>
+            <a:endParaRPr lang="en-IE" dirty="0"/>
+          </a:p>
+          <a:p>
+            <a:r>
+              <a:rPr lang="en-IE" dirty="0"/>
+              <a:t>Within the body of the method, </a:t>
+            </a:r>
+            <a:br>
+              <a:rPr lang="en-IE" dirty="0"/>
+            </a:br>
+            <a:r>
+              <a:rPr lang="en-IE" dirty="0"/>
+              <a:t>you use the </a:t>
+            </a:r>
+            <a:r>
+              <a:rPr lang="en-IE" b="1" dirty="0">
+                <a:solidFill>
+                  <a:srgbClr val="FF0000"/>
+                </a:solidFill>
+              </a:rPr>
+              <a:t>return</a:t>
+            </a:r>
+            <a:r>
+              <a:rPr lang="en-IE" dirty="0">
+                <a:solidFill>
+                  <a:srgbClr val="FF0000"/>
+                </a:solidFill>
+              </a:rPr>
+              <a:t> </a:t>
+            </a:r>
+            <a:r>
+              <a:rPr lang="en-IE" dirty="0"/>
+              <a:t>statement to </a:t>
+            </a:r>
+            <a:r>
+              <a:rPr lang="en-IE" b="1" dirty="0"/>
+              <a:t>return the value</a:t>
+            </a:r>
+            <a:r>
+              <a:rPr lang="en-IE" dirty="0"/>
+              <a:t>. </a:t>
+            </a:r>
+          </a:p>
+          <a:p>
+            <a:endParaRPr lang="en-IE" dirty="0"/>
+          </a:p>
+          <a:p>
+            <a:endParaRPr lang="en-IE" dirty="0"/>
+          </a:p>
+          <a:p>
+            <a:endParaRPr lang="en-IE" dirty="0"/>
+          </a:p>
+          <a:p>
+            <a:endParaRPr lang="en-IE" dirty="0"/>
+          </a:p>
+        </p:txBody>
+      </p:sp>
+      <p:pic>
+        <p:nvPicPr>
+          <p:cNvPr id="6" name="Picture 5">
+            <a:extLst>
+              <a:ext uri="{FF2B5EF4-FFF2-40B4-BE49-F238E27FC236}">
+                <a16:creationId xmlns:a16="http://schemas.microsoft.com/office/drawing/2014/main" id="{AAA5DFA9-4192-19FD-2FCB-254A7C19D75A}"/>
+              </a:ext>
+            </a:extLst>
+          </p:cNvPr>
+          <p:cNvPicPr>
+            <a:picLocks noChangeAspect="1"/>
+          </p:cNvPicPr>
+          <p:nvPr/>
+        </p:nvPicPr>
+        <p:blipFill>
+          <a:blip r:embed="rId3"/>
+          <a:stretch>
+            <a:fillRect/>
+          </a:stretch>
+        </p:blipFill>
+        <p:spPr>
+          <a:xfrm>
+            <a:off x="7467600" y="327231"/>
+            <a:ext cx="3429000" cy="1734714"/>
+          </a:xfrm>
+          <a:prstGeom prst="rect">
+            <a:avLst/>
+          </a:prstGeom>
+        </p:spPr>
+      </p:pic>
+      <p:sp>
+        <p:nvSpPr>
+          <p:cNvPr id="5" name="Rectangle 4">
+            <a:extLst>
+              <a:ext uri="{FF2B5EF4-FFF2-40B4-BE49-F238E27FC236}">
+                <a16:creationId xmlns:a16="http://schemas.microsoft.com/office/drawing/2014/main" id="{0D1C5C1B-3222-0132-5253-621A9B649E7A}"/>
+              </a:ext>
+            </a:extLst>
+          </p:cNvPr>
+          <p:cNvSpPr/>
+          <p:nvPr/>
+        </p:nvSpPr>
+        <p:spPr>
+          <a:xfrm>
+            <a:off x="8420911" y="4187172"/>
+            <a:ext cx="3657600" cy="1938992"/>
+          </a:xfrm>
+          <a:prstGeom prst="rect">
+            <a:avLst/>
+          </a:prstGeom>
+        </p:spPr>
+        <p:style>
+          <a:lnRef idx="1">
+            <a:schemeClr val="accent1"/>
+          </a:lnRef>
+          <a:fillRef idx="2">
+            <a:schemeClr val="accent1"/>
+          </a:fillRef>
+          <a:effectRef idx="1">
+            <a:schemeClr val="accent1"/>
+          </a:effectRef>
+          <a:fontRef idx="minor">
+            <a:schemeClr val="dk1"/>
+          </a:fontRef>
+        </p:style>
+        <p:txBody>
+          <a:bodyPr wrap="square">
+            <a:spAutoFit/>
+          </a:bodyPr>
+          <a:lstStyle/>
+          <a:p>
+            <a:r>
+              <a:rPr lang="en-IE" sz="2400" b="1" dirty="0">
+                <a:solidFill>
+                  <a:srgbClr val="FF0000"/>
+                </a:solidFill>
+              </a:rPr>
+              <a:t>int</a:t>
+            </a:r>
+            <a:r>
+              <a:rPr lang="en-IE" sz="2400" dirty="0">
+                <a:solidFill>
+                  <a:srgbClr val="FF0000"/>
+                </a:solidFill>
+              </a:rPr>
+              <a:t> </a:t>
+            </a:r>
+            <a:r>
+              <a:rPr lang="en-IE" sz="2400" dirty="0" err="1"/>
+              <a:t>timesTwo</a:t>
+            </a:r>
+            <a:r>
+              <a:rPr lang="en-IE" sz="2400" dirty="0"/>
+              <a:t>(int </a:t>
+            </a:r>
+            <a:r>
+              <a:rPr lang="en-IE" sz="2400" dirty="0">
+                <a:solidFill>
+                  <a:srgbClr val="00B0F0"/>
+                </a:solidFill>
+              </a:rPr>
+              <a:t>number</a:t>
+            </a:r>
+            <a:r>
+              <a:rPr lang="en-IE" sz="2400" dirty="0"/>
+              <a:t>) </a:t>
+            </a:r>
+          </a:p>
+          <a:p>
+            <a:r>
+              <a:rPr lang="en-IE" sz="2400" dirty="0"/>
+              <a:t>{ </a:t>
+            </a:r>
+          </a:p>
+          <a:p>
+            <a:r>
+              <a:rPr lang="en-IE" sz="2400" dirty="0"/>
+              <a:t>    number = number * 2; </a:t>
+            </a:r>
+          </a:p>
+          <a:p>
+            <a:r>
+              <a:rPr lang="en-IE" sz="2400" dirty="0"/>
+              <a:t>    </a:t>
+            </a:r>
+            <a:r>
+              <a:rPr lang="en-IE" sz="2400" b="1" dirty="0">
+                <a:solidFill>
+                  <a:schemeClr val="tx1"/>
+                </a:solidFill>
+              </a:rPr>
+              <a:t>return</a:t>
+            </a:r>
+            <a:r>
+              <a:rPr lang="en-IE" sz="2400" dirty="0">
+                <a:solidFill>
+                  <a:schemeClr val="tx1"/>
+                </a:solidFill>
+              </a:rPr>
+              <a:t> </a:t>
+            </a:r>
+            <a:r>
+              <a:rPr lang="en-IE" sz="2400" dirty="0"/>
+              <a:t>number; </a:t>
+            </a:r>
+          </a:p>
+          <a:p>
+            <a:r>
+              <a:rPr lang="en-IE" sz="2400" dirty="0"/>
+              <a:t>} </a:t>
+            </a:r>
+          </a:p>
+        </p:txBody>
+      </p:sp>
+    </p:spTree>
+    <p:extLst>
+      <p:ext uri="{BB962C8B-B14F-4D97-AF65-F5344CB8AC3E}">
+        <p14:creationId xmlns:p14="http://schemas.microsoft.com/office/powerpoint/2010/main" val="3983909990"/>
+      </p:ext>
+    </p:extLst>
+  </p:cSld>
+  <p:clrMapOvr>
+    <a:masterClrMapping/>
+  </p:clrMapOvr>
+  <p:timing>
+    <p:tnLst>
+      <p:par>
+        <p:cTn id="1" dur="indefinite" restart="never" nodeType="tmRoot">
+          <p:childTnLst>
+            <p:seq concurrent="1" nextAc="seek">
+              <p:cTn id="2" dur="indefinite" nodeType="mainSeq">
+                <p:childTnLst>
+                  <p:par>
+                    <p:cTn id="3" fill="hold">
+                      <p:stCondLst>
+                        <p:cond delay="indefinite"/>
+                      </p:stCondLst>
+                      <p:childTnLst>
+                        <p:par>
+                          <p:cTn id="4" fill="hold">
+                            <p:stCondLst>
+                              <p:cond delay="0"/>
+                            </p:stCondLst>
+                            <p:childTnLst>
+                              <p:par>
+                                <p:cTn id="5" presetID="2" presetClass="entr" presetSubtype="4" fill="hold" grpId="0" nodeType="clickEffect">
+                                  <p:stCondLst>
+                                    <p:cond delay="0"/>
+                                  </p:stCondLst>
+                                  <p:childTnLst>
+                                    <p:set>
+                                      <p:cBhvr>
+                                        <p:cTn id="6" dur="1" fill="hold">
+                                          <p:stCondLst>
+                                            <p:cond delay="0"/>
+                                          </p:stCondLst>
+                                        </p:cTn>
+                                        <p:tgtEl>
+                                          <p:spTgt spid="3">
+                                            <p:txEl>
+                                              <p:pRg st="1" end="1"/>
+                                            </p:txEl>
+                                          </p:spTgt>
+                                        </p:tgtEl>
+                                        <p:attrNameLst>
+                                          <p:attrName>style.visibility</p:attrName>
+                                        </p:attrNameLst>
+                                      </p:cBhvr>
+                                      <p:to>
+                                        <p:strVal val="visible"/>
+                                      </p:to>
+                                    </p:set>
+                                    <p:anim calcmode="lin" valueType="num">
+                                      <p:cBhvr additive="base">
+                                        <p:cTn id="7" dur="500" fill="hold"/>
+                                        <p:tgtEl>
+                                          <p:spTgt spid="3">
+                                            <p:txEl>
+                                              <p:pRg st="1" end="1"/>
+                                            </p:txEl>
+                                          </p:spTgt>
+                                        </p:tgtEl>
+                                        <p:attrNameLst>
+                                          <p:attrName>ppt_x</p:attrName>
+                                        </p:attrNameLst>
+                                      </p:cBhvr>
+                                      <p:tavLst>
+                                        <p:tav tm="0">
+                                          <p:val>
+                                            <p:strVal val="#ppt_x"/>
+                                          </p:val>
+                                        </p:tav>
+                                        <p:tav tm="100000">
+                                          <p:val>
+                                            <p:strVal val="#ppt_x"/>
+                                          </p:val>
+                                        </p:tav>
+                                      </p:tavLst>
+                                    </p:anim>
+                                    <p:anim calcmode="lin" valueType="num">
+                                      <p:cBhvr additive="base">
+                                        <p:cTn id="8" dur="500" fill="hold"/>
+                                        <p:tgtEl>
+                                          <p:spTgt spid="3">
+                                            <p:txEl>
+                                              <p:pRg st="1" end="1"/>
+                                            </p:txEl>
+                                          </p:spTgt>
+                                        </p:tgtEl>
+                                        <p:attrNameLst>
+                                          <p:attrName>ppt_y</p:attrName>
+                                        </p:attrNameLst>
+                                      </p:cBhvr>
+                                      <p:tavLst>
+                                        <p:tav tm="0">
+                                          <p:val>
+                                            <p:strVal val="1+#ppt_h/2"/>
+                                          </p:val>
+                                        </p:tav>
+                                        <p:tav tm="100000">
+                                          <p:val>
+                                            <p:strVal val="#ppt_y"/>
+                                          </p:val>
+                                        </p:tav>
+                                      </p:tavLst>
+                                    </p:anim>
+                                  </p:childTnLst>
+                                </p:cTn>
+                              </p:par>
+                            </p:childTnLst>
+                          </p:cTn>
+                        </p:par>
+                      </p:childTnLst>
+                    </p:cTn>
+                  </p:par>
+                  <p:par>
+                    <p:cTn id="9" fill="hold">
+                      <p:stCondLst>
+                        <p:cond delay="indefinite"/>
+                      </p:stCondLst>
+                      <p:childTnLst>
+                        <p:par>
+                          <p:cTn id="10" fill="hold">
+                            <p:stCondLst>
+                              <p:cond delay="0"/>
+                            </p:stCondLst>
+                            <p:childTnLst>
+                              <p:par>
+                                <p:cTn id="11" presetID="2" presetClass="entr" presetSubtype="4" fill="hold" grpId="0" nodeType="clickEffect">
+                                  <p:stCondLst>
+                                    <p:cond delay="0"/>
+                                  </p:stCondLst>
+                                  <p:childTnLst>
+                                    <p:set>
+                                      <p:cBhvr>
+                                        <p:cTn id="12" dur="1" fill="hold">
+                                          <p:stCondLst>
+                                            <p:cond delay="0"/>
+                                          </p:stCondLst>
+                                        </p:cTn>
+                                        <p:tgtEl>
+                                          <p:spTgt spid="3">
+                                            <p:txEl>
+                                              <p:pRg st="2" end="2"/>
+                                            </p:txEl>
+                                          </p:spTgt>
+                                        </p:tgtEl>
+                                        <p:attrNameLst>
+                                          <p:attrName>style.visibility</p:attrName>
+                                        </p:attrNameLst>
+                                      </p:cBhvr>
+                                      <p:to>
+                                        <p:strVal val="visible"/>
+                                      </p:to>
+                                    </p:set>
+                                    <p:anim calcmode="lin" valueType="num">
+                                      <p:cBhvr additive="base">
+                                        <p:cTn id="13" dur="500" fill="hold"/>
+                                        <p:tgtEl>
+                                          <p:spTgt spid="3">
+                                            <p:txEl>
+                                              <p:pRg st="2" end="2"/>
+                                            </p:txEl>
+                                          </p:spTgt>
+                                        </p:tgtEl>
+                                        <p:attrNameLst>
+                                          <p:attrName>ppt_x</p:attrName>
+                                        </p:attrNameLst>
+                                      </p:cBhvr>
+                                      <p:tavLst>
+                                        <p:tav tm="0">
+                                          <p:val>
+                                            <p:strVal val="#ppt_x"/>
+                                          </p:val>
+                                        </p:tav>
+                                        <p:tav tm="100000">
+                                          <p:val>
+                                            <p:strVal val="#ppt_x"/>
+                                          </p:val>
+                                        </p:tav>
+                                      </p:tavLst>
+                                    </p:anim>
+                                    <p:anim calcmode="lin" valueType="num">
+                                      <p:cBhvr additive="base">
+                                        <p:cTn id="14" dur="500" fill="hold"/>
+                                        <p:tgtEl>
+                                          <p:spTgt spid="3">
+                                            <p:txEl>
+                                              <p:pRg st="2" end="2"/>
+                                            </p:txEl>
+                                          </p:spTgt>
+                                        </p:tgtEl>
+                                        <p:attrNameLst>
+                                          <p:attrName>ppt_y</p:attrName>
+                                        </p:attrNameLst>
+                                      </p:cBhvr>
+                                      <p:tavLst>
+                                        <p:tav tm="0">
+                                          <p:val>
+                                            <p:strVal val="1+#ppt_h/2"/>
+                                          </p:val>
+                                        </p:tav>
+                                        <p:tav tm="100000">
+                                          <p:val>
+                                            <p:strVal val="#ppt_y"/>
+                                          </p:val>
+                                        </p:tav>
+                                      </p:tavLst>
+                                    </p:anim>
+                                  </p:childTnLst>
+                                </p:cTn>
+                              </p:par>
+                            </p:childTnLst>
+                          </p:cTn>
+                        </p:par>
+                      </p:childTnLst>
+                    </p:cTn>
+                  </p:par>
+                  <p:par>
+                    <p:cTn id="15" fill="hold">
+                      <p:stCondLst>
+                        <p:cond delay="indefinite"/>
+                      </p:stCondLst>
+                      <p:childTnLst>
+                        <p:par>
+                          <p:cTn id="16" fill="hold">
+                            <p:stCondLst>
+                              <p:cond delay="0"/>
+                            </p:stCondLst>
+                            <p:childTnLst>
+                              <p:par>
+                                <p:cTn id="17" presetID="2" presetClass="entr" presetSubtype="4" fill="hold" grpId="0" nodeType="clickEffect">
+                                  <p:stCondLst>
+                                    <p:cond delay="0"/>
+                                  </p:stCondLst>
+                                  <p:childTnLst>
+                                    <p:set>
+                                      <p:cBhvr>
+                                        <p:cTn id="18" dur="1" fill="hold">
+                                          <p:stCondLst>
+                                            <p:cond delay="0"/>
+                                          </p:stCondLst>
+                                        </p:cTn>
+                                        <p:tgtEl>
+                                          <p:spTgt spid="3">
+                                            <p:txEl>
+                                              <p:pRg st="3" end="3"/>
+                                            </p:txEl>
+                                          </p:spTgt>
+                                        </p:tgtEl>
+                                        <p:attrNameLst>
+                                          <p:attrName>style.visibility</p:attrName>
+                                        </p:attrNameLst>
+                                      </p:cBhvr>
+                                      <p:to>
+                                        <p:strVal val="visible"/>
+                                      </p:to>
+                                    </p:set>
+                                    <p:anim calcmode="lin" valueType="num">
+                                      <p:cBhvr additive="base">
+                                        <p:cTn id="19" dur="500" fill="hold"/>
+                                        <p:tgtEl>
+                                          <p:spTgt spid="3">
+                                            <p:txEl>
+                                              <p:pRg st="3" end="3"/>
+                                            </p:txEl>
+                                          </p:spTgt>
+                                        </p:tgtEl>
+                                        <p:attrNameLst>
+                                          <p:attrName>ppt_x</p:attrName>
+                                        </p:attrNameLst>
+                                      </p:cBhvr>
+                                      <p:tavLst>
+                                        <p:tav tm="0">
+                                          <p:val>
+                                            <p:strVal val="#ppt_x"/>
+                                          </p:val>
+                                        </p:tav>
+                                        <p:tav tm="100000">
+                                          <p:val>
+                                            <p:strVal val="#ppt_x"/>
+                                          </p:val>
+                                        </p:tav>
+                                      </p:tavLst>
+                                    </p:anim>
+                                    <p:anim calcmode="lin" valueType="num">
+                                      <p:cBhvr additive="base">
+                                        <p:cTn id="20" dur="500" fill="hold"/>
+                                        <p:tgtEl>
+                                          <p:spTgt spid="3">
+                                            <p:txEl>
+                                              <p:pRg st="3" end="3"/>
+                                            </p:txEl>
+                                          </p:spTgt>
+                                        </p:tgtEl>
+                                        <p:attrNameLst>
+                                          <p:attrName>ppt_y</p:attrName>
+                                        </p:attrNameLst>
+                                      </p:cBhvr>
+                                      <p:tavLst>
+                                        <p:tav tm="0">
+                                          <p:val>
+                                            <p:strVal val="1+#ppt_h/2"/>
+                                          </p:val>
+                                        </p:tav>
+                                        <p:tav tm="100000">
+                                          <p:val>
+                                            <p:strVal val="#ppt_y"/>
+                                          </p:val>
+                                        </p:tav>
+                                      </p:tavLst>
+                                    </p:anim>
+                                  </p:childTnLst>
+                                </p:cTn>
+                              </p:par>
+                            </p:childTnLst>
+                          </p:cTn>
+                        </p:par>
+                      </p:childTnLst>
+                    </p:cTn>
+                  </p:par>
+                  <p:par>
+                    <p:cTn id="21" fill="hold">
+                      <p:stCondLst>
+                        <p:cond delay="indefinite"/>
+                      </p:stCondLst>
+                      <p:childTnLst>
+                        <p:par>
+                          <p:cTn id="22" fill="hold">
+                            <p:stCondLst>
+                              <p:cond delay="0"/>
+                            </p:stCondLst>
+                            <p:childTnLst>
+                              <p:par>
+                                <p:cTn id="23" presetID="2" presetClass="entr" presetSubtype="4" fill="hold" grpId="0" nodeType="clickEffect">
+                                  <p:stCondLst>
+                                    <p:cond delay="0"/>
+                                  </p:stCondLst>
+                                  <p:childTnLst>
+                                    <p:set>
+                                      <p:cBhvr>
+                                        <p:cTn id="24" dur="1" fill="hold">
+                                          <p:stCondLst>
+                                            <p:cond delay="0"/>
+                                          </p:stCondLst>
+                                        </p:cTn>
+                                        <p:tgtEl>
+                                          <p:spTgt spid="3">
+                                            <p:txEl>
+                                              <p:pRg st="5" end="5"/>
+                                            </p:txEl>
+                                          </p:spTgt>
+                                        </p:tgtEl>
+                                        <p:attrNameLst>
+                                          <p:attrName>style.visibility</p:attrName>
+                                        </p:attrNameLst>
+                                      </p:cBhvr>
+                                      <p:to>
+                                        <p:strVal val="visible"/>
+                                      </p:to>
+                                    </p:set>
+                                    <p:anim calcmode="lin" valueType="num">
+                                      <p:cBhvr additive="base">
+                                        <p:cTn id="25" dur="500" fill="hold"/>
+                                        <p:tgtEl>
+                                          <p:spTgt spid="3">
+                                            <p:txEl>
+                                              <p:pRg st="5" end="5"/>
+                                            </p:txEl>
+                                          </p:spTgt>
+                                        </p:tgtEl>
+                                        <p:attrNameLst>
+                                          <p:attrName>ppt_x</p:attrName>
+                                        </p:attrNameLst>
+                                      </p:cBhvr>
+                                      <p:tavLst>
+                                        <p:tav tm="0">
+                                          <p:val>
+                                            <p:strVal val="#ppt_x"/>
+                                          </p:val>
+                                        </p:tav>
+                                        <p:tav tm="100000">
+                                          <p:val>
+                                            <p:strVal val="#ppt_x"/>
+                                          </p:val>
+                                        </p:tav>
+                                      </p:tavLst>
+                                    </p:anim>
+                                    <p:anim calcmode="lin" valueType="num">
+                                      <p:cBhvr additive="base">
+                                        <p:cTn id="26" dur="500" fill="hold"/>
+                                        <p:tgtEl>
+                                          <p:spTgt spid="3">
+                                            <p:txEl>
+                                              <p:pRg st="5" end="5"/>
+                                            </p:txEl>
+                                          </p:spTgt>
+                                        </p:tgtEl>
+                                        <p:attrNameLst>
+                                          <p:attrName>ppt_y</p:attrName>
+                                        </p:attrNameLst>
+                                      </p:cBhvr>
+                                      <p:tavLst>
+                                        <p:tav tm="0">
+                                          <p:val>
+                                            <p:strVal val="1+#ppt_h/2"/>
+                                          </p:val>
+                                        </p:tav>
+                                        <p:tav tm="100000">
+                                          <p:val>
+                                            <p:strVal val="#ppt_y"/>
+                                          </p:val>
+                                        </p:tav>
+                                      </p:tavLst>
+                                    </p:anim>
+                                  </p:childTnLst>
+                                </p:cTn>
+                              </p:par>
+                            </p:childTnLst>
+                          </p:cTn>
+                        </p:par>
+                        <p:par>
+                          <p:cTn id="27" fill="hold">
+                            <p:stCondLst>
+                              <p:cond delay="500"/>
+                            </p:stCondLst>
+                            <p:childTnLst>
+                              <p:par>
+                                <p:cTn id="28" presetID="22" presetClass="entr" presetSubtype="4" fill="hold" grpId="0" nodeType="afterEffect">
+                                  <p:stCondLst>
+                                    <p:cond delay="0"/>
+                                  </p:stCondLst>
+                                  <p:childTnLst>
+                                    <p:set>
+                                      <p:cBhvr>
+                                        <p:cTn id="29" dur="1" fill="hold">
+                                          <p:stCondLst>
+                                            <p:cond delay="0"/>
+                                          </p:stCondLst>
+                                        </p:cTn>
+                                        <p:tgtEl>
+                                          <p:spTgt spid="5"/>
+                                        </p:tgtEl>
+                                        <p:attrNameLst>
+                                          <p:attrName>style.visibility</p:attrName>
+                                        </p:attrNameLst>
+                                      </p:cBhvr>
+                                      <p:to>
+                                        <p:strVal val="visible"/>
+                                      </p:to>
+                                    </p:set>
+                                    <p:animEffect transition="in" filter="wipe(down)">
+                                      <p:cBhvr>
+                                        <p:cTn id="30" dur="500"/>
+                                        <p:tgtEl>
+                                          <p:spTgt spid="5"/>
+                                        </p:tgtEl>
+                                      </p:cBhvr>
+                                    </p:animEffect>
+                                  </p:childTnLst>
+                                </p:cTn>
+                              </p:par>
+                            </p:childTnLst>
+                          </p:cTn>
+                        </p:par>
+                      </p:childTnLst>
+                    </p:cTn>
+                  </p:par>
+                </p:childTnLst>
+              </p:cTn>
+              <p:prevCondLst>
+                <p:cond evt="onPrev" delay="0">
+                  <p:tgtEl>
+                    <p:sldTgt/>
+                  </p:tgtEl>
+                </p:cond>
+              </p:prevCondLst>
+              <p:nextCondLst>
+                <p:cond evt="onNext" delay="0">
+                  <p:tgtEl>
+                    <p:sldTgt/>
+                  </p:tgtEl>
+                </p:cond>
+              </p:nextCondLst>
+            </p:seq>
+          </p:childTnLst>
+        </p:cTn>
+      </p:par>
+    </p:tnLst>
+    <p:bldLst>
+      <p:bldP spid="3" grpId="0" uiExpand="1" build="p"/>
+      <p:bldP spid="5" grpId="0" animBg="1"/>
+    </p:bldLst>
+  </p:timing>
+</p:sld>
+</file>
+
+<file path=ppt/slides/slide30.xml><?xml version="1.0" encoding="utf-8"?>
 <p:sld xmlns:a="http://schemas.openxmlformats.org/drawingml/2006/main" xmlns:r="http://schemas.openxmlformats.org/officeDocument/2006/relationships" xmlns:p="http://schemas.openxmlformats.org/presentationml/2006/main">
   <p:cSld>
     <p:spTree>
@@ -10934,7 +16752,7 @@
 </p:sld>
 </file>
 
-<file path=ppt/slides/slide19.xml><?xml version="1.0" encoding="utf-8"?>
+<file path=ppt/slides/slide31.xml><?xml version="1.0" encoding="utf-8"?>
 <p:sld xmlns:a="http://schemas.openxmlformats.org/drawingml/2006/main" xmlns:r="http://schemas.openxmlformats.org/officeDocument/2006/relationships" xmlns:p="http://schemas.openxmlformats.org/presentationml/2006/main">
   <p:cSld>
     <p:spTree>
@@ -11193,458 +17011,7 @@
 </p:sld>
 </file>
 
-<file path=ppt/slides/slide2.xml><?xml version="1.0" encoding="utf-8"?>
-<p:sld xmlns:a="http://schemas.openxmlformats.org/drawingml/2006/main" xmlns:r="http://schemas.openxmlformats.org/officeDocument/2006/relationships" xmlns:p="http://schemas.openxmlformats.org/presentationml/2006/main">
-  <p:cSld>
-    <p:spTree>
-      <p:nvGrpSpPr>
-        <p:cNvPr id="1" name="">
-          <a:extLst>
-            <a:ext uri="{FF2B5EF4-FFF2-40B4-BE49-F238E27FC236}">
-              <a16:creationId xmlns:a16="http://schemas.microsoft.com/office/drawing/2014/main" id="{AB95B6AF-072C-A9C1-1863-398830BB948F}"/>
-            </a:ext>
-          </a:extLst>
-        </p:cNvPr>
-        <p:cNvGrpSpPr/>
-        <p:nvPr/>
-      </p:nvGrpSpPr>
-      <p:grpSpPr>
-        <a:xfrm>
-          <a:off x="0" y="0"/>
-          <a:ext cx="0" cy="0"/>
-          <a:chOff x="0" y="0"/>
-          <a:chExt cx="0" cy="0"/>
-        </a:xfrm>
-      </p:grpSpPr>
-      <p:sp>
-        <p:nvSpPr>
-          <p:cNvPr id="2" name="Title 1">
-            <a:extLst>
-              <a:ext uri="{FF2B5EF4-FFF2-40B4-BE49-F238E27FC236}">
-                <a16:creationId xmlns:a16="http://schemas.microsoft.com/office/drawing/2014/main" id="{37B9D5B6-59DB-8A5F-DC09-D99C93C40A62}"/>
-              </a:ext>
-            </a:extLst>
-          </p:cNvPr>
-          <p:cNvSpPr>
-            <a:spLocks noGrp="1"/>
-          </p:cNvSpPr>
-          <p:nvPr>
-            <p:ph type="title"/>
-          </p:nvPr>
-        </p:nvSpPr>
-        <p:spPr/>
-        <p:txBody>
-          <a:bodyPr/>
-          <a:lstStyle/>
-          <a:p>
-            <a:r>
-              <a:rPr lang="en-IE"/>
-              <a:t>Topics list</a:t>
-            </a:r>
-            <a:endParaRPr lang="en-IE" dirty="0"/>
-          </a:p>
-        </p:txBody>
-      </p:sp>
-      <p:sp>
-        <p:nvSpPr>
-          <p:cNvPr id="7" name="Rectangle 6">
-            <a:extLst>
-              <a:ext uri="{FF2B5EF4-FFF2-40B4-BE49-F238E27FC236}">
-                <a16:creationId xmlns:a16="http://schemas.microsoft.com/office/drawing/2014/main" id="{DA0D0626-156E-BA6F-8614-93BC3D5DF7FF}"/>
-              </a:ext>
-            </a:extLst>
-          </p:cNvPr>
-          <p:cNvSpPr/>
-          <p:nvPr/>
-        </p:nvSpPr>
-        <p:spPr>
-          <a:xfrm>
-            <a:off x="1728789" y="3200400"/>
-            <a:ext cx="4648200" cy="457200"/>
-          </a:xfrm>
-          <a:prstGeom prst="rect">
-            <a:avLst/>
-          </a:prstGeom>
-          <a:noFill/>
-          <a:ln w="44450">
-            <a:solidFill>
-              <a:srgbClr val="FF0000"/>
-            </a:solidFill>
-          </a:ln>
-        </p:spPr>
-        <p:style>
-          <a:lnRef idx="2">
-            <a:schemeClr val="accent1">
-              <a:shade val="50000"/>
-            </a:schemeClr>
-          </a:lnRef>
-          <a:fillRef idx="1">
-            <a:schemeClr val="accent1"/>
-          </a:fillRef>
-          <a:effectRef idx="0">
-            <a:schemeClr val="accent1"/>
-          </a:effectRef>
-          <a:fontRef idx="minor">
-            <a:schemeClr val="lt1"/>
-          </a:fontRef>
-        </p:style>
-        <p:txBody>
-          <a:bodyPr rtlCol="0" anchor="ctr"/>
-          <a:lstStyle/>
-          <a:p>
-            <a:pPr algn="ctr"/>
-            <a:endParaRPr lang="en-IE"/>
-          </a:p>
-        </p:txBody>
-      </p:sp>
-      <p:sp>
-        <p:nvSpPr>
-          <p:cNvPr id="6" name="Content Placeholder 4">
-            <a:extLst>
-              <a:ext uri="{FF2B5EF4-FFF2-40B4-BE49-F238E27FC236}">
-                <a16:creationId xmlns:a16="http://schemas.microsoft.com/office/drawing/2014/main" id="{E80E9EB5-7D9C-7F33-2593-002DAF7EF03E}"/>
-              </a:ext>
-            </a:extLst>
-          </p:cNvPr>
-          <p:cNvSpPr txBox="1">
-            <a:spLocks/>
-          </p:cNvSpPr>
-          <p:nvPr/>
-        </p:nvSpPr>
-        <p:spPr>
-          <a:xfrm>
-            <a:off x="914400" y="2332037"/>
-            <a:ext cx="8763000" cy="4525963"/>
-          </a:xfrm>
-          <a:prstGeom prst="rect">
-            <a:avLst/>
-          </a:prstGeom>
-        </p:spPr>
-        <p:txBody>
-          <a:bodyPr vert="horz" lIns="91440" tIns="45720" rIns="91440" bIns="45720" rtlCol="0">
-            <a:normAutofit/>
-          </a:bodyPr>
-          <a:lstStyle>
-            <a:lvl1pPr marL="342900" indent="-342900" algn="l" defTabSz="914400" rtl="0" eaLnBrk="1" latinLnBrk="0" hangingPunct="1">
-              <a:spcBef>
-                <a:spcPct val="20000"/>
-              </a:spcBef>
-              <a:buFont typeface="Arial" pitchFamily="34" charset="0"/>
-              <a:buChar char="•"/>
-              <a:defRPr sz="3200" kern="1200">
-                <a:solidFill>
-                  <a:schemeClr val="tx1"/>
-                </a:solidFill>
-                <a:latin typeface="+mn-lt"/>
-                <a:ea typeface="+mn-ea"/>
-                <a:cs typeface="+mn-cs"/>
-              </a:defRPr>
-            </a:lvl1pPr>
-            <a:lvl2pPr marL="742950" indent="-285750" algn="l" defTabSz="914400" rtl="0" eaLnBrk="1" latinLnBrk="0" hangingPunct="1">
-              <a:spcBef>
-                <a:spcPct val="20000"/>
-              </a:spcBef>
-              <a:buFont typeface="Arial" pitchFamily="34" charset="0"/>
-              <a:buChar char="–"/>
-              <a:defRPr sz="2800" kern="1200">
-                <a:solidFill>
-                  <a:schemeClr val="tx1"/>
-                </a:solidFill>
-                <a:latin typeface="+mn-lt"/>
-                <a:ea typeface="+mn-ea"/>
-                <a:cs typeface="+mn-cs"/>
-              </a:defRPr>
-            </a:lvl2pPr>
-            <a:lvl3pPr marL="1143000" indent="-228600" algn="l" defTabSz="914400" rtl="0" eaLnBrk="1" latinLnBrk="0" hangingPunct="1">
-              <a:spcBef>
-                <a:spcPct val="20000"/>
-              </a:spcBef>
-              <a:buFont typeface="Arial" pitchFamily="34" charset="0"/>
-              <a:buChar char="•"/>
-              <a:defRPr sz="2400" kern="1200">
-                <a:solidFill>
-                  <a:schemeClr val="tx1"/>
-                </a:solidFill>
-                <a:latin typeface="+mn-lt"/>
-                <a:ea typeface="+mn-ea"/>
-                <a:cs typeface="+mn-cs"/>
-              </a:defRPr>
-            </a:lvl3pPr>
-            <a:lvl4pPr marL="1600200" indent="-228600" algn="l" defTabSz="914400" rtl="0" eaLnBrk="1" latinLnBrk="0" hangingPunct="1">
-              <a:spcBef>
-                <a:spcPct val="20000"/>
-              </a:spcBef>
-              <a:buFont typeface="Arial" pitchFamily="34" charset="0"/>
-              <a:buChar char="–"/>
-              <a:defRPr sz="2000" kern="1200">
-                <a:solidFill>
-                  <a:schemeClr val="tx1"/>
-                </a:solidFill>
-                <a:latin typeface="+mn-lt"/>
-                <a:ea typeface="+mn-ea"/>
-                <a:cs typeface="+mn-cs"/>
-              </a:defRPr>
-            </a:lvl4pPr>
-            <a:lvl5pPr marL="2057400" indent="-228600" algn="l" defTabSz="914400" rtl="0" eaLnBrk="1" latinLnBrk="0" hangingPunct="1">
-              <a:spcBef>
-                <a:spcPct val="20000"/>
-              </a:spcBef>
-              <a:buFont typeface="Arial" pitchFamily="34" charset="0"/>
-              <a:buChar char="»"/>
-              <a:defRPr sz="2000" kern="1200">
-                <a:solidFill>
-                  <a:schemeClr val="tx1"/>
-                </a:solidFill>
-                <a:latin typeface="+mn-lt"/>
-                <a:ea typeface="+mn-ea"/>
-                <a:cs typeface="+mn-cs"/>
-              </a:defRPr>
-            </a:lvl5pPr>
-            <a:lvl6pPr marL="2514600" indent="-228600" algn="l" defTabSz="914400" rtl="0" eaLnBrk="1" latinLnBrk="0" hangingPunct="1">
-              <a:spcBef>
-                <a:spcPct val="20000"/>
-              </a:spcBef>
-              <a:buFont typeface="Arial" pitchFamily="34" charset="0"/>
-              <a:buChar char="•"/>
-              <a:defRPr sz="2000" kern="1200">
-                <a:solidFill>
-                  <a:schemeClr val="tx1"/>
-                </a:solidFill>
-                <a:latin typeface="+mn-lt"/>
-                <a:ea typeface="+mn-ea"/>
-                <a:cs typeface="+mn-cs"/>
-              </a:defRPr>
-            </a:lvl6pPr>
-            <a:lvl7pPr marL="2971800" indent="-228600" algn="l" defTabSz="914400" rtl="0" eaLnBrk="1" latinLnBrk="0" hangingPunct="1">
-              <a:spcBef>
-                <a:spcPct val="20000"/>
-              </a:spcBef>
-              <a:buFont typeface="Arial" pitchFamily="34" charset="0"/>
-              <a:buChar char="•"/>
-              <a:defRPr sz="2000" kern="1200">
-                <a:solidFill>
-                  <a:schemeClr val="tx1"/>
-                </a:solidFill>
-                <a:latin typeface="+mn-lt"/>
-                <a:ea typeface="+mn-ea"/>
-                <a:cs typeface="+mn-cs"/>
-              </a:defRPr>
-            </a:lvl7pPr>
-            <a:lvl8pPr marL="3429000" indent="-228600" algn="l" defTabSz="914400" rtl="0" eaLnBrk="1" latinLnBrk="0" hangingPunct="1">
-              <a:spcBef>
-                <a:spcPct val="20000"/>
-              </a:spcBef>
-              <a:buFont typeface="Arial" pitchFamily="34" charset="0"/>
-              <a:buChar char="•"/>
-              <a:defRPr sz="2000" kern="1200">
-                <a:solidFill>
-                  <a:schemeClr val="tx1"/>
-                </a:solidFill>
-                <a:latin typeface="+mn-lt"/>
-                <a:ea typeface="+mn-ea"/>
-                <a:cs typeface="+mn-cs"/>
-              </a:defRPr>
-            </a:lvl8pPr>
-            <a:lvl9pPr marL="3886200" indent="-228600" algn="l" defTabSz="914400" rtl="0" eaLnBrk="1" latinLnBrk="0" hangingPunct="1">
-              <a:spcBef>
-                <a:spcPct val="20000"/>
-              </a:spcBef>
-              <a:buFont typeface="Arial" pitchFamily="34" charset="0"/>
-              <a:buChar char="•"/>
-              <a:defRPr sz="2000" kern="1200">
-                <a:solidFill>
-                  <a:schemeClr val="tx1"/>
-                </a:solidFill>
-                <a:latin typeface="+mn-lt"/>
-                <a:ea typeface="+mn-ea"/>
-                <a:cs typeface="+mn-cs"/>
-              </a:defRPr>
-            </a:lvl9pPr>
-          </a:lstStyle>
-          <a:p>
-            <a:endParaRPr lang="en-IE" sz="1600" dirty="0"/>
-          </a:p>
-          <a:p>
-            <a:pPr marL="514350" indent="-514350">
-              <a:buFont typeface="+mj-lt"/>
-              <a:buAutoNum type="arabicPeriod"/>
-            </a:pPr>
-            <a:r>
-              <a:rPr lang="en-IE" dirty="0"/>
-              <a:t> Method examples – return values</a:t>
-            </a:r>
-          </a:p>
-          <a:p>
-            <a:pPr marL="914400" lvl="1" indent="-514350"/>
-            <a:r>
-              <a:rPr lang="en-IE" dirty="0" err="1"/>
-              <a:t>Celcius</a:t>
-            </a:r>
-            <a:r>
-              <a:rPr lang="en-IE" dirty="0"/>
-              <a:t> / </a:t>
-            </a:r>
-            <a:r>
-              <a:rPr lang="en-IE" dirty="0" err="1"/>
-              <a:t>Farenheit</a:t>
-            </a:r>
-            <a:r>
-              <a:rPr lang="en-IE" dirty="0"/>
-              <a:t> </a:t>
-            </a:r>
-            <a:r>
-              <a:rPr lang="en-IE" b="1" dirty="0"/>
-              <a:t>Converter</a:t>
-            </a:r>
-            <a:r>
-              <a:rPr lang="en-IE" dirty="0"/>
-              <a:t>.</a:t>
-            </a:r>
-          </a:p>
-          <a:p>
-            <a:pPr marL="914400" lvl="1" indent="-514350"/>
-            <a:r>
-              <a:rPr lang="en-IE" b="1" dirty="0"/>
-              <a:t>Cubed</a:t>
-            </a:r>
-          </a:p>
-          <a:p>
-            <a:pPr marL="914400" lvl="1" indent="-514350"/>
-            <a:r>
-              <a:rPr lang="en-IE" b="1" dirty="0"/>
-              <a:t>Product</a:t>
-            </a:r>
-          </a:p>
-          <a:p>
-            <a:pPr marL="514350" indent="-514350">
-              <a:buFont typeface="+mj-lt"/>
-              <a:buAutoNum type="arabicPeriod"/>
-            </a:pPr>
-            <a:r>
-              <a:rPr lang="en-IE" b="1" dirty="0"/>
-              <a:t> </a:t>
-            </a:r>
-            <a:r>
-              <a:rPr lang="en-IE" dirty="0"/>
-              <a:t>Boolean methods</a:t>
-            </a:r>
-          </a:p>
-          <a:p>
-            <a:pPr marL="514350" indent="-514350">
-              <a:buFont typeface="+mj-lt"/>
-              <a:buAutoNum type="arabicPeriod"/>
-            </a:pPr>
-            <a:r>
-              <a:rPr lang="en-IE" b="1" dirty="0"/>
-              <a:t> Overloading</a:t>
-            </a:r>
-            <a:r>
-              <a:rPr lang="en-IE" dirty="0"/>
-              <a:t> methods.</a:t>
-            </a:r>
-          </a:p>
-        </p:txBody>
-      </p:sp>
-    </p:spTree>
-    <p:extLst>
-      <p:ext uri="{BB962C8B-B14F-4D97-AF65-F5344CB8AC3E}">
-        <p14:creationId xmlns:p14="http://schemas.microsoft.com/office/powerpoint/2010/main" val="1154549921"/>
-      </p:ext>
-    </p:extLst>
-  </p:cSld>
-  <p:clrMapOvr>
-    <a:masterClrMapping/>
-  </p:clrMapOvr>
-  <p:timing>
-    <p:tnLst>
-      <p:par>
-        <p:cTn id="1" dur="indefinite" restart="never" nodeType="tmRoot">
-          <p:childTnLst>
-            <p:seq concurrent="1" nextAc="seek">
-              <p:cTn id="2" dur="indefinite" nodeType="mainSeq">
-                <p:childTnLst>
-                  <p:par>
-                    <p:cTn id="3" fill="hold">
-                      <p:stCondLst>
-                        <p:cond delay="indefinite"/>
-                      </p:stCondLst>
-                      <p:childTnLst>
-                        <p:par>
-                          <p:cTn id="4" fill="hold">
-                            <p:stCondLst>
-                              <p:cond delay="0"/>
-                            </p:stCondLst>
-                            <p:childTnLst>
-                              <p:par>
-                                <p:cTn id="5" presetID="21" presetClass="entr" presetSubtype="1" fill="hold" grpId="0" nodeType="clickEffect">
-                                  <p:stCondLst>
-                                    <p:cond delay="0"/>
-                                  </p:stCondLst>
-                                  <p:childTnLst>
-                                    <p:set>
-                                      <p:cBhvr>
-                                        <p:cTn id="6" dur="1" fill="hold">
-                                          <p:stCondLst>
-                                            <p:cond delay="0"/>
-                                          </p:stCondLst>
-                                        </p:cTn>
-                                        <p:tgtEl>
-                                          <p:spTgt spid="7"/>
-                                        </p:tgtEl>
-                                        <p:attrNameLst>
-                                          <p:attrName>style.visibility</p:attrName>
-                                        </p:attrNameLst>
-                                      </p:cBhvr>
-                                      <p:to>
-                                        <p:strVal val="visible"/>
-                                      </p:to>
-                                    </p:set>
-                                    <p:animEffect transition="in" filter="wheel(1)">
-                                      <p:cBhvr>
-                                        <p:cTn id="7" dur="2000"/>
-                                        <p:tgtEl>
-                                          <p:spTgt spid="7"/>
-                                        </p:tgtEl>
-                                      </p:cBhvr>
-                                    </p:animEffect>
-                                  </p:childTnLst>
-                                </p:cTn>
-                              </p:par>
-                            </p:childTnLst>
-                          </p:cTn>
-                        </p:par>
-                      </p:childTnLst>
-                    </p:cTn>
-                  </p:par>
-                </p:childTnLst>
-              </p:cTn>
-              <p:prevCondLst>
-                <p:cond evt="onPrev" delay="0">
-                  <p:tgtEl>
-                    <p:sldTgt/>
-                  </p:tgtEl>
-                </p:cond>
-              </p:prevCondLst>
-              <p:nextCondLst>
-                <p:cond evt="onNext" delay="0">
-                  <p:tgtEl>
-                    <p:sldTgt/>
-                  </p:tgtEl>
-                </p:cond>
-              </p:nextCondLst>
-            </p:seq>
-          </p:childTnLst>
-        </p:cTn>
-      </p:par>
-    </p:tnLst>
-    <p:bldLst>
-      <p:bldP spid="7" grpId="0" animBg="1"/>
-    </p:bldLst>
-  </p:timing>
-</p:sld>
-</file>
-
-<file path=ppt/slides/slide20.xml><?xml version="1.0" encoding="utf-8"?>
+<file path=ppt/slides/slide32.xml><?xml version="1.0" encoding="utf-8"?>
 <p:sld xmlns:a="http://schemas.openxmlformats.org/drawingml/2006/main" xmlns:r="http://schemas.openxmlformats.org/officeDocument/2006/relationships" xmlns:p="http://schemas.openxmlformats.org/presentationml/2006/main">
   <p:cSld>
     <p:spTree>
@@ -12486,7 +17853,7 @@
 </p:sld>
 </file>
 
-<file path=ppt/slides/slide21.xml><?xml version="1.0" encoding="utf-8"?>
+<file path=ppt/slides/slide33.xml><?xml version="1.0" encoding="utf-8"?>
 <p:sld xmlns:a="http://schemas.openxmlformats.org/drawingml/2006/main" xmlns:r="http://schemas.openxmlformats.org/officeDocument/2006/relationships" xmlns:p="http://schemas.openxmlformats.org/presentationml/2006/main">
   <p:cSld>
     <p:spTree>
@@ -12571,877 +17938,6 @@
   <p:clrMapOvr>
     <a:masterClrMapping/>
   </p:clrMapOvr>
-</p:sld>
-</file>
-
-<file path=ppt/slides/slide3.xml><?xml version="1.0" encoding="utf-8"?>
-<p:sld xmlns:a="http://schemas.openxmlformats.org/drawingml/2006/main" xmlns:r="http://schemas.openxmlformats.org/officeDocument/2006/relationships" xmlns:p="http://schemas.openxmlformats.org/presentationml/2006/main">
-  <p:cSld>
-    <p:spTree>
-      <p:nvGrpSpPr>
-        <p:cNvPr id="1" name=""/>
-        <p:cNvGrpSpPr/>
-        <p:nvPr/>
-      </p:nvGrpSpPr>
-      <p:grpSpPr>
-        <a:xfrm>
-          <a:off x="0" y="0"/>
-          <a:ext cx="0" cy="0"/>
-          <a:chOff x="0" y="0"/>
-          <a:chExt cx="0" cy="0"/>
-        </a:xfrm>
-      </p:grpSpPr>
-      <p:sp>
-        <p:nvSpPr>
-          <p:cNvPr id="2" name="Title 1"/>
-          <p:cNvSpPr>
-            <a:spLocks noGrp="1"/>
-          </p:cNvSpPr>
-          <p:nvPr>
-            <p:ph type="title"/>
-          </p:nvPr>
-        </p:nvSpPr>
-        <p:spPr/>
-        <p:txBody>
-          <a:bodyPr>
-            <a:normAutofit/>
-          </a:bodyPr>
-          <a:lstStyle/>
-          <a:p>
-            <a:r>
-              <a:rPr lang="en-IE" dirty="0"/>
-              <a:t>Return Type</a:t>
-            </a:r>
-            <a:endParaRPr lang="en-IE" b="1" dirty="0"/>
-          </a:p>
-        </p:txBody>
-      </p:sp>
-      <p:sp>
-        <p:nvSpPr>
-          <p:cNvPr id="3" name="Content Placeholder 2"/>
-          <p:cNvSpPr>
-            <a:spLocks noGrp="1"/>
-          </p:cNvSpPr>
-          <p:nvPr>
-            <p:ph idx="1"/>
-          </p:nvPr>
-        </p:nvSpPr>
-        <p:spPr>
-          <a:xfrm>
-            <a:off x="609600" y="1600201"/>
-            <a:ext cx="11379200" cy="4525963"/>
-          </a:xfrm>
-        </p:spPr>
-        <p:txBody>
-          <a:bodyPr>
-            <a:normAutofit fontScale="85000" lnSpcReduction="20000"/>
-          </a:bodyPr>
-          <a:lstStyle/>
-          <a:p>
-            <a:endParaRPr lang="en-IE" dirty="0"/>
-          </a:p>
-          <a:p>
-            <a:r>
-              <a:rPr lang="en-IE" dirty="0"/>
-              <a:t>Methods can return information. </a:t>
-            </a:r>
-            <a:br>
-              <a:rPr lang="en-IE" dirty="0"/>
-            </a:br>
-            <a:endParaRPr lang="en-IE" dirty="0"/>
-          </a:p>
-          <a:p>
-            <a:r>
-              <a:rPr lang="en-IE" dirty="0"/>
-              <a:t>The </a:t>
-            </a:r>
-            <a:r>
-              <a:rPr lang="en-IE" dirty="0">
-                <a:solidFill>
-                  <a:srgbClr val="FF0000"/>
-                </a:solidFill>
-              </a:rPr>
-              <a:t>void</a:t>
-            </a:r>
-            <a:r>
-              <a:rPr lang="en-IE" dirty="0"/>
-              <a:t> keyword just before the method name </a:t>
-            </a:r>
-            <a:br>
-              <a:rPr lang="en-IE" dirty="0"/>
-            </a:br>
-            <a:r>
-              <a:rPr lang="en-IE" dirty="0"/>
-              <a:t>means that </a:t>
-            </a:r>
-            <a:r>
-              <a:rPr lang="en-IE" b="1" dirty="0"/>
-              <a:t>nothing is returned</a:t>
-            </a:r>
-            <a:r>
-              <a:rPr lang="en-IE" dirty="0"/>
-              <a:t> from the method.</a:t>
-            </a:r>
-            <a:br>
-              <a:rPr lang="en-IE" dirty="0"/>
-            </a:br>
-            <a:endParaRPr lang="en-IE" dirty="0"/>
-          </a:p>
-          <a:p>
-            <a:r>
-              <a:rPr lang="en-IE" dirty="0"/>
-              <a:t>When a data type (e.g. </a:t>
-            </a:r>
-            <a:r>
-              <a:rPr lang="en-IE" dirty="0">
-                <a:solidFill>
-                  <a:srgbClr val="FF0000"/>
-                </a:solidFill>
-              </a:rPr>
-              <a:t>int</a:t>
-            </a:r>
-            <a:r>
-              <a:rPr lang="en-IE" dirty="0"/>
-              <a:t>) </a:t>
-            </a:r>
-            <a:br>
-              <a:rPr lang="en-IE" dirty="0"/>
-            </a:br>
-            <a:r>
-              <a:rPr lang="en-IE" dirty="0"/>
-              <a:t>appears before the method name, </a:t>
-            </a:r>
-            <a:br>
-              <a:rPr lang="en-IE" dirty="0"/>
-            </a:br>
-            <a:r>
-              <a:rPr lang="en-IE" dirty="0"/>
-              <a:t>this means that </a:t>
-            </a:r>
-            <a:r>
-              <a:rPr lang="en-IE" b="1" dirty="0"/>
-              <a:t>something is returned</a:t>
-            </a:r>
-            <a:r>
-              <a:rPr lang="en-IE" dirty="0"/>
-              <a:t> from the method.</a:t>
-            </a:r>
-          </a:p>
-          <a:p>
-            <a:pPr marL="0" indent="0">
-              <a:buNone/>
-            </a:pPr>
-            <a:endParaRPr lang="en-IE" dirty="0"/>
-          </a:p>
-          <a:p>
-            <a:r>
-              <a:rPr lang="en-IE" dirty="0"/>
-              <a:t>Within the body of the method, </a:t>
-            </a:r>
-            <a:br>
-              <a:rPr lang="en-IE" dirty="0"/>
-            </a:br>
-            <a:r>
-              <a:rPr lang="en-IE" dirty="0"/>
-              <a:t>you use the </a:t>
-            </a:r>
-            <a:r>
-              <a:rPr lang="en-IE" b="1" dirty="0">
-                <a:solidFill>
-                  <a:srgbClr val="FF0000"/>
-                </a:solidFill>
-              </a:rPr>
-              <a:t>return</a:t>
-            </a:r>
-            <a:r>
-              <a:rPr lang="en-IE" dirty="0">
-                <a:solidFill>
-                  <a:srgbClr val="FF0000"/>
-                </a:solidFill>
-              </a:rPr>
-              <a:t> </a:t>
-            </a:r>
-            <a:r>
-              <a:rPr lang="en-IE" dirty="0"/>
-              <a:t>statement to </a:t>
-            </a:r>
-            <a:r>
-              <a:rPr lang="en-IE" b="1" dirty="0"/>
-              <a:t>return the value</a:t>
-            </a:r>
-            <a:r>
-              <a:rPr lang="en-IE" dirty="0"/>
-              <a:t>. </a:t>
-            </a:r>
-          </a:p>
-          <a:p>
-            <a:endParaRPr lang="en-IE" dirty="0"/>
-          </a:p>
-          <a:p>
-            <a:endParaRPr lang="en-IE" dirty="0"/>
-          </a:p>
-          <a:p>
-            <a:endParaRPr lang="en-IE" dirty="0"/>
-          </a:p>
-          <a:p>
-            <a:endParaRPr lang="en-IE" dirty="0"/>
-          </a:p>
-        </p:txBody>
-      </p:sp>
-      <p:pic>
-        <p:nvPicPr>
-          <p:cNvPr id="6" name="Picture 5">
-            <a:extLst>
-              <a:ext uri="{FF2B5EF4-FFF2-40B4-BE49-F238E27FC236}">
-                <a16:creationId xmlns:a16="http://schemas.microsoft.com/office/drawing/2014/main" id="{AAA5DFA9-4192-19FD-2FCB-254A7C19D75A}"/>
-              </a:ext>
-            </a:extLst>
-          </p:cNvPr>
-          <p:cNvPicPr>
-            <a:picLocks noChangeAspect="1"/>
-          </p:cNvPicPr>
-          <p:nvPr/>
-        </p:nvPicPr>
-        <p:blipFill>
-          <a:blip r:embed="rId3"/>
-          <a:stretch>
-            <a:fillRect/>
-          </a:stretch>
-        </p:blipFill>
-        <p:spPr>
-          <a:xfrm>
-            <a:off x="7467600" y="327231"/>
-            <a:ext cx="3429000" cy="1734714"/>
-          </a:xfrm>
-          <a:prstGeom prst="rect">
-            <a:avLst/>
-          </a:prstGeom>
-        </p:spPr>
-      </p:pic>
-      <p:sp>
-        <p:nvSpPr>
-          <p:cNvPr id="5" name="Rectangle 4">
-            <a:extLst>
-              <a:ext uri="{FF2B5EF4-FFF2-40B4-BE49-F238E27FC236}">
-                <a16:creationId xmlns:a16="http://schemas.microsoft.com/office/drawing/2014/main" id="{0D1C5C1B-3222-0132-5253-621A9B649E7A}"/>
-              </a:ext>
-            </a:extLst>
-          </p:cNvPr>
-          <p:cNvSpPr/>
-          <p:nvPr/>
-        </p:nvSpPr>
-        <p:spPr>
-          <a:xfrm>
-            <a:off x="8420911" y="4187172"/>
-            <a:ext cx="3657600" cy="1938992"/>
-          </a:xfrm>
-          <a:prstGeom prst="rect">
-            <a:avLst/>
-          </a:prstGeom>
-        </p:spPr>
-        <p:style>
-          <a:lnRef idx="1">
-            <a:schemeClr val="accent1"/>
-          </a:lnRef>
-          <a:fillRef idx="2">
-            <a:schemeClr val="accent1"/>
-          </a:fillRef>
-          <a:effectRef idx="1">
-            <a:schemeClr val="accent1"/>
-          </a:effectRef>
-          <a:fontRef idx="minor">
-            <a:schemeClr val="dk1"/>
-          </a:fontRef>
-        </p:style>
-        <p:txBody>
-          <a:bodyPr wrap="square">
-            <a:spAutoFit/>
-          </a:bodyPr>
-          <a:lstStyle/>
-          <a:p>
-            <a:r>
-              <a:rPr lang="en-IE" sz="2400" b="1" dirty="0">
-                <a:solidFill>
-                  <a:srgbClr val="FF0000"/>
-                </a:solidFill>
-              </a:rPr>
-              <a:t>int</a:t>
-            </a:r>
-            <a:r>
-              <a:rPr lang="en-IE" sz="2400" dirty="0">
-                <a:solidFill>
-                  <a:srgbClr val="FF0000"/>
-                </a:solidFill>
-              </a:rPr>
-              <a:t> </a:t>
-            </a:r>
-            <a:r>
-              <a:rPr lang="en-IE" sz="2400" dirty="0" err="1"/>
-              <a:t>timesTwo</a:t>
-            </a:r>
-            <a:r>
-              <a:rPr lang="en-IE" sz="2400" dirty="0"/>
-              <a:t>(int </a:t>
-            </a:r>
-            <a:r>
-              <a:rPr lang="en-IE" sz="2400" dirty="0">
-                <a:solidFill>
-                  <a:srgbClr val="00B0F0"/>
-                </a:solidFill>
-              </a:rPr>
-              <a:t>number</a:t>
-            </a:r>
-            <a:r>
-              <a:rPr lang="en-IE" sz="2400" dirty="0"/>
-              <a:t>) </a:t>
-            </a:r>
-          </a:p>
-          <a:p>
-            <a:r>
-              <a:rPr lang="en-IE" sz="2400" dirty="0"/>
-              <a:t>{ </a:t>
-            </a:r>
-          </a:p>
-          <a:p>
-            <a:r>
-              <a:rPr lang="en-IE" sz="2400" dirty="0"/>
-              <a:t>    number = number * 2; </a:t>
-            </a:r>
-          </a:p>
-          <a:p>
-            <a:r>
-              <a:rPr lang="en-IE" sz="2400" dirty="0"/>
-              <a:t>    </a:t>
-            </a:r>
-            <a:r>
-              <a:rPr lang="en-IE" sz="2400" b="1" dirty="0">
-                <a:solidFill>
-                  <a:schemeClr val="tx1"/>
-                </a:solidFill>
-              </a:rPr>
-              <a:t>return</a:t>
-            </a:r>
-            <a:r>
-              <a:rPr lang="en-IE" sz="2400" dirty="0">
-                <a:solidFill>
-                  <a:schemeClr val="tx1"/>
-                </a:solidFill>
-              </a:rPr>
-              <a:t> </a:t>
-            </a:r>
-            <a:r>
-              <a:rPr lang="en-IE" sz="2400" dirty="0"/>
-              <a:t>number; </a:t>
-            </a:r>
-          </a:p>
-          <a:p>
-            <a:r>
-              <a:rPr lang="en-IE" sz="2400" dirty="0"/>
-              <a:t>} </a:t>
-            </a:r>
-          </a:p>
-        </p:txBody>
-      </p:sp>
-    </p:spTree>
-    <p:extLst>
-      <p:ext uri="{BB962C8B-B14F-4D97-AF65-F5344CB8AC3E}">
-        <p14:creationId xmlns:p14="http://schemas.microsoft.com/office/powerpoint/2010/main" val="3983909990"/>
-      </p:ext>
-    </p:extLst>
-  </p:cSld>
-  <p:clrMapOvr>
-    <a:masterClrMapping/>
-  </p:clrMapOvr>
-  <p:timing>
-    <p:tnLst>
-      <p:par>
-        <p:cTn id="1" dur="indefinite" restart="never" nodeType="tmRoot">
-          <p:childTnLst>
-            <p:seq concurrent="1" nextAc="seek">
-              <p:cTn id="2" dur="indefinite" nodeType="mainSeq">
-                <p:childTnLst>
-                  <p:par>
-                    <p:cTn id="3" fill="hold">
-                      <p:stCondLst>
-                        <p:cond delay="indefinite"/>
-                      </p:stCondLst>
-                      <p:childTnLst>
-                        <p:par>
-                          <p:cTn id="4" fill="hold">
-                            <p:stCondLst>
-                              <p:cond delay="0"/>
-                            </p:stCondLst>
-                            <p:childTnLst>
-                              <p:par>
-                                <p:cTn id="5" presetID="2" presetClass="entr" presetSubtype="4" fill="hold" grpId="0" nodeType="clickEffect">
-                                  <p:stCondLst>
-                                    <p:cond delay="0"/>
-                                  </p:stCondLst>
-                                  <p:childTnLst>
-                                    <p:set>
-                                      <p:cBhvr>
-                                        <p:cTn id="6" dur="1" fill="hold">
-                                          <p:stCondLst>
-                                            <p:cond delay="0"/>
-                                          </p:stCondLst>
-                                        </p:cTn>
-                                        <p:tgtEl>
-                                          <p:spTgt spid="3">
-                                            <p:txEl>
-                                              <p:pRg st="1" end="1"/>
-                                            </p:txEl>
-                                          </p:spTgt>
-                                        </p:tgtEl>
-                                        <p:attrNameLst>
-                                          <p:attrName>style.visibility</p:attrName>
-                                        </p:attrNameLst>
-                                      </p:cBhvr>
-                                      <p:to>
-                                        <p:strVal val="visible"/>
-                                      </p:to>
-                                    </p:set>
-                                    <p:anim calcmode="lin" valueType="num">
-                                      <p:cBhvr additive="base">
-                                        <p:cTn id="7" dur="500" fill="hold"/>
-                                        <p:tgtEl>
-                                          <p:spTgt spid="3">
-                                            <p:txEl>
-                                              <p:pRg st="1" end="1"/>
-                                            </p:txEl>
-                                          </p:spTgt>
-                                        </p:tgtEl>
-                                        <p:attrNameLst>
-                                          <p:attrName>ppt_x</p:attrName>
-                                        </p:attrNameLst>
-                                      </p:cBhvr>
-                                      <p:tavLst>
-                                        <p:tav tm="0">
-                                          <p:val>
-                                            <p:strVal val="#ppt_x"/>
-                                          </p:val>
-                                        </p:tav>
-                                        <p:tav tm="100000">
-                                          <p:val>
-                                            <p:strVal val="#ppt_x"/>
-                                          </p:val>
-                                        </p:tav>
-                                      </p:tavLst>
-                                    </p:anim>
-                                    <p:anim calcmode="lin" valueType="num">
-                                      <p:cBhvr additive="base">
-                                        <p:cTn id="8" dur="500" fill="hold"/>
-                                        <p:tgtEl>
-                                          <p:spTgt spid="3">
-                                            <p:txEl>
-                                              <p:pRg st="1" end="1"/>
-                                            </p:txEl>
-                                          </p:spTgt>
-                                        </p:tgtEl>
-                                        <p:attrNameLst>
-                                          <p:attrName>ppt_y</p:attrName>
-                                        </p:attrNameLst>
-                                      </p:cBhvr>
-                                      <p:tavLst>
-                                        <p:tav tm="0">
-                                          <p:val>
-                                            <p:strVal val="1+#ppt_h/2"/>
-                                          </p:val>
-                                        </p:tav>
-                                        <p:tav tm="100000">
-                                          <p:val>
-                                            <p:strVal val="#ppt_y"/>
-                                          </p:val>
-                                        </p:tav>
-                                      </p:tavLst>
-                                    </p:anim>
-                                  </p:childTnLst>
-                                </p:cTn>
-                              </p:par>
-                            </p:childTnLst>
-                          </p:cTn>
-                        </p:par>
-                      </p:childTnLst>
-                    </p:cTn>
-                  </p:par>
-                  <p:par>
-                    <p:cTn id="9" fill="hold">
-                      <p:stCondLst>
-                        <p:cond delay="indefinite"/>
-                      </p:stCondLst>
-                      <p:childTnLst>
-                        <p:par>
-                          <p:cTn id="10" fill="hold">
-                            <p:stCondLst>
-                              <p:cond delay="0"/>
-                            </p:stCondLst>
-                            <p:childTnLst>
-                              <p:par>
-                                <p:cTn id="11" presetID="2" presetClass="entr" presetSubtype="4" fill="hold" grpId="0" nodeType="clickEffect">
-                                  <p:stCondLst>
-                                    <p:cond delay="0"/>
-                                  </p:stCondLst>
-                                  <p:childTnLst>
-                                    <p:set>
-                                      <p:cBhvr>
-                                        <p:cTn id="12" dur="1" fill="hold">
-                                          <p:stCondLst>
-                                            <p:cond delay="0"/>
-                                          </p:stCondLst>
-                                        </p:cTn>
-                                        <p:tgtEl>
-                                          <p:spTgt spid="3">
-                                            <p:txEl>
-                                              <p:pRg st="2" end="2"/>
-                                            </p:txEl>
-                                          </p:spTgt>
-                                        </p:tgtEl>
-                                        <p:attrNameLst>
-                                          <p:attrName>style.visibility</p:attrName>
-                                        </p:attrNameLst>
-                                      </p:cBhvr>
-                                      <p:to>
-                                        <p:strVal val="visible"/>
-                                      </p:to>
-                                    </p:set>
-                                    <p:anim calcmode="lin" valueType="num">
-                                      <p:cBhvr additive="base">
-                                        <p:cTn id="13" dur="500" fill="hold"/>
-                                        <p:tgtEl>
-                                          <p:spTgt spid="3">
-                                            <p:txEl>
-                                              <p:pRg st="2" end="2"/>
-                                            </p:txEl>
-                                          </p:spTgt>
-                                        </p:tgtEl>
-                                        <p:attrNameLst>
-                                          <p:attrName>ppt_x</p:attrName>
-                                        </p:attrNameLst>
-                                      </p:cBhvr>
-                                      <p:tavLst>
-                                        <p:tav tm="0">
-                                          <p:val>
-                                            <p:strVal val="#ppt_x"/>
-                                          </p:val>
-                                        </p:tav>
-                                        <p:tav tm="100000">
-                                          <p:val>
-                                            <p:strVal val="#ppt_x"/>
-                                          </p:val>
-                                        </p:tav>
-                                      </p:tavLst>
-                                    </p:anim>
-                                    <p:anim calcmode="lin" valueType="num">
-                                      <p:cBhvr additive="base">
-                                        <p:cTn id="14" dur="500" fill="hold"/>
-                                        <p:tgtEl>
-                                          <p:spTgt spid="3">
-                                            <p:txEl>
-                                              <p:pRg st="2" end="2"/>
-                                            </p:txEl>
-                                          </p:spTgt>
-                                        </p:tgtEl>
-                                        <p:attrNameLst>
-                                          <p:attrName>ppt_y</p:attrName>
-                                        </p:attrNameLst>
-                                      </p:cBhvr>
-                                      <p:tavLst>
-                                        <p:tav tm="0">
-                                          <p:val>
-                                            <p:strVal val="1+#ppt_h/2"/>
-                                          </p:val>
-                                        </p:tav>
-                                        <p:tav tm="100000">
-                                          <p:val>
-                                            <p:strVal val="#ppt_y"/>
-                                          </p:val>
-                                        </p:tav>
-                                      </p:tavLst>
-                                    </p:anim>
-                                  </p:childTnLst>
-                                </p:cTn>
-                              </p:par>
-                            </p:childTnLst>
-                          </p:cTn>
-                        </p:par>
-                      </p:childTnLst>
-                    </p:cTn>
-                  </p:par>
-                  <p:par>
-                    <p:cTn id="15" fill="hold">
-                      <p:stCondLst>
-                        <p:cond delay="indefinite"/>
-                      </p:stCondLst>
-                      <p:childTnLst>
-                        <p:par>
-                          <p:cTn id="16" fill="hold">
-                            <p:stCondLst>
-                              <p:cond delay="0"/>
-                            </p:stCondLst>
-                            <p:childTnLst>
-                              <p:par>
-                                <p:cTn id="17" presetID="2" presetClass="entr" presetSubtype="4" fill="hold" grpId="0" nodeType="clickEffect">
-                                  <p:stCondLst>
-                                    <p:cond delay="0"/>
-                                  </p:stCondLst>
-                                  <p:childTnLst>
-                                    <p:set>
-                                      <p:cBhvr>
-                                        <p:cTn id="18" dur="1" fill="hold">
-                                          <p:stCondLst>
-                                            <p:cond delay="0"/>
-                                          </p:stCondLst>
-                                        </p:cTn>
-                                        <p:tgtEl>
-                                          <p:spTgt spid="3">
-                                            <p:txEl>
-                                              <p:pRg st="3" end="3"/>
-                                            </p:txEl>
-                                          </p:spTgt>
-                                        </p:tgtEl>
-                                        <p:attrNameLst>
-                                          <p:attrName>style.visibility</p:attrName>
-                                        </p:attrNameLst>
-                                      </p:cBhvr>
-                                      <p:to>
-                                        <p:strVal val="visible"/>
-                                      </p:to>
-                                    </p:set>
-                                    <p:anim calcmode="lin" valueType="num">
-                                      <p:cBhvr additive="base">
-                                        <p:cTn id="19" dur="500" fill="hold"/>
-                                        <p:tgtEl>
-                                          <p:spTgt spid="3">
-                                            <p:txEl>
-                                              <p:pRg st="3" end="3"/>
-                                            </p:txEl>
-                                          </p:spTgt>
-                                        </p:tgtEl>
-                                        <p:attrNameLst>
-                                          <p:attrName>ppt_x</p:attrName>
-                                        </p:attrNameLst>
-                                      </p:cBhvr>
-                                      <p:tavLst>
-                                        <p:tav tm="0">
-                                          <p:val>
-                                            <p:strVal val="#ppt_x"/>
-                                          </p:val>
-                                        </p:tav>
-                                        <p:tav tm="100000">
-                                          <p:val>
-                                            <p:strVal val="#ppt_x"/>
-                                          </p:val>
-                                        </p:tav>
-                                      </p:tavLst>
-                                    </p:anim>
-                                    <p:anim calcmode="lin" valueType="num">
-                                      <p:cBhvr additive="base">
-                                        <p:cTn id="20" dur="500" fill="hold"/>
-                                        <p:tgtEl>
-                                          <p:spTgt spid="3">
-                                            <p:txEl>
-                                              <p:pRg st="3" end="3"/>
-                                            </p:txEl>
-                                          </p:spTgt>
-                                        </p:tgtEl>
-                                        <p:attrNameLst>
-                                          <p:attrName>ppt_y</p:attrName>
-                                        </p:attrNameLst>
-                                      </p:cBhvr>
-                                      <p:tavLst>
-                                        <p:tav tm="0">
-                                          <p:val>
-                                            <p:strVal val="1+#ppt_h/2"/>
-                                          </p:val>
-                                        </p:tav>
-                                        <p:tav tm="100000">
-                                          <p:val>
-                                            <p:strVal val="#ppt_y"/>
-                                          </p:val>
-                                        </p:tav>
-                                      </p:tavLst>
-                                    </p:anim>
-                                  </p:childTnLst>
-                                </p:cTn>
-                              </p:par>
-                            </p:childTnLst>
-                          </p:cTn>
-                        </p:par>
-                      </p:childTnLst>
-                    </p:cTn>
-                  </p:par>
-                  <p:par>
-                    <p:cTn id="21" fill="hold">
-                      <p:stCondLst>
-                        <p:cond delay="indefinite"/>
-                      </p:stCondLst>
-                      <p:childTnLst>
-                        <p:par>
-                          <p:cTn id="22" fill="hold">
-                            <p:stCondLst>
-                              <p:cond delay="0"/>
-                            </p:stCondLst>
-                            <p:childTnLst>
-                              <p:par>
-                                <p:cTn id="23" presetID="2" presetClass="entr" presetSubtype="4" fill="hold" grpId="0" nodeType="clickEffect">
-                                  <p:stCondLst>
-                                    <p:cond delay="0"/>
-                                  </p:stCondLst>
-                                  <p:childTnLst>
-                                    <p:set>
-                                      <p:cBhvr>
-                                        <p:cTn id="24" dur="1" fill="hold">
-                                          <p:stCondLst>
-                                            <p:cond delay="0"/>
-                                          </p:stCondLst>
-                                        </p:cTn>
-                                        <p:tgtEl>
-                                          <p:spTgt spid="3">
-                                            <p:txEl>
-                                              <p:pRg st="5" end="5"/>
-                                            </p:txEl>
-                                          </p:spTgt>
-                                        </p:tgtEl>
-                                        <p:attrNameLst>
-                                          <p:attrName>style.visibility</p:attrName>
-                                        </p:attrNameLst>
-                                      </p:cBhvr>
-                                      <p:to>
-                                        <p:strVal val="visible"/>
-                                      </p:to>
-                                    </p:set>
-                                    <p:anim calcmode="lin" valueType="num">
-                                      <p:cBhvr additive="base">
-                                        <p:cTn id="25" dur="500" fill="hold"/>
-                                        <p:tgtEl>
-                                          <p:spTgt spid="3">
-                                            <p:txEl>
-                                              <p:pRg st="5" end="5"/>
-                                            </p:txEl>
-                                          </p:spTgt>
-                                        </p:tgtEl>
-                                        <p:attrNameLst>
-                                          <p:attrName>ppt_x</p:attrName>
-                                        </p:attrNameLst>
-                                      </p:cBhvr>
-                                      <p:tavLst>
-                                        <p:tav tm="0">
-                                          <p:val>
-                                            <p:strVal val="#ppt_x"/>
-                                          </p:val>
-                                        </p:tav>
-                                        <p:tav tm="100000">
-                                          <p:val>
-                                            <p:strVal val="#ppt_x"/>
-                                          </p:val>
-                                        </p:tav>
-                                      </p:tavLst>
-                                    </p:anim>
-                                    <p:anim calcmode="lin" valueType="num">
-                                      <p:cBhvr additive="base">
-                                        <p:cTn id="26" dur="500" fill="hold"/>
-                                        <p:tgtEl>
-                                          <p:spTgt spid="3">
-                                            <p:txEl>
-                                              <p:pRg st="5" end="5"/>
-                                            </p:txEl>
-                                          </p:spTgt>
-                                        </p:tgtEl>
-                                        <p:attrNameLst>
-                                          <p:attrName>ppt_y</p:attrName>
-                                        </p:attrNameLst>
-                                      </p:cBhvr>
-                                      <p:tavLst>
-                                        <p:tav tm="0">
-                                          <p:val>
-                                            <p:strVal val="1+#ppt_h/2"/>
-                                          </p:val>
-                                        </p:tav>
-                                        <p:tav tm="100000">
-                                          <p:val>
-                                            <p:strVal val="#ppt_y"/>
-                                          </p:val>
-                                        </p:tav>
-                                      </p:tavLst>
-                                    </p:anim>
-                                  </p:childTnLst>
-                                </p:cTn>
-                              </p:par>
-                            </p:childTnLst>
-                          </p:cTn>
-                        </p:par>
-                        <p:par>
-                          <p:cTn id="27" fill="hold">
-                            <p:stCondLst>
-                              <p:cond delay="500"/>
-                            </p:stCondLst>
-                            <p:childTnLst>
-                              <p:par>
-                                <p:cTn id="28" presetID="22" presetClass="entr" presetSubtype="4" fill="hold" grpId="0" nodeType="afterEffect">
-                                  <p:stCondLst>
-                                    <p:cond delay="0"/>
-                                  </p:stCondLst>
-                                  <p:childTnLst>
-                                    <p:set>
-                                      <p:cBhvr>
-                                        <p:cTn id="29" dur="1" fill="hold">
-                                          <p:stCondLst>
-                                            <p:cond delay="0"/>
-                                          </p:stCondLst>
-                                        </p:cTn>
-                                        <p:tgtEl>
-                                          <p:spTgt spid="5"/>
-                                        </p:tgtEl>
-                                        <p:attrNameLst>
-                                          <p:attrName>style.visibility</p:attrName>
-                                        </p:attrNameLst>
-                                      </p:cBhvr>
-                                      <p:to>
-                                        <p:strVal val="visible"/>
-                                      </p:to>
-                                    </p:set>
-                                    <p:animEffect transition="in" filter="wipe(down)">
-                                      <p:cBhvr>
-                                        <p:cTn id="30" dur="500"/>
-                                        <p:tgtEl>
-                                          <p:spTgt spid="5"/>
-                                        </p:tgtEl>
-                                      </p:cBhvr>
-                                    </p:animEffect>
-                                  </p:childTnLst>
-                                </p:cTn>
-                              </p:par>
-                            </p:childTnLst>
-                          </p:cTn>
-                        </p:par>
-                      </p:childTnLst>
-                    </p:cTn>
-                  </p:par>
-                </p:childTnLst>
-              </p:cTn>
-              <p:prevCondLst>
-                <p:cond evt="onPrev" delay="0">
-                  <p:tgtEl>
-                    <p:sldTgt/>
-                  </p:tgtEl>
-                </p:cond>
-              </p:prevCondLst>
-              <p:nextCondLst>
-                <p:cond evt="onNext" delay="0">
-                  <p:tgtEl>
-                    <p:sldTgt/>
-                  </p:tgtEl>
-                </p:cond>
-              </p:nextCondLst>
-            </p:seq>
-          </p:childTnLst>
-        </p:cTn>
-      </p:par>
-    </p:tnLst>
-    <p:bldLst>
-      <p:bldP spid="3" grpId="0" uiExpand="1" build="p"/>
-      <p:bldP spid="5" grpId="0" animBg="1"/>
-    </p:bldLst>
-  </p:timing>
 </p:sld>
 </file>
 
@@ -18490,4 +22986,47 @@
   <a:objectDefaults/>
   <a:extraClrSchemeLst/>
 </a:theme>
+</file>
+
+<file path=ppt/theme/themeOverride1.xml><?xml version="1.0" encoding="utf-8"?>
+<a:themeOverride xmlns:a="http://schemas.openxmlformats.org/drawingml/2006/main">
+  <a:clrScheme name="Office">
+    <a:dk1>
+      <a:sysClr val="windowText" lastClr="000000"/>
+    </a:dk1>
+    <a:lt1>
+      <a:sysClr val="window" lastClr="FFFFFF"/>
+    </a:lt1>
+    <a:dk2>
+      <a:srgbClr val="1F497D"/>
+    </a:dk2>
+    <a:lt2>
+      <a:srgbClr val="EEECE1"/>
+    </a:lt2>
+    <a:accent1>
+      <a:srgbClr val="4F81BD"/>
+    </a:accent1>
+    <a:accent2>
+      <a:srgbClr val="C0504D"/>
+    </a:accent2>
+    <a:accent3>
+      <a:srgbClr val="9BBB59"/>
+    </a:accent3>
+    <a:accent4>
+      <a:srgbClr val="8064A2"/>
+    </a:accent4>
+    <a:accent5>
+      <a:srgbClr val="4BACC6"/>
+    </a:accent5>
+    <a:accent6>
+      <a:srgbClr val="F79646"/>
+    </a:accent6>
+    <a:hlink>
+      <a:srgbClr val="0000FF"/>
+    </a:hlink>
+    <a:folHlink>
+      <a:srgbClr val="800080"/>
+    </a:folHlink>
+  </a:clrScheme>
+</a:themeOverride>
 </file>
--- a/topic07-methods/unit-1/talk-5-more-on-methods/e-more-on-methods.pptx
+++ b/topic07-methods/unit-1/talk-5-more-on-methods/e-more-on-methods.pptx
@@ -240,7 +240,7 @@
           <a:p>
             <a:fld id="{58C3D141-1E1C-433C-AD3A-CD56CBBB4F9F}" type="datetimeFigureOut">
               <a:rPr lang="en-IE" smtClean="0"/>
-              <a:t>31/10/2025</a:t>
+              <a:t>03/11/2025</a:t>
             </a:fld>
             <a:endParaRPr lang="en-IE"/>
           </a:p>
@@ -1409,7 +1409,7 @@
             <a:fld id="{1D8BD707-D9CF-40AE-B4C6-C98DA3205C09}" type="datetimeFigureOut">
               <a:rPr lang="en-US" smtClean="0"/>
               <a:pPr/>
-              <a:t>10/31/25</a:t>
+              <a:t>11/3/25</a:t>
             </a:fld>
             <a:endParaRPr lang="en-US"/>
           </a:p>
@@ -1581,7 +1581,7 @@
             <a:fld id="{1D8BD707-D9CF-40AE-B4C6-C98DA3205C09}" type="datetimeFigureOut">
               <a:rPr lang="en-US" smtClean="0"/>
               <a:pPr/>
-              <a:t>10/31/25</a:t>
+              <a:t>11/3/25</a:t>
             </a:fld>
             <a:endParaRPr lang="en-US"/>
           </a:p>
@@ -1763,7 +1763,7 @@
             <a:fld id="{1D8BD707-D9CF-40AE-B4C6-C98DA3205C09}" type="datetimeFigureOut">
               <a:rPr lang="en-US" smtClean="0"/>
               <a:pPr/>
-              <a:t>10/31/25</a:t>
+              <a:t>11/3/25</a:t>
             </a:fld>
             <a:endParaRPr lang="en-US"/>
           </a:p>
@@ -2496,7 +2496,7 @@
             <a:fld id="{1D8BD707-D9CF-40AE-B4C6-C98DA3205C09}" type="datetimeFigureOut">
               <a:rPr lang="en-US" smtClean="0"/>
               <a:pPr/>
-              <a:t>10/31/25</a:t>
+              <a:t>11/3/25</a:t>
             </a:fld>
             <a:endParaRPr lang="en-US"/>
           </a:p>
@@ -3046,7 +3046,7 @@
             <a:fld id="{1D8BD707-D9CF-40AE-B4C6-C98DA3205C09}" type="datetimeFigureOut">
               <a:rPr lang="en-US" smtClean="0"/>
               <a:pPr/>
-              <a:t>10/31/25</a:t>
+              <a:t>11/3/25</a:t>
             </a:fld>
             <a:endParaRPr lang="en-US"/>
           </a:p>
@@ -3347,7 +3347,7 @@
             <a:fld id="{1D8BD707-D9CF-40AE-B4C6-C98DA3205C09}" type="datetimeFigureOut">
               <a:rPr lang="en-US" smtClean="0"/>
               <a:pPr/>
-              <a:t>10/31/25</a:t>
+              <a:t>11/3/25</a:t>
             </a:fld>
             <a:endParaRPr lang="en-US"/>
           </a:p>
@@ -4059,7 +4059,7 @@
             <a:fld id="{1D8BD707-D9CF-40AE-B4C6-C98DA3205C09}" type="datetimeFigureOut">
               <a:rPr lang="en-US" smtClean="0"/>
               <a:pPr/>
-              <a:t>10/31/25</a:t>
+              <a:t>11/3/25</a:t>
             </a:fld>
             <a:endParaRPr lang="en-US"/>
           </a:p>
@@ -4430,7 +4430,7 @@
             <a:fld id="{1D8BD707-D9CF-40AE-B4C6-C98DA3205C09}" type="datetimeFigureOut">
               <a:rPr lang="en-US" smtClean="0"/>
               <a:pPr/>
-              <a:t>10/31/25</a:t>
+              <a:t>11/3/25</a:t>
             </a:fld>
             <a:endParaRPr lang="en-US"/>
           </a:p>
@@ -4808,7 +4808,7 @@
             <a:fld id="{1D8BD707-D9CF-40AE-B4C6-C98DA3205C09}" type="datetimeFigureOut">
               <a:rPr lang="en-US" smtClean="0"/>
               <a:pPr/>
-              <a:t>10/31/25</a:t>
+              <a:t>11/3/25</a:t>
             </a:fld>
             <a:endParaRPr lang="en-US"/>
           </a:p>
@@ -5087,7 +5087,7 @@
             <a:fld id="{1D8BD707-D9CF-40AE-B4C6-C98DA3205C09}" type="datetimeFigureOut">
               <a:rPr lang="en-US" smtClean="0"/>
               <a:pPr/>
-              <a:t>10/31/25</a:t>
+              <a:t>11/3/25</a:t>
             </a:fld>
             <a:endParaRPr lang="en-US"/>
           </a:p>
@@ -5346,7 +5346,7 @@
             <a:fld id="{1D8BD707-D9CF-40AE-B4C6-C98DA3205C09}" type="datetimeFigureOut">
               <a:rPr lang="en-US" smtClean="0"/>
               <a:pPr/>
-              <a:t>10/31/25</a:t>
+              <a:t>11/3/25</a:t>
             </a:fld>
             <a:endParaRPr lang="en-US"/>
           </a:p>
@@ -5566,7 +5566,7 @@
             <a:fld id="{1D8BD707-D9CF-40AE-B4C6-C98DA3205C09}" type="datetimeFigureOut">
               <a:rPr lang="en-US" smtClean="0"/>
               <a:pPr/>
-              <a:t>10/31/25</a:t>
+              <a:t>11/3/25</a:t>
             </a:fld>
             <a:endParaRPr lang="en-US"/>
           </a:p>
@@ -18181,7 +18181,7 @@
         </p:nvSpPr>
         <p:spPr>
           <a:xfrm>
-            <a:off x="8382000" y="2693486"/>
+            <a:off x="8382000" y="2459504"/>
             <a:ext cx="3657600" cy="1938992"/>
           </a:xfrm>
           <a:prstGeom prst="rect">
@@ -19068,7 +19068,7 @@
             </a:r>
             <a:r>
               <a:rPr lang="en-GB" b="1" dirty="0"/>
-              <a:t>double</a:t>
+              <a:t>double.</a:t>
             </a:r>
           </a:p>
         </p:txBody>

--- a/topic07-methods/unit-1/talk-5-more-on-methods/e-more-on-methods.pptx
+++ b/topic07-methods/unit-1/talk-5-more-on-methods/e-more-on-methods.pptx
@@ -240,7 +240,7 @@
           <a:p>
             <a:fld id="{58C3D141-1E1C-433C-AD3A-CD56CBBB4F9F}" type="datetimeFigureOut">
               <a:rPr lang="en-IE" smtClean="0"/>
-              <a:t>03/11/2025</a:t>
+              <a:t>07/11/2025</a:t>
             </a:fld>
             <a:endParaRPr lang="en-IE"/>
           </a:p>
@@ -1409,7 +1409,7 @@
             <a:fld id="{1D8BD707-D9CF-40AE-B4C6-C98DA3205C09}" type="datetimeFigureOut">
               <a:rPr lang="en-US" smtClean="0"/>
               <a:pPr/>
-              <a:t>11/3/25</a:t>
+              <a:t>11/7/25</a:t>
             </a:fld>
             <a:endParaRPr lang="en-US"/>
           </a:p>
@@ -1581,7 +1581,7 @@
             <a:fld id="{1D8BD707-D9CF-40AE-B4C6-C98DA3205C09}" type="datetimeFigureOut">
               <a:rPr lang="en-US" smtClean="0"/>
               <a:pPr/>
-              <a:t>11/3/25</a:t>
+              <a:t>11/7/25</a:t>
             </a:fld>
             <a:endParaRPr lang="en-US"/>
           </a:p>
@@ -1763,7 +1763,7 @@
             <a:fld id="{1D8BD707-D9CF-40AE-B4C6-C98DA3205C09}" type="datetimeFigureOut">
               <a:rPr lang="en-US" smtClean="0"/>
               <a:pPr/>
-              <a:t>11/3/25</a:t>
+              <a:t>11/7/25</a:t>
             </a:fld>
             <a:endParaRPr lang="en-US"/>
           </a:p>
@@ -2496,7 +2496,7 @@
             <a:fld id="{1D8BD707-D9CF-40AE-B4C6-C98DA3205C09}" type="datetimeFigureOut">
               <a:rPr lang="en-US" smtClean="0"/>
               <a:pPr/>
-              <a:t>11/3/25</a:t>
+              <a:t>11/7/25</a:t>
             </a:fld>
             <a:endParaRPr lang="en-US"/>
           </a:p>
@@ -3046,7 +3046,7 @@
             <a:fld id="{1D8BD707-D9CF-40AE-B4C6-C98DA3205C09}" type="datetimeFigureOut">
               <a:rPr lang="en-US" smtClean="0"/>
               <a:pPr/>
-              <a:t>11/3/25</a:t>
+              <a:t>11/7/25</a:t>
             </a:fld>
             <a:endParaRPr lang="en-US"/>
           </a:p>
@@ -3347,7 +3347,7 @@
             <a:fld id="{1D8BD707-D9CF-40AE-B4C6-C98DA3205C09}" type="datetimeFigureOut">
               <a:rPr lang="en-US" smtClean="0"/>
               <a:pPr/>
-              <a:t>11/3/25</a:t>
+              <a:t>11/7/25</a:t>
             </a:fld>
             <a:endParaRPr lang="en-US"/>
           </a:p>
@@ -4059,7 +4059,7 @@
             <a:fld id="{1D8BD707-D9CF-40AE-B4C6-C98DA3205C09}" type="datetimeFigureOut">
               <a:rPr lang="en-US" smtClean="0"/>
               <a:pPr/>
-              <a:t>11/3/25</a:t>
+              <a:t>11/7/25</a:t>
             </a:fld>
             <a:endParaRPr lang="en-US"/>
           </a:p>
@@ -4430,7 +4430,7 @@
             <a:fld id="{1D8BD707-D9CF-40AE-B4C6-C98DA3205C09}" type="datetimeFigureOut">
               <a:rPr lang="en-US" smtClean="0"/>
               <a:pPr/>
-              <a:t>11/3/25</a:t>
+              <a:t>11/7/25</a:t>
             </a:fld>
             <a:endParaRPr lang="en-US"/>
           </a:p>
@@ -4808,7 +4808,7 @@
             <a:fld id="{1D8BD707-D9CF-40AE-B4C6-C98DA3205C09}" type="datetimeFigureOut">
               <a:rPr lang="en-US" smtClean="0"/>
               <a:pPr/>
-              <a:t>11/3/25</a:t>
+              <a:t>11/7/25</a:t>
             </a:fld>
             <a:endParaRPr lang="en-US"/>
           </a:p>
@@ -5087,7 +5087,7 @@
             <a:fld id="{1D8BD707-D9CF-40AE-B4C6-C98DA3205C09}" type="datetimeFigureOut">
               <a:rPr lang="en-US" smtClean="0"/>
               <a:pPr/>
-              <a:t>11/3/25</a:t>
+              <a:t>11/7/25</a:t>
             </a:fld>
             <a:endParaRPr lang="en-US"/>
           </a:p>
@@ -5346,7 +5346,7 @@
             <a:fld id="{1D8BD707-D9CF-40AE-B4C6-C98DA3205C09}" type="datetimeFigureOut">
               <a:rPr lang="en-US" smtClean="0"/>
               <a:pPr/>
-              <a:t>11/3/25</a:t>
+              <a:t>11/7/25</a:t>
             </a:fld>
             <a:endParaRPr lang="en-US"/>
           </a:p>
@@ -5566,7 +5566,7 @@
             <a:fld id="{1D8BD707-D9CF-40AE-B4C6-C98DA3205C09}" type="datetimeFigureOut">
               <a:rPr lang="en-US" smtClean="0"/>
               <a:pPr/>
-              <a:t>11/3/25</a:t>
+              <a:t>11/7/25</a:t>
             </a:fld>
             <a:endParaRPr lang="en-US"/>
           </a:p>
@@ -10064,8 +10064,12 @@
               <a:t>isAdult</a:t>
             </a:r>
             <a:r>
+              <a:rPr lang="en-IE"/>
+              <a:t>(int age) </a:t>
+            </a:r>
+            <a:r>
               <a:rPr lang="en-IE" dirty="0"/>
-              <a:t>() {</a:t>
+              <a:t>{</a:t>
             </a:r>
           </a:p>
           <a:p>
